--- a/output/wordlabs-scrib-3day.pptx
+++ b/output/wordlabs-scrib-3day.pptx
@@ -6040,7 +6040,7 @@
                 <a:ea typeface="Calibri" pitchFamily="34" charset="-122"/>
                 <a:cs typeface="Calibri" pitchFamily="34" charset="-120"/>
               </a:rPr>
-              <a:t>The journalist had to </a:t>
+              <a:t>The teacher asked us to </a:t>
             </a:r>
             <a:pPr algn="l" indent="0" marL="0">
               <a:buNone/>
@@ -6071,7 +6071,7 @@
                 <a:ea typeface="Calibri" pitchFamily="34" charset="-122"/>
                 <a:cs typeface="Calibri" pitchFamily="34" charset="-120"/>
               </a:rPr>
-              <a:t> the speech, then </a:t>
+              <a:t> the poem carefully, then </a:t>
             </a:r>
             <a:pPr algn="l" indent="0" marL="0">
               <a:buNone/>
@@ -6102,7 +6102,7 @@
                 <a:ea typeface="Calibri" pitchFamily="34" charset="-122"/>
                 <a:cs typeface="Calibri" pitchFamily="34" charset="-120"/>
               </a:rPr>
-              <a:t> it clearly in her article.</a:t>
+              <a:t> what it meant to us.</a:t>
             </a:r>
             <a:endParaRPr lang="en-US" sz="1800" dirty="0"/>
           </a:p>
@@ -7868,7 +7868,46 @@
       </p:sp>
       <p:sp>
         <p:nvSpPr>
-          <p:cNvPr id="19" name="Shape 17"/>
+          <p:cNvPr id="19" name="Text 17"/>
+          <p:cNvSpPr/>
+          <p:nvPr/>
+        </p:nvSpPr>
+        <p:spPr>
+          <a:xfrm>
+            <a:off x="2221992" y="2752344"/>
+            <a:ext cx="1828800" cy="182880"/>
+          </a:xfrm>
+          <a:prstGeom prst="rect">
+            <a:avLst/>
+          </a:prstGeom>
+          <a:noFill/>
+          <a:ln/>
+        </p:spPr>
+        <p:txBody>
+          <a:bodyPr wrap="square" lIns="0" tIns="0" rIns="0" bIns="0" rtlCol="0" anchor="t"/>
+          <a:lstStyle/>
+          <a:p>
+            <a:pPr algn="ctr" indent="0" marL="0">
+              <a:buNone/>
+            </a:pPr>
+            <a:r>
+              <a:rPr lang="en-US" sz="700" i="1" dirty="0">
+                <a:solidFill>
+                  <a:srgbClr val="94A3B8"/>
+                </a:solidFill>
+                <a:latin typeface="Calibri" pitchFamily="34" charset="0"/>
+                <a:ea typeface="Calibri" pitchFamily="34" charset="-122"/>
+                <a:cs typeface="Calibri" pitchFamily="34" charset="-120"/>
+              </a:rPr>
+              <a:t>short form of 'trans' before 'sc'</a:t>
+            </a:r>
+            <a:endParaRPr lang="en-US" sz="700" dirty="0"/>
+          </a:p>
+        </p:txBody>
+      </p:sp>
+      <p:sp>
+        <p:nvSpPr>
+          <p:cNvPr id="20" name="Shape 18"/>
           <p:cNvSpPr/>
           <p:nvPr/>
         </p:nvSpPr>
@@ -7902,7 +7941,7 @@
       </p:sp>
       <p:sp>
         <p:nvSpPr>
-          <p:cNvPr id="20" name="Text 18"/>
+          <p:cNvPr id="21" name="Text 19"/>
           <p:cNvSpPr/>
           <p:nvPr/>
         </p:nvSpPr>
@@ -7941,7 +7980,7 @@
       </p:sp>
       <p:sp>
         <p:nvSpPr>
-          <p:cNvPr id="21" name="Text 19"/>
+          <p:cNvPr id="22" name="Text 20"/>
           <p:cNvSpPr/>
           <p:nvPr/>
         </p:nvSpPr>
@@ -7980,7 +8019,7 @@
       </p:sp>
       <p:sp>
         <p:nvSpPr>
-          <p:cNvPr id="22" name="Shape 20"/>
+          <p:cNvPr id="23" name="Shape 21"/>
           <p:cNvSpPr/>
           <p:nvPr/>
         </p:nvSpPr>
@@ -8014,7 +8053,7 @@
       </p:sp>
       <p:sp>
         <p:nvSpPr>
-          <p:cNvPr id="23" name="Text 21"/>
+          <p:cNvPr id="24" name="Text 22"/>
           <p:cNvSpPr/>
           <p:nvPr/>
         </p:nvSpPr>
@@ -8053,7 +8092,7 @@
       </p:sp>
       <p:sp>
         <p:nvSpPr>
-          <p:cNvPr id="24" name="Text 22"/>
+          <p:cNvPr id="25" name="Text 23"/>
           <p:cNvSpPr/>
           <p:nvPr/>
         </p:nvSpPr>
@@ -8092,7 +8131,7 @@
       </p:sp>
       <p:sp>
         <p:nvSpPr>
-          <p:cNvPr id="25" name="Shape 23"/>
+          <p:cNvPr id="26" name="Shape 24"/>
           <p:cNvSpPr/>
           <p:nvPr/>
         </p:nvSpPr>
@@ -8119,7 +8158,7 @@
       </p:sp>
       <p:sp>
         <p:nvSpPr>
-          <p:cNvPr id="26" name="Text 24"/>
+          <p:cNvPr id="27" name="Text 25"/>
           <p:cNvSpPr/>
           <p:nvPr/>
         </p:nvSpPr>
@@ -8158,7 +8197,7 @@
       </p:sp>
       <p:sp>
         <p:nvSpPr>
-          <p:cNvPr id="27" name="Shape 25"/>
+          <p:cNvPr id="28" name="Shape 26"/>
           <p:cNvSpPr/>
           <p:nvPr/>
         </p:nvSpPr>
@@ -8185,7 +8224,7 @@
       </p:sp>
       <p:sp>
         <p:nvSpPr>
-          <p:cNvPr id="28" name="Text 26"/>
+          <p:cNvPr id="29" name="Text 27"/>
           <p:cNvSpPr/>
           <p:nvPr/>
         </p:nvSpPr>
@@ -8224,7 +8263,7 @@
       </p:sp>
       <p:sp>
         <p:nvSpPr>
-          <p:cNvPr id="29" name="Shape 27"/>
+          <p:cNvPr id="30" name="Shape 28"/>
           <p:cNvSpPr/>
           <p:nvPr/>
         </p:nvSpPr>
@@ -8251,7 +8290,7 @@
       </p:sp>
       <p:sp>
         <p:nvSpPr>
-          <p:cNvPr id="30" name="Text 28"/>
+          <p:cNvPr id="31" name="Text 29"/>
           <p:cNvSpPr/>
           <p:nvPr/>
         </p:nvSpPr>
@@ -8290,7 +8329,7 @@
       </p:sp>
       <p:sp>
         <p:nvSpPr>
-          <p:cNvPr id="31" name="Shape 29"/>
+          <p:cNvPr id="32" name="Shape 30"/>
           <p:cNvSpPr/>
           <p:nvPr/>
         </p:nvSpPr>
@@ -8317,7 +8356,7 @@
       </p:sp>
       <p:sp>
         <p:nvSpPr>
-          <p:cNvPr id="32" name="Text 30"/>
+          <p:cNvPr id="33" name="Text 31"/>
           <p:cNvSpPr/>
           <p:nvPr/>
         </p:nvSpPr>
@@ -8965,7 +9004,46 @@
       </p:sp>
       <p:sp>
         <p:nvSpPr>
-          <p:cNvPr id="19" name="Shape 17"/>
+          <p:cNvPr id="19" name="Text 17"/>
+          <p:cNvSpPr/>
+          <p:nvPr/>
+        </p:nvSpPr>
+        <p:spPr>
+          <a:xfrm>
+            <a:off x="2221992" y="2752344"/>
+            <a:ext cx="1828800" cy="182880"/>
+          </a:xfrm>
+          <a:prstGeom prst="rect">
+            <a:avLst/>
+          </a:prstGeom>
+          <a:noFill/>
+          <a:ln/>
+        </p:spPr>
+        <p:txBody>
+          <a:bodyPr wrap="square" lIns="0" tIns="0" rIns="0" bIns="0" rtlCol="0" anchor="t"/>
+          <a:lstStyle/>
+          <a:p>
+            <a:pPr algn="ctr" indent="0" marL="0">
+              <a:buNone/>
+            </a:pPr>
+            <a:r>
+              <a:rPr lang="en-US" sz="700" i="1" dirty="0">
+                <a:solidFill>
+                  <a:srgbClr val="94A3B8"/>
+                </a:solidFill>
+                <a:latin typeface="Calibri" pitchFamily="34" charset="0"/>
+                <a:ea typeface="Calibri" pitchFamily="34" charset="-122"/>
+                <a:cs typeface="Calibri" pitchFamily="34" charset="-120"/>
+              </a:rPr>
+              <a:t>short form of 'trans' before 'sc'</a:t>
+            </a:r>
+            <a:endParaRPr lang="en-US" sz="700" dirty="0"/>
+          </a:p>
+        </p:txBody>
+      </p:sp>
+      <p:sp>
+        <p:nvSpPr>
+          <p:cNvPr id="20" name="Shape 18"/>
           <p:cNvSpPr/>
           <p:nvPr/>
         </p:nvSpPr>
@@ -8999,7 +9077,7 @@
       </p:sp>
       <p:sp>
         <p:nvSpPr>
-          <p:cNvPr id="20" name="Text 18"/>
+          <p:cNvPr id="21" name="Text 19"/>
           <p:cNvSpPr/>
           <p:nvPr/>
         </p:nvSpPr>
@@ -9038,7 +9116,7 @@
       </p:sp>
       <p:sp>
         <p:nvSpPr>
-          <p:cNvPr id="21" name="Text 19"/>
+          <p:cNvPr id="22" name="Text 20"/>
           <p:cNvSpPr/>
           <p:nvPr/>
         </p:nvSpPr>
@@ -9077,7 +9155,7 @@
       </p:sp>
       <p:sp>
         <p:nvSpPr>
-          <p:cNvPr id="22" name="Shape 20"/>
+          <p:cNvPr id="23" name="Shape 21"/>
           <p:cNvSpPr/>
           <p:nvPr/>
         </p:nvSpPr>
@@ -9111,7 +9189,7 @@
       </p:sp>
       <p:sp>
         <p:nvSpPr>
-          <p:cNvPr id="23" name="Text 21"/>
+          <p:cNvPr id="24" name="Text 22"/>
           <p:cNvSpPr/>
           <p:nvPr/>
         </p:nvSpPr>
@@ -9150,7 +9228,7 @@
       </p:sp>
       <p:sp>
         <p:nvSpPr>
-          <p:cNvPr id="24" name="Text 22"/>
+          <p:cNvPr id="25" name="Text 23"/>
           <p:cNvSpPr/>
           <p:nvPr/>
         </p:nvSpPr>
@@ -9189,7 +9267,7 @@
       </p:sp>
       <p:sp>
         <p:nvSpPr>
-          <p:cNvPr id="25" name="Shape 23"/>
+          <p:cNvPr id="26" name="Shape 24"/>
           <p:cNvSpPr/>
           <p:nvPr/>
         </p:nvSpPr>
@@ -9216,7 +9294,7 @@
       </p:sp>
       <p:sp>
         <p:nvSpPr>
-          <p:cNvPr id="26" name="Text 24"/>
+          <p:cNvPr id="27" name="Text 25"/>
           <p:cNvSpPr/>
           <p:nvPr/>
         </p:nvSpPr>
@@ -9255,7 +9333,7 @@
       </p:sp>
       <p:sp>
         <p:nvSpPr>
-          <p:cNvPr id="27" name="Shape 25"/>
+          <p:cNvPr id="28" name="Shape 26"/>
           <p:cNvSpPr/>
           <p:nvPr/>
         </p:nvSpPr>
@@ -9282,7 +9360,7 @@
       </p:sp>
       <p:sp>
         <p:nvSpPr>
-          <p:cNvPr id="28" name="Shape 26"/>
+          <p:cNvPr id="29" name="Shape 27"/>
           <p:cNvSpPr/>
           <p:nvPr/>
         </p:nvSpPr>
@@ -9309,7 +9387,7 @@
       </p:sp>
       <p:sp>
         <p:nvSpPr>
-          <p:cNvPr id="29" name="Text 27"/>
+          <p:cNvPr id="30" name="Text 28"/>
           <p:cNvSpPr/>
           <p:nvPr/>
         </p:nvSpPr>
@@ -9348,7 +9426,7 @@
       </p:sp>
       <p:sp>
         <p:nvSpPr>
-          <p:cNvPr id="30" name="Text 28"/>
+          <p:cNvPr id="31" name="Text 29"/>
           <p:cNvSpPr/>
           <p:nvPr/>
         </p:nvSpPr>
@@ -9387,7 +9465,7 @@
       </p:sp>
       <p:sp>
         <p:nvSpPr>
-          <p:cNvPr id="31" name="Shape 29"/>
+          <p:cNvPr id="32" name="Shape 30"/>
           <p:cNvSpPr/>
           <p:nvPr/>
         </p:nvSpPr>
@@ -9414,7 +9492,7 @@
       </p:sp>
       <p:sp>
         <p:nvSpPr>
-          <p:cNvPr id="32" name="Text 30"/>
+          <p:cNvPr id="33" name="Text 31"/>
           <p:cNvSpPr/>
           <p:nvPr/>
         </p:nvSpPr>
@@ -9453,7 +9531,7 @@
       </p:sp>
       <p:sp>
         <p:nvSpPr>
-          <p:cNvPr id="33" name="Shape 31"/>
+          <p:cNvPr id="34" name="Shape 32"/>
           <p:cNvSpPr/>
           <p:nvPr/>
         </p:nvSpPr>
@@ -9480,7 +9558,7 @@
       </p:sp>
       <p:sp>
         <p:nvSpPr>
-          <p:cNvPr id="34" name="Text 32"/>
+          <p:cNvPr id="35" name="Text 33"/>
           <p:cNvSpPr/>
           <p:nvPr/>
         </p:nvSpPr>
@@ -9519,7 +9597,7 @@
       </p:sp>
       <p:sp>
         <p:nvSpPr>
-          <p:cNvPr id="35" name="Shape 33"/>
+          <p:cNvPr id="36" name="Shape 34"/>
           <p:cNvSpPr/>
           <p:nvPr/>
         </p:nvSpPr>
@@ -9546,7 +9624,7 @@
       </p:sp>
       <p:sp>
         <p:nvSpPr>
-          <p:cNvPr id="36" name="Text 34"/>
+          <p:cNvPr id="37" name="Text 35"/>
           <p:cNvSpPr/>
           <p:nvPr/>
         </p:nvSpPr>
@@ -10194,7 +10272,46 @@
       </p:sp>
       <p:sp>
         <p:nvSpPr>
-          <p:cNvPr id="19" name="Shape 17"/>
+          <p:cNvPr id="19" name="Text 17"/>
+          <p:cNvSpPr/>
+          <p:nvPr/>
+        </p:nvSpPr>
+        <p:spPr>
+          <a:xfrm>
+            <a:off x="2221992" y="2752344"/>
+            <a:ext cx="1828800" cy="182880"/>
+          </a:xfrm>
+          <a:prstGeom prst="rect">
+            <a:avLst/>
+          </a:prstGeom>
+          <a:noFill/>
+          <a:ln/>
+        </p:spPr>
+        <p:txBody>
+          <a:bodyPr wrap="square" lIns="0" tIns="0" rIns="0" bIns="0" rtlCol="0" anchor="t"/>
+          <a:lstStyle/>
+          <a:p>
+            <a:pPr algn="ctr" indent="0" marL="0">
+              <a:buNone/>
+            </a:pPr>
+            <a:r>
+              <a:rPr lang="en-US" sz="700" i="1" dirty="0">
+                <a:solidFill>
+                  <a:srgbClr val="94A3B8"/>
+                </a:solidFill>
+                <a:latin typeface="Calibri" pitchFamily="34" charset="0"/>
+                <a:ea typeface="Calibri" pitchFamily="34" charset="-122"/>
+                <a:cs typeface="Calibri" pitchFamily="34" charset="-120"/>
+              </a:rPr>
+              <a:t>short form of 'trans' before 'sc'</a:t>
+            </a:r>
+            <a:endParaRPr lang="en-US" sz="700" dirty="0"/>
+          </a:p>
+        </p:txBody>
+      </p:sp>
+      <p:sp>
+        <p:nvSpPr>
+          <p:cNvPr id="20" name="Shape 18"/>
           <p:cNvSpPr/>
           <p:nvPr/>
         </p:nvSpPr>
@@ -10228,7 +10345,7 @@
       </p:sp>
       <p:sp>
         <p:nvSpPr>
-          <p:cNvPr id="20" name="Text 18"/>
+          <p:cNvPr id="21" name="Text 19"/>
           <p:cNvSpPr/>
           <p:nvPr/>
         </p:nvSpPr>
@@ -10267,7 +10384,7 @@
       </p:sp>
       <p:sp>
         <p:nvSpPr>
-          <p:cNvPr id="21" name="Text 19"/>
+          <p:cNvPr id="22" name="Text 20"/>
           <p:cNvSpPr/>
           <p:nvPr/>
         </p:nvSpPr>
@@ -10306,7 +10423,7 @@
       </p:sp>
       <p:sp>
         <p:nvSpPr>
-          <p:cNvPr id="22" name="Shape 20"/>
+          <p:cNvPr id="23" name="Shape 21"/>
           <p:cNvSpPr/>
           <p:nvPr/>
         </p:nvSpPr>
@@ -10340,7 +10457,7 @@
       </p:sp>
       <p:sp>
         <p:nvSpPr>
-          <p:cNvPr id="23" name="Text 21"/>
+          <p:cNvPr id="24" name="Text 22"/>
           <p:cNvSpPr/>
           <p:nvPr/>
         </p:nvSpPr>
@@ -10379,7 +10496,7 @@
       </p:sp>
       <p:sp>
         <p:nvSpPr>
-          <p:cNvPr id="24" name="Text 22"/>
+          <p:cNvPr id="25" name="Text 23"/>
           <p:cNvSpPr/>
           <p:nvPr/>
         </p:nvSpPr>
@@ -10418,7 +10535,7 @@
       </p:sp>
       <p:sp>
         <p:nvSpPr>
-          <p:cNvPr id="25" name="Shape 23"/>
+          <p:cNvPr id="26" name="Shape 24"/>
           <p:cNvSpPr/>
           <p:nvPr/>
         </p:nvSpPr>
@@ -10445,7 +10562,7 @@
       </p:sp>
       <p:sp>
         <p:nvSpPr>
-          <p:cNvPr id="26" name="Text 24"/>
+          <p:cNvPr id="27" name="Text 25"/>
           <p:cNvSpPr/>
           <p:nvPr/>
         </p:nvSpPr>
@@ -10484,7 +10601,7 @@
       </p:sp>
       <p:sp>
         <p:nvSpPr>
-          <p:cNvPr id="27" name="Shape 25"/>
+          <p:cNvPr id="28" name="Shape 26"/>
           <p:cNvSpPr/>
           <p:nvPr/>
         </p:nvSpPr>
@@ -10511,7 +10628,7 @@
       </p:sp>
       <p:sp>
         <p:nvSpPr>
-          <p:cNvPr id="28" name="Shape 26"/>
+          <p:cNvPr id="29" name="Shape 27"/>
           <p:cNvSpPr/>
           <p:nvPr/>
         </p:nvSpPr>
@@ -10538,7 +10655,7 @@
       </p:sp>
       <p:sp>
         <p:nvSpPr>
-          <p:cNvPr id="29" name="Text 27"/>
+          <p:cNvPr id="30" name="Text 28"/>
           <p:cNvSpPr/>
           <p:nvPr/>
         </p:nvSpPr>
@@ -10577,7 +10694,7 @@
       </p:sp>
       <p:sp>
         <p:nvSpPr>
-          <p:cNvPr id="30" name="Text 28"/>
+          <p:cNvPr id="31" name="Text 29"/>
           <p:cNvSpPr/>
           <p:nvPr/>
         </p:nvSpPr>
@@ -10616,7 +10733,7 @@
       </p:sp>
       <p:sp>
         <p:nvSpPr>
-          <p:cNvPr id="31" name="Shape 29"/>
+          <p:cNvPr id="32" name="Shape 30"/>
           <p:cNvSpPr/>
           <p:nvPr/>
         </p:nvSpPr>
@@ -10643,7 +10760,7 @@
       </p:sp>
       <p:sp>
         <p:nvSpPr>
-          <p:cNvPr id="32" name="Text 30"/>
+          <p:cNvPr id="33" name="Text 31"/>
           <p:cNvSpPr/>
           <p:nvPr/>
         </p:nvSpPr>
@@ -10682,7 +10799,7 @@
       </p:sp>
       <p:sp>
         <p:nvSpPr>
-          <p:cNvPr id="33" name="Shape 31"/>
+          <p:cNvPr id="34" name="Shape 32"/>
           <p:cNvSpPr/>
           <p:nvPr/>
         </p:nvSpPr>
@@ -10709,7 +10826,7 @@
       </p:sp>
       <p:sp>
         <p:nvSpPr>
-          <p:cNvPr id="34" name="Text 32"/>
+          <p:cNvPr id="35" name="Text 33"/>
           <p:cNvSpPr/>
           <p:nvPr/>
         </p:nvSpPr>
@@ -10748,7 +10865,7 @@
       </p:sp>
       <p:sp>
         <p:nvSpPr>
-          <p:cNvPr id="35" name="Shape 33"/>
+          <p:cNvPr id="36" name="Shape 34"/>
           <p:cNvSpPr/>
           <p:nvPr/>
         </p:nvSpPr>
@@ -10775,14 +10892,14 @@
       </p:sp>
       <p:sp>
         <p:nvSpPr>
-          <p:cNvPr id="36" name="Shape 34"/>
-          <p:cNvSpPr/>
-          <p:nvPr/>
-        </p:nvSpPr>
-        <p:spPr>
-          <a:xfrm>
-            <a:off x="1951828" y="4169664"/>
-            <a:ext cx="603504" cy="384048"/>
+          <p:cNvPr id="37" name="Shape 35"/>
+          <p:cNvSpPr/>
+          <p:nvPr/>
+        </p:nvSpPr>
+        <p:spPr>
+          <a:xfrm>
+            <a:off x="1951330" y="4169664"/>
+            <a:ext cx="676656" cy="384048"/>
           </a:xfrm>
           <a:prstGeom prst="rect">
             <a:avLst>
@@ -10802,14 +10919,14 @@
       </p:sp>
       <p:sp>
         <p:nvSpPr>
-          <p:cNvPr id="37" name="Text 35"/>
-          <p:cNvSpPr/>
-          <p:nvPr/>
-        </p:nvSpPr>
-        <p:spPr>
-          <a:xfrm>
-            <a:off x="1951828" y="4169664"/>
-            <a:ext cx="603504" cy="384048"/>
+          <p:cNvPr id="38" name="Text 36"/>
+          <p:cNvSpPr/>
+          <p:nvPr/>
+        </p:nvSpPr>
+        <p:spPr>
+          <a:xfrm>
+            <a:off x="1951330" y="4169664"/>
+            <a:ext cx="676656" cy="384048"/>
           </a:xfrm>
           <a:prstGeom prst="rect">
             <a:avLst/>
@@ -10841,14 +10958,14 @@
       </p:sp>
       <p:sp>
         <p:nvSpPr>
-          <p:cNvPr id="38" name="Shape 36"/>
-          <p:cNvSpPr/>
-          <p:nvPr/>
-        </p:nvSpPr>
-        <p:spPr>
-          <a:xfrm>
-            <a:off x="2605209" y="4169664"/>
-            <a:ext cx="603504" cy="384048"/>
+          <p:cNvPr id="39" name="Shape 37"/>
+          <p:cNvSpPr/>
+          <p:nvPr/>
+        </p:nvSpPr>
+        <p:spPr>
+          <a:xfrm>
+            <a:off x="2677363" y="4169664"/>
+            <a:ext cx="676656" cy="384048"/>
           </a:xfrm>
           <a:prstGeom prst="rect">
             <a:avLst>
@@ -10868,14 +10985,14 @@
       </p:sp>
       <p:sp>
         <p:nvSpPr>
-          <p:cNvPr id="39" name="Text 37"/>
-          <p:cNvSpPr/>
-          <p:nvPr/>
-        </p:nvSpPr>
-        <p:spPr>
-          <a:xfrm>
-            <a:off x="2605209" y="4169664"/>
-            <a:ext cx="603504" cy="384048"/>
+          <p:cNvPr id="40" name="Text 38"/>
+          <p:cNvSpPr/>
+          <p:nvPr/>
+        </p:nvSpPr>
+        <p:spPr>
+          <a:xfrm>
+            <a:off x="2677363" y="4169664"/>
+            <a:ext cx="676656" cy="384048"/>
           </a:xfrm>
           <a:prstGeom prst="rect">
             <a:avLst/>
@@ -10907,14 +11024,14 @@
       </p:sp>
       <p:sp>
         <p:nvSpPr>
-          <p:cNvPr id="40" name="Shape 38"/>
-          <p:cNvSpPr/>
-          <p:nvPr/>
-        </p:nvSpPr>
-        <p:spPr>
-          <a:xfrm>
-            <a:off x="3258589" y="4169664"/>
-            <a:ext cx="603504" cy="384048"/>
+          <p:cNvPr id="41" name="Shape 39"/>
+          <p:cNvSpPr/>
+          <p:nvPr/>
+        </p:nvSpPr>
+        <p:spPr>
+          <a:xfrm>
+            <a:off x="3403397" y="4169664"/>
+            <a:ext cx="676656" cy="384048"/>
           </a:xfrm>
           <a:prstGeom prst="rect">
             <a:avLst>
@@ -10934,14 +11051,14 @@
       </p:sp>
       <p:sp>
         <p:nvSpPr>
-          <p:cNvPr id="41" name="Text 39"/>
-          <p:cNvSpPr/>
-          <p:nvPr/>
-        </p:nvSpPr>
-        <p:spPr>
-          <a:xfrm>
-            <a:off x="3258589" y="4169664"/>
-            <a:ext cx="603504" cy="384048"/>
+          <p:cNvPr id="42" name="Text 40"/>
+          <p:cNvSpPr/>
+          <p:nvPr/>
+        </p:nvSpPr>
+        <p:spPr>
+          <a:xfrm>
+            <a:off x="3403397" y="4169664"/>
+            <a:ext cx="676656" cy="384048"/>
           </a:xfrm>
           <a:prstGeom prst="rect">
             <a:avLst/>
@@ -10973,14 +11090,14 @@
       </p:sp>
       <p:sp>
         <p:nvSpPr>
-          <p:cNvPr id="42" name="Shape 40"/>
-          <p:cNvSpPr/>
-          <p:nvPr/>
-        </p:nvSpPr>
-        <p:spPr>
-          <a:xfrm>
-            <a:off x="3911969" y="4169664"/>
-            <a:ext cx="603504" cy="384048"/>
+          <p:cNvPr id="43" name="Shape 41"/>
+          <p:cNvSpPr/>
+          <p:nvPr/>
+        </p:nvSpPr>
+        <p:spPr>
+          <a:xfrm>
+            <a:off x="4129430" y="4169664"/>
+            <a:ext cx="676656" cy="384048"/>
           </a:xfrm>
           <a:prstGeom prst="rect">
             <a:avLst>
@@ -11000,14 +11117,14 @@
       </p:sp>
       <p:sp>
         <p:nvSpPr>
-          <p:cNvPr id="43" name="Text 41"/>
-          <p:cNvSpPr/>
-          <p:nvPr/>
-        </p:nvSpPr>
-        <p:spPr>
-          <a:xfrm>
-            <a:off x="3911969" y="4169664"/>
-            <a:ext cx="603504" cy="384048"/>
+          <p:cNvPr id="44" name="Text 42"/>
+          <p:cNvSpPr/>
+          <p:nvPr/>
+        </p:nvSpPr>
+        <p:spPr>
+          <a:xfrm>
+            <a:off x="4129430" y="4169664"/>
+            <a:ext cx="676656" cy="384048"/>
           </a:xfrm>
           <a:prstGeom prst="rect">
             <a:avLst/>
@@ -11039,14 +11156,14 @@
       </p:sp>
       <p:sp>
         <p:nvSpPr>
-          <p:cNvPr id="44" name="Shape 42"/>
-          <p:cNvSpPr/>
-          <p:nvPr/>
-        </p:nvSpPr>
-        <p:spPr>
-          <a:xfrm>
-            <a:off x="4565350" y="4169664"/>
-            <a:ext cx="603504" cy="384048"/>
+          <p:cNvPr id="45" name="Shape 43"/>
+          <p:cNvSpPr/>
+          <p:nvPr/>
+        </p:nvSpPr>
+        <p:spPr>
+          <a:xfrm>
+            <a:off x="4855464" y="4169664"/>
+            <a:ext cx="676656" cy="384048"/>
           </a:xfrm>
           <a:prstGeom prst="rect">
             <a:avLst>
@@ -11066,14 +11183,14 @@
       </p:sp>
       <p:sp>
         <p:nvSpPr>
-          <p:cNvPr id="45" name="Text 43"/>
-          <p:cNvSpPr/>
-          <p:nvPr/>
-        </p:nvSpPr>
-        <p:spPr>
-          <a:xfrm>
-            <a:off x="4565350" y="4169664"/>
-            <a:ext cx="603504" cy="384048"/>
+          <p:cNvPr id="46" name="Text 44"/>
+          <p:cNvSpPr/>
+          <p:nvPr/>
+        </p:nvSpPr>
+        <p:spPr>
+          <a:xfrm>
+            <a:off x="4855464" y="4169664"/>
+            <a:ext cx="676656" cy="384048"/>
           </a:xfrm>
           <a:prstGeom prst="rect">
             <a:avLst/>
@@ -11105,14 +11222,14 @@
       </p:sp>
       <p:sp>
         <p:nvSpPr>
-          <p:cNvPr id="46" name="Shape 44"/>
-          <p:cNvSpPr/>
-          <p:nvPr/>
-        </p:nvSpPr>
-        <p:spPr>
-          <a:xfrm>
-            <a:off x="5218730" y="4169664"/>
-            <a:ext cx="603504" cy="384048"/>
+          <p:cNvPr id="47" name="Shape 45"/>
+          <p:cNvSpPr/>
+          <p:nvPr/>
+        </p:nvSpPr>
+        <p:spPr>
+          <a:xfrm>
+            <a:off x="5581498" y="4169664"/>
+            <a:ext cx="676656" cy="384048"/>
           </a:xfrm>
           <a:prstGeom prst="rect">
             <a:avLst>
@@ -11132,14 +11249,14 @@
       </p:sp>
       <p:sp>
         <p:nvSpPr>
-          <p:cNvPr id="47" name="Text 45"/>
-          <p:cNvSpPr/>
-          <p:nvPr/>
-        </p:nvSpPr>
-        <p:spPr>
-          <a:xfrm>
-            <a:off x="5218730" y="4169664"/>
-            <a:ext cx="603504" cy="384048"/>
+          <p:cNvPr id="48" name="Text 46"/>
+          <p:cNvSpPr/>
+          <p:nvPr/>
+        </p:nvSpPr>
+        <p:spPr>
+          <a:xfrm>
+            <a:off x="5581498" y="4169664"/>
+            <a:ext cx="676656" cy="384048"/>
           </a:xfrm>
           <a:prstGeom prst="rect">
             <a:avLst/>
@@ -11171,14 +11288,14 @@
       </p:sp>
       <p:sp>
         <p:nvSpPr>
-          <p:cNvPr id="48" name="Text 46"/>
-          <p:cNvSpPr/>
-          <p:nvPr/>
-        </p:nvSpPr>
-        <p:spPr>
-          <a:xfrm>
-            <a:off x="5218730" y="4572000"/>
-            <a:ext cx="603504" cy="219456"/>
+          <p:cNvPr id="49" name="Text 47"/>
+          <p:cNvSpPr/>
+          <p:nvPr/>
+        </p:nvSpPr>
+        <p:spPr>
+          <a:xfrm>
+            <a:off x="5581498" y="4572000"/>
+            <a:ext cx="676656" cy="219456"/>
           </a:xfrm>
           <a:prstGeom prst="rect">
             <a:avLst/>
@@ -11210,14 +11327,14 @@
       </p:sp>
       <p:sp>
         <p:nvSpPr>
-          <p:cNvPr id="49" name="Shape 47"/>
-          <p:cNvSpPr/>
-          <p:nvPr/>
-        </p:nvSpPr>
-        <p:spPr>
-          <a:xfrm>
-            <a:off x="5872111" y="4169664"/>
-            <a:ext cx="603504" cy="384048"/>
+          <p:cNvPr id="50" name="Shape 48"/>
+          <p:cNvSpPr/>
+          <p:nvPr/>
+        </p:nvSpPr>
+        <p:spPr>
+          <a:xfrm>
+            <a:off x="6307531" y="4169664"/>
+            <a:ext cx="676656" cy="384048"/>
           </a:xfrm>
           <a:prstGeom prst="rect">
             <a:avLst>
@@ -11237,14 +11354,14 @@
       </p:sp>
       <p:sp>
         <p:nvSpPr>
-          <p:cNvPr id="50" name="Text 48"/>
-          <p:cNvSpPr/>
-          <p:nvPr/>
-        </p:nvSpPr>
-        <p:spPr>
-          <a:xfrm>
-            <a:off x="5872111" y="4169664"/>
-            <a:ext cx="603504" cy="384048"/>
+          <p:cNvPr id="51" name="Text 49"/>
+          <p:cNvSpPr/>
+          <p:nvPr/>
+        </p:nvSpPr>
+        <p:spPr>
+          <a:xfrm>
+            <a:off x="6307531" y="4169664"/>
+            <a:ext cx="676656" cy="384048"/>
           </a:xfrm>
           <a:prstGeom prst="rect">
             <a:avLst/>
@@ -11276,14 +11393,14 @@
       </p:sp>
       <p:sp>
         <p:nvSpPr>
-          <p:cNvPr id="51" name="Shape 49"/>
-          <p:cNvSpPr/>
-          <p:nvPr/>
-        </p:nvSpPr>
-        <p:spPr>
-          <a:xfrm>
-            <a:off x="6525491" y="4169664"/>
-            <a:ext cx="603504" cy="384048"/>
+          <p:cNvPr id="52" name="Shape 50"/>
+          <p:cNvSpPr/>
+          <p:nvPr/>
+        </p:nvSpPr>
+        <p:spPr>
+          <a:xfrm>
+            <a:off x="7033565" y="4169664"/>
+            <a:ext cx="676656" cy="384048"/>
           </a:xfrm>
           <a:prstGeom prst="rect">
             <a:avLst>
@@ -11303,14 +11420,14 @@
       </p:sp>
       <p:sp>
         <p:nvSpPr>
-          <p:cNvPr id="52" name="Text 50"/>
-          <p:cNvSpPr/>
-          <p:nvPr/>
-        </p:nvSpPr>
-        <p:spPr>
-          <a:xfrm>
-            <a:off x="6525491" y="4169664"/>
-            <a:ext cx="603504" cy="384048"/>
+          <p:cNvPr id="53" name="Text 51"/>
+          <p:cNvSpPr/>
+          <p:nvPr/>
+        </p:nvSpPr>
+        <p:spPr>
+          <a:xfrm>
+            <a:off x="7033565" y="4169664"/>
+            <a:ext cx="676656" cy="384048"/>
           </a:xfrm>
           <a:prstGeom prst="rect">
             <a:avLst/>
@@ -11342,14 +11459,14 @@
       </p:sp>
       <p:sp>
         <p:nvSpPr>
-          <p:cNvPr id="53" name="Shape 51"/>
-          <p:cNvSpPr/>
-          <p:nvPr/>
-        </p:nvSpPr>
-        <p:spPr>
-          <a:xfrm>
-            <a:off x="7178871" y="4169664"/>
-            <a:ext cx="603504" cy="384048"/>
+          <p:cNvPr id="54" name="Shape 52"/>
+          <p:cNvSpPr/>
+          <p:nvPr/>
+        </p:nvSpPr>
+        <p:spPr>
+          <a:xfrm>
+            <a:off x="7759598" y="4169664"/>
+            <a:ext cx="676656" cy="384048"/>
           </a:xfrm>
           <a:prstGeom prst="rect">
             <a:avLst>
@@ -11369,14 +11486,14 @@
       </p:sp>
       <p:sp>
         <p:nvSpPr>
-          <p:cNvPr id="54" name="Text 52"/>
-          <p:cNvSpPr/>
-          <p:nvPr/>
-        </p:nvSpPr>
-        <p:spPr>
-          <a:xfrm>
-            <a:off x="7178871" y="4169664"/>
-            <a:ext cx="603504" cy="384048"/>
+          <p:cNvPr id="55" name="Text 53"/>
+          <p:cNvSpPr/>
+          <p:nvPr/>
+        </p:nvSpPr>
+        <p:spPr>
+          <a:xfrm>
+            <a:off x="7759598" y="4169664"/>
+            <a:ext cx="676656" cy="384048"/>
           </a:xfrm>
           <a:prstGeom prst="rect">
             <a:avLst/>
@@ -11400,73 +11517,7 @@
                 <a:ea typeface="Trebuchet MS" pitchFamily="34" charset="-122"/>
                 <a:cs typeface="Trebuchet MS" pitchFamily="34" charset="-120"/>
               </a:rPr>
-              <a:t>b</a:t>
-            </a:r>
-            <a:endParaRPr lang="en-US" sz="900" dirty="0"/>
-          </a:p>
-        </p:txBody>
-      </p:sp>
-      <p:sp>
-        <p:nvSpPr>
-          <p:cNvPr id="55" name="Shape 53"/>
-          <p:cNvSpPr/>
-          <p:nvPr/>
-        </p:nvSpPr>
-        <p:spPr>
-          <a:xfrm>
-            <a:off x="7832252" y="4169664"/>
-            <a:ext cx="603504" cy="384048"/>
-          </a:xfrm>
-          <a:prstGeom prst="rect">
-            <a:avLst>
-              <a:gd name="adj" fmla="val 9524"/>
-            </a:avLst>
-          </a:prstGeom>
-          <a:solidFill>
-            <a:srgbClr val="FFFFFF"/>
-          </a:solidFill>
-          <a:ln w="12700">
-            <a:solidFill>
-              <a:srgbClr val="DB2777"/>
-            </a:solidFill>
-            <a:prstDash val="solid"/>
-          </a:ln>
-        </p:spPr>
-      </p:sp>
-      <p:sp>
-        <p:nvSpPr>
-          <p:cNvPr id="56" name="Text 54"/>
-          <p:cNvSpPr/>
-          <p:nvPr/>
-        </p:nvSpPr>
-        <p:spPr>
-          <a:xfrm>
-            <a:off x="7832252" y="4169664"/>
-            <a:ext cx="603504" cy="384048"/>
-          </a:xfrm>
-          <a:prstGeom prst="rect">
-            <a:avLst/>
-          </a:prstGeom>
-          <a:noFill/>
-          <a:ln/>
-        </p:spPr>
-        <p:txBody>
-          <a:bodyPr wrap="square" lIns="0" tIns="0" rIns="0" bIns="0" rtlCol="0" anchor="ctr"/>
-          <a:lstStyle/>
-          <a:p>
-            <a:pPr algn="ctr" indent="0" marL="0">
-              <a:buNone/>
-            </a:pPr>
-            <a:r>
-              <a:rPr lang="en-US" sz="900" b="1" dirty="0">
-                <a:solidFill>
-                  <a:srgbClr val="9D174D"/>
-                </a:solidFill>
-                <a:latin typeface="Trebuchet MS" pitchFamily="34" charset="0"/>
-                <a:ea typeface="Trebuchet MS" pitchFamily="34" charset="-122"/>
-                <a:cs typeface="Trebuchet MS" pitchFamily="34" charset="-120"/>
-              </a:rPr>
-              <a:t>e</a:t>
+              <a:t>be</a:t>
             </a:r>
             <a:endParaRPr lang="en-US" sz="900" dirty="0"/>
           </a:p>
@@ -12902,7 +12953,7 @@
                 <a:ea typeface="Calibri" pitchFamily="34" charset="-122"/>
                 <a:cs typeface="Calibri" pitchFamily="34" charset="-120"/>
               </a:rPr>
-              <a:t>down, away, about</a:t>
+              <a:t>down, fully</a:t>
             </a:r>
             <a:endParaRPr lang="en-US" sz="850" dirty="0"/>
           </a:p>
@@ -13999,7 +14050,7 @@
                 <a:ea typeface="Calibri" pitchFamily="34" charset="-122"/>
                 <a:cs typeface="Calibri" pitchFamily="34" charset="-120"/>
               </a:rPr>
-              <a:t>down, away, about</a:t>
+              <a:t>down, fully</a:t>
             </a:r>
             <a:endParaRPr lang="en-US" sz="850" dirty="0"/>
           </a:p>
@@ -15493,7 +15544,7 @@
                 <a:ea typeface="Calibri" pitchFamily="34" charset="-122"/>
                 <a:cs typeface="Calibri" pitchFamily="34" charset="-120"/>
               </a:rPr>
-              <a:t>down, away, about</a:t>
+              <a:t>down, fully</a:t>
             </a:r>
             <a:endParaRPr lang="en-US" sz="850" dirty="0"/>
           </a:p>
@@ -16088,7 +16139,7 @@
         </p:nvSpPr>
         <p:spPr>
           <a:xfrm>
-            <a:off x="2023872" y="4169664"/>
+            <a:off x="2124837" y="4169664"/>
             <a:ext cx="685800" cy="384048"/>
           </a:xfrm>
           <a:prstGeom prst="rect">
@@ -16115,7 +16166,7 @@
         </p:nvSpPr>
         <p:spPr>
           <a:xfrm>
-            <a:off x="2023872" y="4169664"/>
+            <a:off x="2124837" y="4169664"/>
             <a:ext cx="685800" cy="384048"/>
           </a:xfrm>
           <a:prstGeom prst="rect">
@@ -16154,7 +16205,7 @@
         </p:nvSpPr>
         <p:spPr>
           <a:xfrm>
-            <a:off x="2831592" y="4169664"/>
+            <a:off x="3033522" y="4169664"/>
             <a:ext cx="685800" cy="384048"/>
           </a:xfrm>
           <a:prstGeom prst="rect">
@@ -16181,7 +16232,7 @@
         </p:nvSpPr>
         <p:spPr>
           <a:xfrm>
-            <a:off x="2831592" y="4169664"/>
+            <a:off x="3033522" y="4169664"/>
             <a:ext cx="685800" cy="384048"/>
           </a:xfrm>
           <a:prstGeom prst="rect">
@@ -16220,7 +16271,7 @@
         </p:nvSpPr>
         <p:spPr>
           <a:xfrm>
-            <a:off x="3639312" y="4169664"/>
+            <a:off x="3942207" y="4169664"/>
             <a:ext cx="685800" cy="384048"/>
           </a:xfrm>
           <a:prstGeom prst="rect">
@@ -16247,7 +16298,7 @@
         </p:nvSpPr>
         <p:spPr>
           <a:xfrm>
-            <a:off x="3639312" y="4169664"/>
+            <a:off x="3942207" y="4169664"/>
             <a:ext cx="685800" cy="384048"/>
           </a:xfrm>
           <a:prstGeom prst="rect">
@@ -16286,7 +16337,7 @@
         </p:nvSpPr>
         <p:spPr>
           <a:xfrm>
-            <a:off x="4447032" y="4169664"/>
+            <a:off x="4850892" y="4169664"/>
             <a:ext cx="685800" cy="384048"/>
           </a:xfrm>
           <a:prstGeom prst="rect">
@@ -16313,7 +16364,7 @@
         </p:nvSpPr>
         <p:spPr>
           <a:xfrm>
-            <a:off x="4447032" y="4169664"/>
+            <a:off x="4850892" y="4169664"/>
             <a:ext cx="685800" cy="384048"/>
           </a:xfrm>
           <a:prstGeom prst="rect">
@@ -16352,7 +16403,7 @@
         </p:nvSpPr>
         <p:spPr>
           <a:xfrm>
-            <a:off x="4447032" y="4572000"/>
+            <a:off x="4850892" y="4572000"/>
             <a:ext cx="685800" cy="219456"/>
           </a:xfrm>
           <a:prstGeom prst="rect">
@@ -16391,7 +16442,7 @@
         </p:nvSpPr>
         <p:spPr>
           <a:xfrm>
-            <a:off x="5254752" y="4169664"/>
+            <a:off x="5759577" y="4169664"/>
             <a:ext cx="685800" cy="384048"/>
           </a:xfrm>
           <a:prstGeom prst="rect">
@@ -16418,7 +16469,7 @@
         </p:nvSpPr>
         <p:spPr>
           <a:xfrm>
-            <a:off x="5254752" y="4169664"/>
+            <a:off x="5759577" y="4169664"/>
             <a:ext cx="685800" cy="384048"/>
           </a:xfrm>
           <a:prstGeom prst="rect">
@@ -16457,7 +16508,7 @@
         </p:nvSpPr>
         <p:spPr>
           <a:xfrm>
-            <a:off x="6062472" y="4169664"/>
+            <a:off x="6668262" y="4169664"/>
             <a:ext cx="685800" cy="384048"/>
           </a:xfrm>
           <a:prstGeom prst="rect">
@@ -16484,7 +16535,7 @@
         </p:nvSpPr>
         <p:spPr>
           <a:xfrm>
-            <a:off x="6062472" y="4169664"/>
+            <a:off x="6668262" y="4169664"/>
             <a:ext cx="685800" cy="384048"/>
           </a:xfrm>
           <a:prstGeom prst="rect">
@@ -16523,7 +16574,7 @@
         </p:nvSpPr>
         <p:spPr>
           <a:xfrm>
-            <a:off x="6870192" y="4169664"/>
+            <a:off x="7576947" y="4169664"/>
             <a:ext cx="685800" cy="384048"/>
           </a:xfrm>
           <a:prstGeom prst="rect">
@@ -16550,7 +16601,7 @@
         </p:nvSpPr>
         <p:spPr>
           <a:xfrm>
-            <a:off x="6870192" y="4169664"/>
+            <a:off x="7576947" y="4169664"/>
             <a:ext cx="685800" cy="384048"/>
           </a:xfrm>
           <a:prstGeom prst="rect">
@@ -16575,73 +16626,7 @@
                 <a:ea typeface="Trebuchet MS" pitchFamily="34" charset="-122"/>
                 <a:cs typeface="Trebuchet MS" pitchFamily="34" charset="-120"/>
               </a:rPr>
-              <a:t>b</a:t>
-            </a:r>
-            <a:endParaRPr lang="en-US" sz="900" dirty="0"/>
-          </a:p>
-        </p:txBody>
-      </p:sp>
-      <p:sp>
-        <p:nvSpPr>
-          <p:cNvPr id="51" name="Shape 49"/>
-          <p:cNvSpPr/>
-          <p:nvPr/>
-        </p:nvSpPr>
-        <p:spPr>
-          <a:xfrm>
-            <a:off x="7677912" y="4169664"/>
-            <a:ext cx="685800" cy="384048"/>
-          </a:xfrm>
-          <a:prstGeom prst="rect">
-            <a:avLst>
-              <a:gd name="adj" fmla="val 9524"/>
-            </a:avLst>
-          </a:prstGeom>
-          <a:solidFill>
-            <a:srgbClr val="FFFFFF"/>
-          </a:solidFill>
-          <a:ln w="12700">
-            <a:solidFill>
-              <a:srgbClr val="DB2777"/>
-            </a:solidFill>
-            <a:prstDash val="solid"/>
-          </a:ln>
-        </p:spPr>
-      </p:sp>
-      <p:sp>
-        <p:nvSpPr>
-          <p:cNvPr id="52" name="Text 50"/>
-          <p:cNvSpPr/>
-          <p:nvPr/>
-        </p:nvSpPr>
-        <p:spPr>
-          <a:xfrm>
-            <a:off x="7677912" y="4169664"/>
-            <a:ext cx="685800" cy="384048"/>
-          </a:xfrm>
-          <a:prstGeom prst="rect">
-            <a:avLst/>
-          </a:prstGeom>
-          <a:noFill/>
-          <a:ln/>
-        </p:spPr>
-        <p:txBody>
-          <a:bodyPr wrap="square" lIns="0" tIns="0" rIns="0" bIns="0" rtlCol="0" anchor="ctr"/>
-          <a:lstStyle/>
-          <a:p>
-            <a:pPr algn="ctr" indent="0" marL="0">
-              <a:buNone/>
-            </a:pPr>
-            <a:r>
-              <a:rPr lang="en-US" sz="900" b="1" dirty="0">
-                <a:solidFill>
-                  <a:srgbClr val="9D174D"/>
-                </a:solidFill>
-                <a:latin typeface="Trebuchet MS" pitchFamily="34" charset="0"/>
-                <a:ea typeface="Trebuchet MS" pitchFamily="34" charset="-122"/>
-                <a:cs typeface="Trebuchet MS" pitchFamily="34" charset="-120"/>
-              </a:rPr>
-              <a:t>e</a:t>
+              <a:t>be</a:t>
             </a:r>
             <a:endParaRPr lang="en-US" sz="900" dirty="0"/>
           </a:p>
@@ -17549,7 +17534,7 @@
                 <a:ea typeface="Trebuchet MS" pitchFamily="34" charset="-122"/>
                 <a:cs typeface="Trebuchet MS" pitchFamily="34" charset="-120"/>
               </a:rPr>
-              <a:t>2</a:t>
+              <a:t>1</a:t>
             </a:r>
             <a:pPr algn="ctr" indent="0" marL="0">
               <a:buNone/>
@@ -17563,7 +17548,7 @@
                 <a:ea typeface="Trebuchet MS" pitchFamily="34" charset="-122"/>
                 <a:cs typeface="Trebuchet MS" pitchFamily="34" charset="-120"/>
               </a:rPr>
-              <a:t>  punctuation marks</a:t>
+              <a:t>  punctuation mark</a:t>
             </a:r>
             <a:endParaRPr lang="en-US" sz="2800" dirty="0"/>
           </a:p>
@@ -17967,7 +17952,7 @@
                 <a:ea typeface="Calibri" pitchFamily="34" charset="-122"/>
                 <a:cs typeface="Calibri" pitchFamily="34" charset="-120"/>
               </a:rPr>
-              <a:t>She will </a:t>
+              <a:t>After he would </a:t>
             </a:r>
             <a:pPr algn="l" indent="0" marL="0">
               <a:buNone/>
@@ -17984,7 +17969,7 @@
                 <a:ea typeface="Calibri" pitchFamily="34" charset="-122"/>
                 <a:cs typeface="Calibri" pitchFamily="34" charset="-120"/>
               </a:rPr>
-              <a:t>subscribe</a:t>
+              <a:t>prescribe</a:t>
             </a:r>
             <a:pPr algn="l" indent="0" marL="0">
               <a:buNone/>
@@ -17998,7 +17983,7 @@
                 <a:ea typeface="Calibri" pitchFamily="34" charset="-122"/>
                 <a:cs typeface="Calibri" pitchFamily="34" charset="-120"/>
               </a:rPr>
-              <a:t> to the newsletter, </a:t>
+              <a:t> the treatment, the </a:t>
             </a:r>
             <a:pPr algn="l" indent="0" marL="0">
               <a:buNone/>
@@ -18015,7 +18000,7 @@
                 <a:ea typeface="Calibri" pitchFamily="34" charset="-122"/>
                 <a:cs typeface="Calibri" pitchFamily="34" charset="-120"/>
               </a:rPr>
-              <a:t>transcribe</a:t>
+              <a:t>scribe</a:t>
             </a:r>
             <a:pPr algn="l" indent="0" marL="0">
               <a:buNone/>
@@ -18029,7 +18014,7 @@
                 <a:ea typeface="Calibri" pitchFamily="34" charset="-122"/>
                 <a:cs typeface="Calibri" pitchFamily="34" charset="-120"/>
               </a:rPr>
-              <a:t> her favourite articles, and </a:t>
+              <a:t> had to </a:t>
             </a:r>
             <a:pPr algn="l" indent="0" marL="0">
               <a:buNone/>
@@ -18046,7 +18031,7 @@
                 <a:ea typeface="Calibri" pitchFamily="34" charset="-122"/>
                 <a:cs typeface="Calibri" pitchFamily="34" charset="-120"/>
               </a:rPr>
-              <a:t>scribble</a:t>
+              <a:t>inscribe</a:t>
             </a:r>
             <a:pPr algn="l" indent="0" marL="0">
               <a:buNone/>
@@ -18060,7 +18045,7 @@
                 <a:ea typeface="Calibri" pitchFamily="34" charset="-122"/>
                 <a:cs typeface="Calibri" pitchFamily="34" charset="-120"/>
               </a:rPr>
-              <a:t> notes in the margins.</a:t>
+              <a:t> the patient's name on the official record.</a:t>
             </a:r>
             <a:endParaRPr lang="en-US" sz="1800" dirty="0"/>
           </a:p>
@@ -18215,7 +18200,7 @@
                 <a:ea typeface="Trebuchet MS" pitchFamily="34" charset="-122"/>
                 <a:cs typeface="Trebuchet MS" pitchFamily="34" charset="-120"/>
               </a:rPr>
-              <a:t>subscribe</a:t>
+              <a:t>prescribe</a:t>
             </a:r>
             <a:endParaRPr lang="en-US" sz="1400" dirty="0"/>
           </a:p>
@@ -18343,7 +18328,7 @@
                 <a:ea typeface="Trebuchet MS" pitchFamily="34" charset="-122"/>
                 <a:cs typeface="Trebuchet MS" pitchFamily="34" charset="-120"/>
               </a:rPr>
-              <a:t>transcribe</a:t>
+              <a:t>scribe</a:t>
             </a:r>
             <a:endParaRPr lang="en-US" sz="1400" dirty="0"/>
           </a:p>
@@ -18471,7 +18456,7 @@
                 <a:ea typeface="Trebuchet MS" pitchFamily="34" charset="-122"/>
                 <a:cs typeface="Trebuchet MS" pitchFamily="34" charset="-120"/>
               </a:rPr>
-              <a:t>scribble</a:t>
+              <a:t>inscribe</a:t>
             </a:r>
             <a:endParaRPr lang="en-US" sz="1400" dirty="0"/>
           </a:p>
@@ -18941,7 +18926,7 @@
                 <a:ea typeface="Trebuchet MS" pitchFamily="34" charset="-122"/>
                 <a:cs typeface="Trebuchet MS" pitchFamily="34" charset="-120"/>
               </a:rPr>
-              <a:t>subscribe</a:t>
+              <a:t>prescribe</a:t>
             </a:r>
             <a:endParaRPr lang="en-US" sz="2800" dirty="0"/>
           </a:p>
@@ -19768,7 +19753,7 @@
                 <a:ea typeface="Trebuchet MS" pitchFamily="34" charset="-122"/>
                 <a:cs typeface="Trebuchet MS" pitchFamily="34" charset="-120"/>
               </a:rPr>
-              <a:t>subscribe</a:t>
+              <a:t>prescribe</a:t>
             </a:r>
             <a:endParaRPr lang="en-US" sz="2800" dirty="0"/>
           </a:p>
@@ -19907,7 +19892,7 @@
                 <a:ea typeface="Trebuchet MS" pitchFamily="34" charset="-122"/>
                 <a:cs typeface="Trebuchet MS" pitchFamily="34" charset="-120"/>
               </a:rPr>
-              <a:t>sub</a:t>
+              <a:t>pre</a:t>
             </a:r>
             <a:endParaRPr lang="en-US" sz="1300" dirty="0"/>
           </a:p>
@@ -19946,7 +19931,7 @@
                 <a:ea typeface="Calibri" pitchFamily="34" charset="-122"/>
                 <a:cs typeface="Calibri" pitchFamily="34" charset="-120"/>
               </a:rPr>
-              <a:t>under, below</a:t>
+              <a:t>before</a:t>
             </a:r>
             <a:endParaRPr lang="en-US" sz="850" dirty="0"/>
           </a:p>
@@ -20865,7 +20850,7 @@
                 <a:ea typeface="Trebuchet MS" pitchFamily="34" charset="-122"/>
                 <a:cs typeface="Trebuchet MS" pitchFamily="34" charset="-120"/>
               </a:rPr>
-              <a:t>subscribe</a:t>
+              <a:t>prescribe</a:t>
             </a:r>
             <a:endParaRPr lang="en-US" sz="2800" dirty="0"/>
           </a:p>
@@ -21004,7 +20989,7 @@
                 <a:ea typeface="Trebuchet MS" pitchFamily="34" charset="-122"/>
                 <a:cs typeface="Trebuchet MS" pitchFamily="34" charset="-120"/>
               </a:rPr>
-              <a:t>sub</a:t>
+              <a:t>pre</a:t>
             </a:r>
             <a:endParaRPr lang="en-US" sz="1300" dirty="0"/>
           </a:p>
@@ -21043,7 +21028,7 @@
                 <a:ea typeface="Calibri" pitchFamily="34" charset="-122"/>
                 <a:cs typeface="Calibri" pitchFamily="34" charset="-120"/>
               </a:rPr>
-              <a:t>under, below</a:t>
+              <a:t>before</a:t>
             </a:r>
             <a:endParaRPr lang="en-US" sz="850" dirty="0"/>
           </a:p>
@@ -21426,7 +21411,7 @@
                 <a:ea typeface="Trebuchet MS" pitchFamily="34" charset="-122"/>
                 <a:cs typeface="Trebuchet MS" pitchFamily="34" charset="-120"/>
               </a:rPr>
-              <a:t>sub</a:t>
+              <a:t>pre</a:t>
             </a:r>
             <a:endParaRPr lang="en-US" sz="1400" dirty="0"/>
           </a:p>
@@ -22094,7 +22079,7 @@
                 <a:ea typeface="Trebuchet MS" pitchFamily="34" charset="-122"/>
                 <a:cs typeface="Trebuchet MS" pitchFamily="34" charset="-120"/>
               </a:rPr>
-              <a:t>subscribe</a:t>
+              <a:t>prescribe</a:t>
             </a:r>
             <a:endParaRPr lang="en-US" sz="2800" dirty="0"/>
           </a:p>
@@ -22233,7 +22218,7 @@
                 <a:ea typeface="Trebuchet MS" pitchFamily="34" charset="-122"/>
                 <a:cs typeface="Trebuchet MS" pitchFamily="34" charset="-120"/>
               </a:rPr>
-              <a:t>sub</a:t>
+              <a:t>pre</a:t>
             </a:r>
             <a:endParaRPr lang="en-US" sz="1300" dirty="0"/>
           </a:p>
@@ -22272,7 +22257,7 @@
                 <a:ea typeface="Calibri" pitchFamily="34" charset="-122"/>
                 <a:cs typeface="Calibri" pitchFamily="34" charset="-120"/>
               </a:rPr>
-              <a:t>under, below</a:t>
+              <a:t>before</a:t>
             </a:r>
             <a:endParaRPr lang="en-US" sz="850" dirty="0"/>
           </a:p>
@@ -22655,7 +22640,7 @@
                 <a:ea typeface="Trebuchet MS" pitchFamily="34" charset="-122"/>
                 <a:cs typeface="Trebuchet MS" pitchFamily="34" charset="-120"/>
               </a:rPr>
-              <a:t>sub</a:t>
+              <a:t>pre</a:t>
             </a:r>
             <a:endParaRPr lang="en-US" sz="1400" dirty="0"/>
           </a:p>
@@ -22867,8 +22852,8 @@
         </p:nvSpPr>
         <p:spPr>
           <a:xfrm>
-            <a:off x="1951330" y="4169664"/>
-            <a:ext cx="676656" cy="384048"/>
+            <a:off x="2023872" y="4169664"/>
+            <a:ext cx="685800" cy="384048"/>
           </a:xfrm>
           <a:prstGeom prst="rect">
             <a:avLst>
@@ -22894,8 +22879,8 @@
         </p:nvSpPr>
         <p:spPr>
           <a:xfrm>
-            <a:off x="1951330" y="4169664"/>
-            <a:ext cx="676656" cy="384048"/>
+            <a:off x="2023872" y="4169664"/>
+            <a:ext cx="685800" cy="384048"/>
           </a:xfrm>
           <a:prstGeom prst="rect">
             <a:avLst/>
@@ -22919,7 +22904,7 @@
                 <a:ea typeface="Trebuchet MS" pitchFamily="34" charset="-122"/>
                 <a:cs typeface="Trebuchet MS" pitchFamily="34" charset="-120"/>
               </a:rPr>
-              <a:t>s</a:t>
+              <a:t>p</a:t>
             </a:r>
             <a:endParaRPr lang="en-US" sz="900" dirty="0"/>
           </a:p>
@@ -22933,8 +22918,8 @@
         </p:nvSpPr>
         <p:spPr>
           <a:xfrm>
-            <a:off x="2677363" y="4169664"/>
-            <a:ext cx="676656" cy="384048"/>
+            <a:off x="2831592" y="4169664"/>
+            <a:ext cx="685800" cy="384048"/>
           </a:xfrm>
           <a:prstGeom prst="rect">
             <a:avLst>
@@ -22960,8 +22945,8 @@
         </p:nvSpPr>
         <p:spPr>
           <a:xfrm>
-            <a:off x="2677363" y="4169664"/>
-            <a:ext cx="676656" cy="384048"/>
+            <a:off x="2831592" y="4169664"/>
+            <a:ext cx="685800" cy="384048"/>
           </a:xfrm>
           <a:prstGeom prst="rect">
             <a:avLst/>
@@ -22985,7 +22970,7 @@
                 <a:ea typeface="Trebuchet MS" pitchFamily="34" charset="-122"/>
                 <a:cs typeface="Trebuchet MS" pitchFamily="34" charset="-120"/>
               </a:rPr>
-              <a:t>u</a:t>
+              <a:t>r</a:t>
             </a:r>
             <a:endParaRPr lang="en-US" sz="900" dirty="0"/>
           </a:p>
@@ -22999,8 +22984,8 @@
         </p:nvSpPr>
         <p:spPr>
           <a:xfrm>
-            <a:off x="3403397" y="4169664"/>
-            <a:ext cx="676656" cy="384048"/>
+            <a:off x="3639312" y="4169664"/>
+            <a:ext cx="685800" cy="384048"/>
           </a:xfrm>
           <a:prstGeom prst="rect">
             <a:avLst>
@@ -23026,8 +23011,8 @@
         </p:nvSpPr>
         <p:spPr>
           <a:xfrm>
-            <a:off x="3403397" y="4169664"/>
-            <a:ext cx="676656" cy="384048"/>
+            <a:off x="3639312" y="4169664"/>
+            <a:ext cx="685800" cy="384048"/>
           </a:xfrm>
           <a:prstGeom prst="rect">
             <a:avLst/>
@@ -23051,7 +23036,7 @@
                 <a:ea typeface="Trebuchet MS" pitchFamily="34" charset="-122"/>
                 <a:cs typeface="Trebuchet MS" pitchFamily="34" charset="-120"/>
               </a:rPr>
-              <a:t>b</a:t>
+              <a:t>e</a:t>
             </a:r>
             <a:endParaRPr lang="en-US" sz="900" dirty="0"/>
           </a:p>
@@ -23065,8 +23050,8 @@
         </p:nvSpPr>
         <p:spPr>
           <a:xfrm>
-            <a:off x="4129430" y="4169664"/>
-            <a:ext cx="676656" cy="384048"/>
+            <a:off x="4447032" y="4169664"/>
+            <a:ext cx="685800" cy="384048"/>
           </a:xfrm>
           <a:prstGeom prst="rect">
             <a:avLst>
@@ -23092,8 +23077,8 @@
         </p:nvSpPr>
         <p:spPr>
           <a:xfrm>
-            <a:off x="4129430" y="4169664"/>
-            <a:ext cx="676656" cy="384048"/>
+            <a:off x="4447032" y="4169664"/>
+            <a:ext cx="685800" cy="384048"/>
           </a:xfrm>
           <a:prstGeom prst="rect">
             <a:avLst/>
@@ -23131,8 +23116,8 @@
         </p:nvSpPr>
         <p:spPr>
           <a:xfrm>
-            <a:off x="4855464" y="4169664"/>
-            <a:ext cx="676656" cy="384048"/>
+            <a:off x="5254752" y="4169664"/>
+            <a:ext cx="685800" cy="384048"/>
           </a:xfrm>
           <a:prstGeom prst="rect">
             <a:avLst>
@@ -23158,8 +23143,8 @@
         </p:nvSpPr>
         <p:spPr>
           <a:xfrm>
-            <a:off x="4855464" y="4169664"/>
-            <a:ext cx="676656" cy="384048"/>
+            <a:off x="5254752" y="4169664"/>
+            <a:ext cx="685800" cy="384048"/>
           </a:xfrm>
           <a:prstGeom prst="rect">
             <a:avLst/>
@@ -23197,8 +23182,8 @@
         </p:nvSpPr>
         <p:spPr>
           <a:xfrm>
-            <a:off x="4855464" y="4572000"/>
-            <a:ext cx="676656" cy="219456"/>
+            <a:off x="5254752" y="4572000"/>
+            <a:ext cx="685800" cy="219456"/>
           </a:xfrm>
           <a:prstGeom prst="rect">
             <a:avLst/>
@@ -23236,8 +23221,8 @@
         </p:nvSpPr>
         <p:spPr>
           <a:xfrm>
-            <a:off x="5581498" y="4169664"/>
-            <a:ext cx="676656" cy="384048"/>
+            <a:off x="6062472" y="4169664"/>
+            <a:ext cx="685800" cy="384048"/>
           </a:xfrm>
           <a:prstGeom prst="rect">
             <a:avLst>
@@ -23263,8 +23248,8 @@
         </p:nvSpPr>
         <p:spPr>
           <a:xfrm>
-            <a:off x="5581498" y="4169664"/>
-            <a:ext cx="676656" cy="384048"/>
+            <a:off x="6062472" y="4169664"/>
+            <a:ext cx="685800" cy="384048"/>
           </a:xfrm>
           <a:prstGeom prst="rect">
             <a:avLst/>
@@ -23302,8 +23287,8 @@
         </p:nvSpPr>
         <p:spPr>
           <a:xfrm>
-            <a:off x="6307531" y="4169664"/>
-            <a:ext cx="676656" cy="384048"/>
+            <a:off x="6870192" y="4169664"/>
+            <a:ext cx="685800" cy="384048"/>
           </a:xfrm>
           <a:prstGeom prst="rect">
             <a:avLst>
@@ -23329,8 +23314,8 @@
         </p:nvSpPr>
         <p:spPr>
           <a:xfrm>
-            <a:off x="6307531" y="4169664"/>
-            <a:ext cx="676656" cy="384048"/>
+            <a:off x="6870192" y="4169664"/>
+            <a:ext cx="685800" cy="384048"/>
           </a:xfrm>
           <a:prstGeom prst="rect">
             <a:avLst/>
@@ -23368,8 +23353,8 @@
         </p:nvSpPr>
         <p:spPr>
           <a:xfrm>
-            <a:off x="7033565" y="4169664"/>
-            <a:ext cx="676656" cy="384048"/>
+            <a:off x="7677912" y="4169664"/>
+            <a:ext cx="685800" cy="384048"/>
           </a:xfrm>
           <a:prstGeom prst="rect">
             <a:avLst>
@@ -23395,8 +23380,8 @@
         </p:nvSpPr>
         <p:spPr>
           <a:xfrm>
-            <a:off x="7033565" y="4169664"/>
-            <a:ext cx="676656" cy="384048"/>
+            <a:off x="7677912" y="4169664"/>
+            <a:ext cx="685800" cy="384048"/>
           </a:xfrm>
           <a:prstGeom prst="rect">
             <a:avLst/>
@@ -23420,73 +23405,7 @@
                 <a:ea typeface="Trebuchet MS" pitchFamily="34" charset="-122"/>
                 <a:cs typeface="Trebuchet MS" pitchFamily="34" charset="-120"/>
               </a:rPr>
-              <a:t>b</a:t>
-            </a:r>
-            <a:endParaRPr lang="en-US" sz="900" dirty="0"/>
-          </a:p>
-        </p:txBody>
-      </p:sp>
-      <p:sp>
-        <p:nvSpPr>
-          <p:cNvPr id="53" name="Shape 51"/>
-          <p:cNvSpPr/>
-          <p:nvPr/>
-        </p:nvSpPr>
-        <p:spPr>
-          <a:xfrm>
-            <a:off x="7759598" y="4169664"/>
-            <a:ext cx="676656" cy="384048"/>
-          </a:xfrm>
-          <a:prstGeom prst="rect">
-            <a:avLst>
-              <a:gd name="adj" fmla="val 9524"/>
-            </a:avLst>
-          </a:prstGeom>
-          <a:solidFill>
-            <a:srgbClr val="FFFFFF"/>
-          </a:solidFill>
-          <a:ln w="12700">
-            <a:solidFill>
-              <a:srgbClr val="DB2777"/>
-            </a:solidFill>
-            <a:prstDash val="solid"/>
-          </a:ln>
-        </p:spPr>
-      </p:sp>
-      <p:sp>
-        <p:nvSpPr>
-          <p:cNvPr id="54" name="Text 52"/>
-          <p:cNvSpPr/>
-          <p:nvPr/>
-        </p:nvSpPr>
-        <p:spPr>
-          <a:xfrm>
-            <a:off x="7759598" y="4169664"/>
-            <a:ext cx="676656" cy="384048"/>
-          </a:xfrm>
-          <a:prstGeom prst="rect">
-            <a:avLst/>
-          </a:prstGeom>
-          <a:noFill/>
-          <a:ln/>
-        </p:spPr>
-        <p:txBody>
-          <a:bodyPr wrap="square" lIns="0" tIns="0" rIns="0" bIns="0" rtlCol="0" anchor="ctr"/>
-          <a:lstStyle/>
-          <a:p>
-            <a:pPr algn="ctr" indent="0" marL="0">
-              <a:buNone/>
-            </a:pPr>
-            <a:r>
-              <a:rPr lang="en-US" sz="900" b="1" dirty="0">
-                <a:solidFill>
-                  <a:srgbClr val="9D174D"/>
-                </a:solidFill>
-                <a:latin typeface="Trebuchet MS" pitchFamily="34" charset="0"/>
-                <a:ea typeface="Trebuchet MS" pitchFamily="34" charset="-122"/>
-                <a:cs typeface="Trebuchet MS" pitchFamily="34" charset="-120"/>
-              </a:rPr>
-              <a:t>e</a:t>
+              <a:t>be</a:t>
             </a:r>
             <a:endParaRPr lang="en-US" sz="900" dirty="0"/>
           </a:p>
@@ -23917,7 +23836,7 @@
                 <a:ea typeface="Trebuchet MS" pitchFamily="34" charset="-122"/>
                 <a:cs typeface="Trebuchet MS" pitchFamily="34" charset="-120"/>
               </a:rPr>
-              <a:t>transcribe</a:t>
+              <a:t>scribe</a:t>
             </a:r>
             <a:endParaRPr lang="en-US" sz="2800" dirty="0"/>
           </a:p>
@@ -24744,7 +24663,7 @@
                 <a:ea typeface="Trebuchet MS" pitchFamily="34" charset="-122"/>
                 <a:cs typeface="Trebuchet MS" pitchFamily="34" charset="-120"/>
               </a:rPr>
-              <a:t>transcribe</a:t>
+              <a:t>scribe</a:t>
             </a:r>
             <a:endParaRPr lang="en-US" sz="2800" dirty="0"/>
           </a:p>
@@ -24824,7 +24743,7 @@
         </p:nvSpPr>
         <p:spPr>
           <a:xfrm>
-            <a:off x="2221992" y="2258568"/>
+            <a:off x="2938272" y="2258568"/>
             <a:ext cx="1828800" cy="292608"/>
           </a:xfrm>
           <a:prstGeom prst="rect">
@@ -24833,11 +24752,11 @@
             </a:avLst>
           </a:prstGeom>
           <a:solidFill>
-            <a:srgbClr val="DDD6FE"/>
+            <a:srgbClr val="CCFBF1"/>
           </a:solidFill>
           <a:ln w="19050">
             <a:solidFill>
-              <a:srgbClr val="7C3AED"/>
+              <a:srgbClr val="0D9488"/>
             </a:solidFill>
             <a:prstDash val="solid"/>
           </a:ln>
@@ -24858,7 +24777,7 @@
         </p:nvSpPr>
         <p:spPr>
           <a:xfrm>
-            <a:off x="2221992" y="2258568"/>
+            <a:off x="2938272" y="2258568"/>
             <a:ext cx="1828800" cy="292608"/>
           </a:xfrm>
           <a:prstGeom prst="rect">
@@ -24877,13 +24796,13 @@
             <a:r>
               <a:rPr lang="en-US" sz="1300" b="1" dirty="0">
                 <a:solidFill>
-                  <a:srgbClr val="4C1D95"/>
+                  <a:srgbClr val="0F766E"/>
                 </a:solidFill>
                 <a:latin typeface="Trebuchet MS" pitchFamily="34" charset="0"/>
                 <a:ea typeface="Trebuchet MS" pitchFamily="34" charset="-122"/>
                 <a:cs typeface="Trebuchet MS" pitchFamily="34" charset="-120"/>
               </a:rPr>
-              <a:t>tran</a:t>
+              <a:t>scrib</a:t>
             </a:r>
             <a:endParaRPr lang="en-US" sz="1300" dirty="0"/>
           </a:p>
@@ -24897,7 +24816,7 @@
         </p:nvSpPr>
         <p:spPr>
           <a:xfrm>
-            <a:off x="2221992" y="2569464"/>
+            <a:off x="2938272" y="2569464"/>
             <a:ext cx="1828800" cy="201168"/>
           </a:xfrm>
           <a:prstGeom prst="rect">
@@ -24922,7 +24841,7 @@
                 <a:ea typeface="Calibri" pitchFamily="34" charset="-122"/>
                 <a:cs typeface="Calibri" pitchFamily="34" charset="-120"/>
               </a:rPr>
-              <a:t>across, over</a:t>
+              <a:t>to write</a:t>
             </a:r>
             <a:endParaRPr lang="en-US" sz="850" dirty="0"/>
           </a:p>
@@ -24936,7 +24855,7 @@
         </p:nvSpPr>
         <p:spPr>
           <a:xfrm>
-            <a:off x="4370832" y="2258568"/>
+            <a:off x="5803392" y="2258568"/>
             <a:ext cx="1828800" cy="292608"/>
           </a:xfrm>
           <a:prstGeom prst="rect">
@@ -24945,11 +24864,11 @@
             </a:avLst>
           </a:prstGeom>
           <a:solidFill>
-            <a:srgbClr val="CCFBF1"/>
+            <a:srgbClr val="FCE7F3"/>
           </a:solidFill>
           <a:ln w="19050">
             <a:solidFill>
-              <a:srgbClr val="0D9488"/>
+              <a:srgbClr val="DB2777"/>
             </a:solidFill>
             <a:prstDash val="solid"/>
           </a:ln>
@@ -24970,7 +24889,7 @@
         </p:nvSpPr>
         <p:spPr>
           <a:xfrm>
-            <a:off x="4370832" y="2258568"/>
+            <a:off x="5803392" y="2258568"/>
             <a:ext cx="1828800" cy="292608"/>
           </a:xfrm>
           <a:prstGeom prst="rect">
@@ -24989,13 +24908,13 @@
             <a:r>
               <a:rPr lang="en-US" sz="1300" b="1" dirty="0">
                 <a:solidFill>
-                  <a:srgbClr val="0F766E"/>
+                  <a:srgbClr val="9D174D"/>
                 </a:solidFill>
                 <a:latin typeface="Trebuchet MS" pitchFamily="34" charset="0"/>
                 <a:ea typeface="Trebuchet MS" pitchFamily="34" charset="-122"/>
                 <a:cs typeface="Trebuchet MS" pitchFamily="34" charset="-120"/>
               </a:rPr>
-              <a:t>scrib</a:t>
+              <a:t>e</a:t>
             </a:r>
             <a:endParaRPr lang="en-US" sz="1300" dirty="0"/>
           </a:p>
@@ -25009,7 +24928,7 @@
         </p:nvSpPr>
         <p:spPr>
           <a:xfrm>
-            <a:off x="4370832" y="2569464"/>
+            <a:off x="5803392" y="2569464"/>
             <a:ext cx="1828800" cy="201168"/>
           </a:xfrm>
           <a:prstGeom prst="rect">
@@ -25034,7 +24953,7 @@
                 <a:ea typeface="Calibri" pitchFamily="34" charset="-122"/>
                 <a:cs typeface="Calibri" pitchFamily="34" charset="-120"/>
               </a:rPr>
-              <a:t>to write</a:t>
+              <a:t>noun-forming suffix</a:t>
             </a:r>
             <a:endParaRPr lang="en-US" sz="850" dirty="0"/>
           </a:p>
@@ -25048,30 +24967,23 @@
         </p:nvSpPr>
         <p:spPr>
           <a:xfrm>
-            <a:off x="6519672" y="2258568"/>
-            <a:ext cx="1828800" cy="292608"/>
+            <a:off x="365760" y="3273552"/>
+            <a:ext cx="1371600" cy="658368"/>
           </a:xfrm>
           <a:prstGeom prst="rect">
             <a:avLst>
-              <a:gd name="adj" fmla="val 25000"/>
+              <a:gd name="adj" fmla="val 8333"/>
             </a:avLst>
           </a:prstGeom>
           <a:solidFill>
-            <a:srgbClr val="FCE7F3"/>
-          </a:solidFill>
-          <a:ln w="19050">
-            <a:solidFill>
-              <a:srgbClr val="DB2777"/>
-            </a:solidFill>
-            <a:prstDash val="solid"/>
-          </a:ln>
-          <a:effectLst>
-            <a:outerShdw sx="100000" sy="100000" kx="0" ky="0" algn="bl" rotWithShape="0" blurRad="101600" dist="38100" dir="8100000">
-              <a:srgbClr val="000000">
-                <a:alpha val="12000"/>
-              </a:srgbClr>
-            </a:outerShdw>
-          </a:effectLst>
+            <a:srgbClr val="E2E8F0"/>
+          </a:solidFill>
+          <a:ln w="12700">
+            <a:solidFill>
+              <a:srgbClr val="E2E8F0"/>
+            </a:solidFill>
+            <a:prstDash val="solid"/>
+          </a:ln>
         </p:spPr>
       </p:sp>
       <p:sp>
@@ -25082,8 +24994,8 @@
         </p:nvSpPr>
         <p:spPr>
           <a:xfrm>
-            <a:off x="6519672" y="2258568"/>
-            <a:ext cx="1828800" cy="292608"/>
+            <a:off x="365760" y="3273552"/>
+            <a:ext cx="1371600" cy="658368"/>
           </a:xfrm>
           <a:prstGeom prst="rect">
             <a:avLst/>
@@ -25099,73 +25011,100 @@
               <a:buNone/>
             </a:pPr>
             <a:r>
-              <a:rPr lang="en-US" sz="1300" b="1" dirty="0">
-                <a:solidFill>
-                  <a:srgbClr val="9D174D"/>
+              <a:rPr lang="en-US" sz="1100" b="1" dirty="0">
+                <a:solidFill>
+                  <a:srgbClr val="475569"/>
                 </a:solidFill>
                 <a:latin typeface="Trebuchet MS" pitchFamily="34" charset="0"/>
                 <a:ea typeface="Trebuchet MS" pitchFamily="34" charset="-122"/>
                 <a:cs typeface="Trebuchet MS" pitchFamily="34" charset="-120"/>
               </a:rPr>
-              <a:t>e</a:t>
-            </a:r>
-            <a:endParaRPr lang="en-US" sz="1300" dirty="0"/>
-          </a:p>
-        </p:txBody>
-      </p:sp>
-      <p:sp>
-        <p:nvSpPr>
-          <p:cNvPr id="24" name="Text 22"/>
-          <p:cNvSpPr/>
-          <p:nvPr/>
-        </p:nvSpPr>
-        <p:spPr>
-          <a:xfrm>
-            <a:off x="6519672" y="2569464"/>
-            <a:ext cx="1828800" cy="201168"/>
-          </a:xfrm>
-          <a:prstGeom prst="rect">
-            <a:avLst/>
-          </a:prstGeom>
-          <a:noFill/>
-          <a:ln/>
-        </p:spPr>
-        <p:txBody>
-          <a:bodyPr wrap="square" lIns="0" tIns="0" rIns="0" bIns="0" rtlCol="0" anchor="t"/>
-          <a:lstStyle/>
-          <a:p>
-            <a:pPr algn="ctr" indent="0" marL="0">
-              <a:buNone/>
-            </a:pPr>
-            <a:r>
-              <a:rPr lang="en-US" sz="850" dirty="0">
-                <a:solidFill>
-                  <a:srgbClr val="475569"/>
+              <a:t>Syllables</a:t>
+            </a:r>
+            <a:endParaRPr lang="en-US" sz="1100" dirty="0"/>
+          </a:p>
+        </p:txBody>
+      </p:sp>
+      <p:sp>
+        <p:nvSpPr>
+          <p:cNvPr id="24" name="Shape 22"/>
+          <p:cNvSpPr/>
+          <p:nvPr/>
+        </p:nvSpPr>
+        <p:spPr>
+          <a:xfrm>
+            <a:off x="1874520" y="3273552"/>
+            <a:ext cx="6903720" cy="658368"/>
+          </a:xfrm>
+          <a:prstGeom prst="rect">
+            <a:avLst>
+              <a:gd name="adj" fmla="val 8333"/>
+            </a:avLst>
+          </a:prstGeom>
+          <a:solidFill>
+            <a:srgbClr val="F8FAFC"/>
+          </a:solidFill>
+          <a:ln w="12700">
+            <a:solidFill>
+              <a:srgbClr val="E2E8F0"/>
+            </a:solidFill>
+            <a:prstDash val="dash"/>
+          </a:ln>
+        </p:spPr>
+      </p:sp>
+      <p:sp>
+        <p:nvSpPr>
+          <p:cNvPr id="25" name="Text 23"/>
+          <p:cNvSpPr/>
+          <p:nvPr/>
+        </p:nvSpPr>
+        <p:spPr>
+          <a:xfrm>
+            <a:off x="1874520" y="3273552"/>
+            <a:ext cx="6903720" cy="658368"/>
+          </a:xfrm>
+          <a:prstGeom prst="rect">
+            <a:avLst/>
+          </a:prstGeom>
+          <a:noFill/>
+          <a:ln/>
+        </p:spPr>
+        <p:txBody>
+          <a:bodyPr wrap="square" rtlCol="0" anchor="ctr"/>
+          <a:lstStyle/>
+          <a:p>
+            <a:pPr algn="ctr" indent="0" marL="0">
+              <a:buNone/>
+            </a:pPr>
+            <a:r>
+              <a:rPr lang="en-US" sz="1100" i="1" dirty="0">
+                <a:solidFill>
+                  <a:srgbClr val="CBD5E1"/>
                 </a:solidFill>
                 <a:latin typeface="Calibri" pitchFamily="34" charset="0"/>
                 <a:ea typeface="Calibri" pitchFamily="34" charset="-122"/>
                 <a:cs typeface="Calibri" pitchFamily="34" charset="-120"/>
               </a:rPr>
-              <a:t>verb-forming suffix</a:t>
-            </a:r>
-            <a:endParaRPr lang="en-US" sz="850" dirty="0"/>
-          </a:p>
-        </p:txBody>
-      </p:sp>
-      <p:sp>
-        <p:nvSpPr>
-          <p:cNvPr id="25" name="Shape 23"/>
-          <p:cNvSpPr/>
-          <p:nvPr/>
-        </p:nvSpPr>
-        <p:spPr>
-          <a:xfrm>
-            <a:off x="365760" y="3273552"/>
-            <a:ext cx="1371600" cy="658368"/>
+              <a:t>Write here...</a:t>
+            </a:r>
+            <a:endParaRPr lang="en-US" sz="1100" dirty="0"/>
+          </a:p>
+        </p:txBody>
+      </p:sp>
+      <p:sp>
+        <p:nvSpPr>
+          <p:cNvPr id="26" name="Shape 24"/>
+          <p:cNvSpPr/>
+          <p:nvPr/>
+        </p:nvSpPr>
+        <p:spPr>
+          <a:xfrm>
+            <a:off x="365760" y="4096512"/>
+            <a:ext cx="1371600" cy="804672"/>
           </a:xfrm>
           <a:prstGeom prst="rect">
             <a:avLst>
-              <a:gd name="adj" fmla="val 8333"/>
+              <a:gd name="adj" fmla="val 6818"/>
             </a:avLst>
           </a:prstGeom>
           <a:solidFill>
@@ -25181,14 +25120,14 @@
       </p:sp>
       <p:sp>
         <p:nvSpPr>
-          <p:cNvPr id="26" name="Text 24"/>
-          <p:cNvSpPr/>
-          <p:nvPr/>
-        </p:nvSpPr>
-        <p:spPr>
-          <a:xfrm>
-            <a:off x="365760" y="3273552"/>
-            <a:ext cx="1371600" cy="658368"/>
+          <p:cNvPr id="27" name="Text 25"/>
+          <p:cNvSpPr/>
+          <p:nvPr/>
+        </p:nvSpPr>
+        <p:spPr>
+          <a:xfrm>
+            <a:off x="365760" y="4096512"/>
+            <a:ext cx="1371600" cy="804672"/>
           </a:xfrm>
           <a:prstGeom prst="rect">
             <a:avLst/>
@@ -25212,7 +25151,7 @@
                 <a:ea typeface="Trebuchet MS" pitchFamily="34" charset="-122"/>
                 <a:cs typeface="Trebuchet MS" pitchFamily="34" charset="-120"/>
               </a:rPr>
-              <a:t>Syllables</a:t>
+              <a:t>Phonemes</a:t>
             </a:r>
             <a:endParaRPr lang="en-US" sz="1100" dirty="0"/>
           </a:p>
@@ -25220,80 +25159,14 @@
       </p:sp>
       <p:sp>
         <p:nvSpPr>
-          <p:cNvPr id="27" name="Shape 25"/>
-          <p:cNvSpPr/>
-          <p:nvPr/>
-        </p:nvSpPr>
-        <p:spPr>
-          <a:xfrm>
-            <a:off x="1874520" y="3273552"/>
-            <a:ext cx="6903720" cy="658368"/>
-          </a:xfrm>
-          <a:prstGeom prst="rect">
-            <a:avLst>
-              <a:gd name="adj" fmla="val 8333"/>
-            </a:avLst>
-          </a:prstGeom>
-          <a:solidFill>
-            <a:srgbClr val="F8FAFC"/>
-          </a:solidFill>
-          <a:ln w="12700">
-            <a:solidFill>
-              <a:srgbClr val="E2E8F0"/>
-            </a:solidFill>
-            <a:prstDash val="dash"/>
-          </a:ln>
-        </p:spPr>
-      </p:sp>
-      <p:sp>
-        <p:nvSpPr>
-          <p:cNvPr id="28" name="Text 26"/>
-          <p:cNvSpPr/>
-          <p:nvPr/>
-        </p:nvSpPr>
-        <p:spPr>
-          <a:xfrm>
-            <a:off x="1874520" y="3273552"/>
-            <a:ext cx="6903720" cy="658368"/>
-          </a:xfrm>
-          <a:prstGeom prst="rect">
-            <a:avLst/>
-          </a:prstGeom>
-          <a:noFill/>
-          <a:ln/>
-        </p:spPr>
-        <p:txBody>
-          <a:bodyPr wrap="square" rtlCol="0" anchor="ctr"/>
-          <a:lstStyle/>
-          <a:p>
-            <a:pPr algn="ctr" indent="0" marL="0">
-              <a:buNone/>
-            </a:pPr>
-            <a:r>
-              <a:rPr lang="en-US" sz="1100" i="1" dirty="0">
-                <a:solidFill>
-                  <a:srgbClr val="CBD5E1"/>
-                </a:solidFill>
-                <a:latin typeface="Calibri" pitchFamily="34" charset="0"/>
-                <a:ea typeface="Calibri" pitchFamily="34" charset="-122"/>
-                <a:cs typeface="Calibri" pitchFamily="34" charset="-120"/>
-              </a:rPr>
-              <a:t>Write here...</a:t>
-            </a:r>
-            <a:endParaRPr lang="en-US" sz="1100" dirty="0"/>
-          </a:p>
-        </p:txBody>
-      </p:sp>
-      <p:sp>
-        <p:nvSpPr>
-          <p:cNvPr id="29" name="Shape 27"/>
-          <p:cNvSpPr/>
-          <p:nvPr/>
-        </p:nvSpPr>
-        <p:spPr>
-          <a:xfrm>
-            <a:off x="365760" y="4096512"/>
-            <a:ext cx="1371600" cy="804672"/>
+          <p:cNvPr id="28" name="Shape 26"/>
+          <p:cNvSpPr/>
+          <p:nvPr/>
+        </p:nvSpPr>
+        <p:spPr>
+          <a:xfrm>
+            <a:off x="1874520" y="4096512"/>
+            <a:ext cx="6903720" cy="804672"/>
           </a:xfrm>
           <a:prstGeom prst="rect">
             <a:avLst>
@@ -25301,85 +25174,19 @@
             </a:avLst>
           </a:prstGeom>
           <a:solidFill>
-            <a:srgbClr val="E2E8F0"/>
+            <a:srgbClr val="F8FAFC"/>
           </a:solidFill>
           <a:ln w="12700">
             <a:solidFill>
               <a:srgbClr val="E2E8F0"/>
             </a:solidFill>
-            <a:prstDash val="solid"/>
-          </a:ln>
-        </p:spPr>
-      </p:sp>
-      <p:sp>
-        <p:nvSpPr>
-          <p:cNvPr id="30" name="Text 28"/>
-          <p:cNvSpPr/>
-          <p:nvPr/>
-        </p:nvSpPr>
-        <p:spPr>
-          <a:xfrm>
-            <a:off x="365760" y="4096512"/>
-            <a:ext cx="1371600" cy="804672"/>
-          </a:xfrm>
-          <a:prstGeom prst="rect">
-            <a:avLst/>
-          </a:prstGeom>
-          <a:noFill/>
-          <a:ln/>
-        </p:spPr>
-        <p:txBody>
-          <a:bodyPr wrap="square" lIns="0" tIns="0" rIns="0" bIns="0" rtlCol="0" anchor="ctr"/>
-          <a:lstStyle/>
-          <a:p>
-            <a:pPr algn="ctr" indent="0" marL="0">
-              <a:buNone/>
-            </a:pPr>
-            <a:r>
-              <a:rPr lang="en-US" sz="1100" b="1" dirty="0">
-                <a:solidFill>
-                  <a:srgbClr val="475569"/>
-                </a:solidFill>
-                <a:latin typeface="Trebuchet MS" pitchFamily="34" charset="0"/>
-                <a:ea typeface="Trebuchet MS" pitchFamily="34" charset="-122"/>
-                <a:cs typeface="Trebuchet MS" pitchFamily="34" charset="-120"/>
-              </a:rPr>
-              <a:t>Phonemes</a:t>
-            </a:r>
-            <a:endParaRPr lang="en-US" sz="1100" dirty="0"/>
-          </a:p>
-        </p:txBody>
-      </p:sp>
-      <p:sp>
-        <p:nvSpPr>
-          <p:cNvPr id="31" name="Shape 29"/>
-          <p:cNvSpPr/>
-          <p:nvPr/>
-        </p:nvSpPr>
-        <p:spPr>
-          <a:xfrm>
-            <a:off x="1874520" y="4096512"/>
-            <a:ext cx="6903720" cy="804672"/>
-          </a:xfrm>
-          <a:prstGeom prst="rect">
-            <a:avLst>
-              <a:gd name="adj" fmla="val 6818"/>
-            </a:avLst>
-          </a:prstGeom>
-          <a:solidFill>
-            <a:srgbClr val="F8FAFC"/>
-          </a:solidFill>
-          <a:ln w="12700">
-            <a:solidFill>
-              <a:srgbClr val="E2E8F0"/>
-            </a:solidFill>
             <a:prstDash val="dash"/>
           </a:ln>
         </p:spPr>
       </p:sp>
       <p:sp>
         <p:nvSpPr>
-          <p:cNvPr id="32" name="Text 30"/>
+          <p:cNvPr id="29" name="Text 27"/>
           <p:cNvSpPr/>
           <p:nvPr/>
         </p:nvSpPr>
@@ -26560,7 +26367,7 @@
                 <a:ea typeface="Trebuchet MS" pitchFamily="34" charset="-122"/>
                 <a:cs typeface="Trebuchet MS" pitchFamily="34" charset="-120"/>
               </a:rPr>
-              <a:t>transcribe</a:t>
+              <a:t>scribe</a:t>
             </a:r>
             <a:endParaRPr lang="en-US" sz="2800" dirty="0"/>
           </a:p>
@@ -26640,7 +26447,7 @@
         </p:nvSpPr>
         <p:spPr>
           <a:xfrm>
-            <a:off x="2221992" y="2258568"/>
+            <a:off x="2938272" y="2258568"/>
             <a:ext cx="1828800" cy="292608"/>
           </a:xfrm>
           <a:prstGeom prst="rect">
@@ -26649,11 +26456,11 @@
             </a:avLst>
           </a:prstGeom>
           <a:solidFill>
-            <a:srgbClr val="DDD6FE"/>
+            <a:srgbClr val="CCFBF1"/>
           </a:solidFill>
           <a:ln w="19050">
             <a:solidFill>
-              <a:srgbClr val="7C3AED"/>
+              <a:srgbClr val="0D9488"/>
             </a:solidFill>
             <a:prstDash val="solid"/>
           </a:ln>
@@ -26674,7 +26481,7 @@
         </p:nvSpPr>
         <p:spPr>
           <a:xfrm>
-            <a:off x="2221992" y="2258568"/>
+            <a:off x="2938272" y="2258568"/>
             <a:ext cx="1828800" cy="292608"/>
           </a:xfrm>
           <a:prstGeom prst="rect">
@@ -26693,13 +26500,13 @@
             <a:r>
               <a:rPr lang="en-US" sz="1300" b="1" dirty="0">
                 <a:solidFill>
-                  <a:srgbClr val="4C1D95"/>
+                  <a:srgbClr val="0F766E"/>
                 </a:solidFill>
                 <a:latin typeface="Trebuchet MS" pitchFamily="34" charset="0"/>
                 <a:ea typeface="Trebuchet MS" pitchFamily="34" charset="-122"/>
                 <a:cs typeface="Trebuchet MS" pitchFamily="34" charset="-120"/>
               </a:rPr>
-              <a:t>tran</a:t>
+              <a:t>scrib</a:t>
             </a:r>
             <a:endParaRPr lang="en-US" sz="1300" dirty="0"/>
           </a:p>
@@ -26713,7 +26520,7 @@
         </p:nvSpPr>
         <p:spPr>
           <a:xfrm>
-            <a:off x="2221992" y="2569464"/>
+            <a:off x="2938272" y="2569464"/>
             <a:ext cx="1828800" cy="201168"/>
           </a:xfrm>
           <a:prstGeom prst="rect">
@@ -26738,7 +26545,7 @@
                 <a:ea typeface="Calibri" pitchFamily="34" charset="-122"/>
                 <a:cs typeface="Calibri" pitchFamily="34" charset="-120"/>
               </a:rPr>
-              <a:t>across, over</a:t>
+              <a:t>to write</a:t>
             </a:r>
             <a:endParaRPr lang="en-US" sz="850" dirty="0"/>
           </a:p>
@@ -26752,7 +26559,7 @@
         </p:nvSpPr>
         <p:spPr>
           <a:xfrm>
-            <a:off x="4370832" y="2258568"/>
+            <a:off x="5803392" y="2258568"/>
             <a:ext cx="1828800" cy="292608"/>
           </a:xfrm>
           <a:prstGeom prst="rect">
@@ -26761,11 +26568,11 @@
             </a:avLst>
           </a:prstGeom>
           <a:solidFill>
-            <a:srgbClr val="CCFBF1"/>
+            <a:srgbClr val="FCE7F3"/>
           </a:solidFill>
           <a:ln w="19050">
             <a:solidFill>
-              <a:srgbClr val="0D9488"/>
+              <a:srgbClr val="DB2777"/>
             </a:solidFill>
             <a:prstDash val="solid"/>
           </a:ln>
@@ -26786,7 +26593,7 @@
         </p:nvSpPr>
         <p:spPr>
           <a:xfrm>
-            <a:off x="4370832" y="2258568"/>
+            <a:off x="5803392" y="2258568"/>
             <a:ext cx="1828800" cy="292608"/>
           </a:xfrm>
           <a:prstGeom prst="rect">
@@ -26805,13 +26612,13 @@
             <a:r>
               <a:rPr lang="en-US" sz="1300" b="1" dirty="0">
                 <a:solidFill>
-                  <a:srgbClr val="0F766E"/>
+                  <a:srgbClr val="9D174D"/>
                 </a:solidFill>
                 <a:latin typeface="Trebuchet MS" pitchFamily="34" charset="0"/>
                 <a:ea typeface="Trebuchet MS" pitchFamily="34" charset="-122"/>
                 <a:cs typeface="Trebuchet MS" pitchFamily="34" charset="-120"/>
               </a:rPr>
-              <a:t>scrib</a:t>
+              <a:t>e</a:t>
             </a:r>
             <a:endParaRPr lang="en-US" sz="1300" dirty="0"/>
           </a:p>
@@ -26825,7 +26632,7 @@
         </p:nvSpPr>
         <p:spPr>
           <a:xfrm>
-            <a:off x="4370832" y="2569464"/>
+            <a:off x="5803392" y="2569464"/>
             <a:ext cx="1828800" cy="201168"/>
           </a:xfrm>
           <a:prstGeom prst="rect">
@@ -26850,7 +26657,7 @@
                 <a:ea typeface="Calibri" pitchFamily="34" charset="-122"/>
                 <a:cs typeface="Calibri" pitchFamily="34" charset="-120"/>
               </a:rPr>
-              <a:t>to write</a:t>
+              <a:t>noun-forming suffix</a:t>
             </a:r>
             <a:endParaRPr lang="en-US" sz="850" dirty="0"/>
           </a:p>
@@ -26864,30 +26671,23 @@
         </p:nvSpPr>
         <p:spPr>
           <a:xfrm>
-            <a:off x="6519672" y="2258568"/>
-            <a:ext cx="1828800" cy="292608"/>
+            <a:off x="365760" y="3273552"/>
+            <a:ext cx="1371600" cy="658368"/>
           </a:xfrm>
           <a:prstGeom prst="rect">
             <a:avLst>
-              <a:gd name="adj" fmla="val 25000"/>
+              <a:gd name="adj" fmla="val 8333"/>
             </a:avLst>
           </a:prstGeom>
           <a:solidFill>
-            <a:srgbClr val="FCE7F3"/>
-          </a:solidFill>
-          <a:ln w="19050">
-            <a:solidFill>
-              <a:srgbClr val="DB2777"/>
-            </a:solidFill>
-            <a:prstDash val="solid"/>
-          </a:ln>
-          <a:effectLst>
-            <a:outerShdw sx="100000" sy="100000" kx="0" ky="0" algn="bl" rotWithShape="0" blurRad="101600" dist="38100" dir="8100000">
-              <a:srgbClr val="000000">
-                <a:alpha val="12000"/>
-              </a:srgbClr>
-            </a:outerShdw>
-          </a:effectLst>
+            <a:srgbClr val="E2E8F0"/>
+          </a:solidFill>
+          <a:ln w="12700">
+            <a:solidFill>
+              <a:srgbClr val="E2E8F0"/>
+            </a:solidFill>
+            <a:prstDash val="solid"/>
+          </a:ln>
         </p:spPr>
       </p:sp>
       <p:sp>
@@ -26898,8 +26698,8 @@
         </p:nvSpPr>
         <p:spPr>
           <a:xfrm>
-            <a:off x="6519672" y="2258568"/>
-            <a:ext cx="1828800" cy="292608"/>
+            <a:off x="365760" y="3273552"/>
+            <a:ext cx="1371600" cy="658368"/>
           </a:xfrm>
           <a:prstGeom prst="rect">
             <a:avLst/>
@@ -26915,69 +26715,30 @@
               <a:buNone/>
             </a:pPr>
             <a:r>
-              <a:rPr lang="en-US" sz="1300" b="1" dirty="0">
-                <a:solidFill>
-                  <a:srgbClr val="9D174D"/>
+              <a:rPr lang="en-US" sz="1100" b="1" dirty="0">
+                <a:solidFill>
+                  <a:srgbClr val="475569"/>
                 </a:solidFill>
                 <a:latin typeface="Trebuchet MS" pitchFamily="34" charset="0"/>
                 <a:ea typeface="Trebuchet MS" pitchFamily="34" charset="-122"/>
                 <a:cs typeface="Trebuchet MS" pitchFamily="34" charset="-120"/>
               </a:rPr>
-              <a:t>e</a:t>
-            </a:r>
-            <a:endParaRPr lang="en-US" sz="1300" dirty="0"/>
-          </a:p>
-        </p:txBody>
-      </p:sp>
-      <p:sp>
-        <p:nvSpPr>
-          <p:cNvPr id="24" name="Text 22"/>
-          <p:cNvSpPr/>
-          <p:nvPr/>
-        </p:nvSpPr>
-        <p:spPr>
-          <a:xfrm>
-            <a:off x="6519672" y="2569464"/>
-            <a:ext cx="1828800" cy="201168"/>
-          </a:xfrm>
-          <a:prstGeom prst="rect">
-            <a:avLst/>
-          </a:prstGeom>
-          <a:noFill/>
-          <a:ln/>
-        </p:spPr>
-        <p:txBody>
-          <a:bodyPr wrap="square" lIns="0" tIns="0" rIns="0" bIns="0" rtlCol="0" anchor="t"/>
-          <a:lstStyle/>
-          <a:p>
-            <a:pPr algn="ctr" indent="0" marL="0">
-              <a:buNone/>
-            </a:pPr>
-            <a:r>
-              <a:rPr lang="en-US" sz="850" dirty="0">
-                <a:solidFill>
-                  <a:srgbClr val="475569"/>
-                </a:solidFill>
-                <a:latin typeface="Calibri" pitchFamily="34" charset="0"/>
-                <a:ea typeface="Calibri" pitchFamily="34" charset="-122"/>
-                <a:cs typeface="Calibri" pitchFamily="34" charset="-120"/>
-              </a:rPr>
-              <a:t>verb-forming suffix</a:t>
-            </a:r>
-            <a:endParaRPr lang="en-US" sz="850" dirty="0"/>
-          </a:p>
-        </p:txBody>
-      </p:sp>
-      <p:sp>
-        <p:nvSpPr>
-          <p:cNvPr id="25" name="Shape 23"/>
-          <p:cNvSpPr/>
-          <p:nvPr/>
-        </p:nvSpPr>
-        <p:spPr>
-          <a:xfrm>
-            <a:off x="365760" y="3273552"/>
-            <a:ext cx="1371600" cy="658368"/>
+              <a:t>Syllables</a:t>
+            </a:r>
+            <a:endParaRPr lang="en-US" sz="1100" dirty="0"/>
+          </a:p>
+        </p:txBody>
+      </p:sp>
+      <p:sp>
+        <p:nvSpPr>
+          <p:cNvPr id="24" name="Shape 22"/>
+          <p:cNvSpPr/>
+          <p:nvPr/>
+        </p:nvSpPr>
+        <p:spPr>
+          <a:xfrm>
+            <a:off x="1874520" y="3273552"/>
+            <a:ext cx="6903720" cy="658368"/>
           </a:xfrm>
           <a:prstGeom prst="rect">
             <a:avLst>
@@ -26985,11 +26746,38 @@
             </a:avLst>
           </a:prstGeom>
           <a:solidFill>
-            <a:srgbClr val="E2E8F0"/>
-          </a:solidFill>
-          <a:ln w="12700">
-            <a:solidFill>
-              <a:srgbClr val="E2E8F0"/>
+            <a:srgbClr val="CCFBF1"/>
+          </a:solidFill>
+          <a:ln w="12700">
+            <a:solidFill>
+              <a:srgbClr val="0D9488"/>
+            </a:solidFill>
+            <a:prstDash val="solid"/>
+          </a:ln>
+        </p:spPr>
+      </p:sp>
+      <p:sp>
+        <p:nvSpPr>
+          <p:cNvPr id="25" name="Shape 23"/>
+          <p:cNvSpPr/>
+          <p:nvPr/>
+        </p:nvSpPr>
+        <p:spPr>
+          <a:xfrm>
+            <a:off x="4370832" y="3364992"/>
+            <a:ext cx="1645920" cy="475488"/>
+          </a:xfrm>
+          <a:prstGeom prst="rect">
+            <a:avLst>
+              <a:gd name="adj" fmla="val 9615"/>
+            </a:avLst>
+          </a:prstGeom>
+          <a:solidFill>
+            <a:srgbClr val="FFFFFF"/>
+          </a:solidFill>
+          <a:ln w="12700">
+            <a:solidFill>
+              <a:srgbClr val="0D9488"/>
             </a:solidFill>
             <a:prstDash val="solid"/>
           </a:ln>
@@ -27003,8 +26791,8 @@
         </p:nvSpPr>
         <p:spPr>
           <a:xfrm>
-            <a:off x="365760" y="3273552"/>
-            <a:ext cx="1371600" cy="658368"/>
+            <a:off x="4370832" y="3364992"/>
+            <a:ext cx="1645920" cy="475488"/>
           </a:xfrm>
           <a:prstGeom prst="rect">
             <a:avLst/>
@@ -27020,17 +26808,17 @@
               <a:buNone/>
             </a:pPr>
             <a:r>
-              <a:rPr lang="en-US" sz="1100" b="1" dirty="0">
-                <a:solidFill>
-                  <a:srgbClr val="475569"/>
+              <a:rPr lang="en-US" sz="1400" b="1" dirty="0">
+                <a:solidFill>
+                  <a:srgbClr val="0D9488"/>
                 </a:solidFill>
                 <a:latin typeface="Trebuchet MS" pitchFamily="34" charset="0"/>
                 <a:ea typeface="Trebuchet MS" pitchFamily="34" charset="-122"/>
                 <a:cs typeface="Trebuchet MS" pitchFamily="34" charset="-120"/>
               </a:rPr>
-              <a:t>Syllables</a:t>
-            </a:r>
-            <a:endParaRPr lang="en-US" sz="1100" dirty="0"/>
+              <a:t>scribe</a:t>
+            </a:r>
+            <a:endParaRPr lang="en-US" sz="1400" dirty="0"/>
           </a:p>
         </p:txBody>
       </p:sp>
@@ -27042,62 +26830,35 @@
         </p:nvSpPr>
         <p:spPr>
           <a:xfrm>
-            <a:off x="1874520" y="3273552"/>
-            <a:ext cx="6903720" cy="658368"/>
+            <a:off x="365760" y="4096512"/>
+            <a:ext cx="1371600" cy="804672"/>
           </a:xfrm>
           <a:prstGeom prst="rect">
             <a:avLst>
-              <a:gd name="adj" fmla="val 8333"/>
+              <a:gd name="adj" fmla="val 6818"/>
             </a:avLst>
           </a:prstGeom>
           <a:solidFill>
-            <a:srgbClr val="CCFBF1"/>
-          </a:solidFill>
-          <a:ln w="12700">
-            <a:solidFill>
-              <a:srgbClr val="0D9488"/>
-            </a:solidFill>
-            <a:prstDash val="solid"/>
-          </a:ln>
-        </p:spPr>
-      </p:sp>
-      <p:sp>
-        <p:nvSpPr>
-          <p:cNvPr id="28" name="Shape 26"/>
-          <p:cNvSpPr/>
-          <p:nvPr/>
-        </p:nvSpPr>
-        <p:spPr>
-          <a:xfrm>
-            <a:off x="2999232" y="3364992"/>
-            <a:ext cx="1645920" cy="475488"/>
-          </a:xfrm>
-          <a:prstGeom prst="rect">
-            <a:avLst>
-              <a:gd name="adj" fmla="val 9615"/>
-            </a:avLst>
-          </a:prstGeom>
-          <a:solidFill>
-            <a:srgbClr val="FFFFFF"/>
-          </a:solidFill>
-          <a:ln w="12700">
-            <a:solidFill>
-              <a:srgbClr val="0D9488"/>
-            </a:solidFill>
-            <a:prstDash val="solid"/>
-          </a:ln>
-        </p:spPr>
-      </p:sp>
-      <p:sp>
-        <p:nvSpPr>
-          <p:cNvPr id="29" name="Text 27"/>
-          <p:cNvSpPr/>
-          <p:nvPr/>
-        </p:nvSpPr>
-        <p:spPr>
-          <a:xfrm>
-            <a:off x="2999232" y="3364992"/>
-            <a:ext cx="1645920" cy="475488"/>
+            <a:srgbClr val="E2E8F0"/>
+          </a:solidFill>
+          <a:ln w="12700">
+            <a:solidFill>
+              <a:srgbClr val="E2E8F0"/>
+            </a:solidFill>
+            <a:prstDash val="solid"/>
+          </a:ln>
+        </p:spPr>
+      </p:sp>
+      <p:sp>
+        <p:nvSpPr>
+          <p:cNvPr id="28" name="Text 26"/>
+          <p:cNvSpPr/>
+          <p:nvPr/>
+        </p:nvSpPr>
+        <p:spPr>
+          <a:xfrm>
+            <a:off x="365760" y="4096512"/>
+            <a:ext cx="1371600" cy="804672"/>
           </a:xfrm>
           <a:prstGeom prst="rect">
             <a:avLst/>
@@ -27113,135 +26874,30 @@
               <a:buNone/>
             </a:pPr>
             <a:r>
-              <a:rPr lang="en-US" sz="1400" b="1" dirty="0">
-                <a:solidFill>
-                  <a:srgbClr val="0D9488"/>
+              <a:rPr lang="en-US" sz="1100" b="1" dirty="0">
+                <a:solidFill>
+                  <a:srgbClr val="475569"/>
                 </a:solidFill>
                 <a:latin typeface="Trebuchet MS" pitchFamily="34" charset="0"/>
                 <a:ea typeface="Trebuchet MS" pitchFamily="34" charset="-122"/>
                 <a:cs typeface="Trebuchet MS" pitchFamily="34" charset="-120"/>
               </a:rPr>
-              <a:t>tran</a:t>
-            </a:r>
-            <a:endParaRPr lang="en-US" sz="1400" dirty="0"/>
-          </a:p>
-        </p:txBody>
-      </p:sp>
-      <p:sp>
-        <p:nvSpPr>
-          <p:cNvPr id="30" name="Text 28"/>
-          <p:cNvSpPr/>
-          <p:nvPr/>
-        </p:nvSpPr>
-        <p:spPr>
-          <a:xfrm>
-            <a:off x="4645152" y="3364992"/>
-            <a:ext cx="1097280" cy="475488"/>
-          </a:xfrm>
-          <a:prstGeom prst="rect">
-            <a:avLst/>
-          </a:prstGeom>
-          <a:noFill/>
-          <a:ln/>
-        </p:spPr>
-        <p:txBody>
-          <a:bodyPr wrap="square" lIns="0" tIns="0" rIns="0" bIns="0" rtlCol="0" anchor="ctr"/>
-          <a:lstStyle/>
-          <a:p>
-            <a:pPr algn="ctr" indent="0" marL="0">
-              <a:buNone/>
-            </a:pPr>
-            <a:r>
-              <a:rPr lang="en-US" sz="1600" b="1" dirty="0">
-                <a:solidFill>
-                  <a:srgbClr val="0D9488"/>
-                </a:solidFill>
-                <a:latin typeface="Trebuchet MS" pitchFamily="34" charset="0"/>
-                <a:ea typeface="Trebuchet MS" pitchFamily="34" charset="-122"/>
-                <a:cs typeface="Trebuchet MS" pitchFamily="34" charset="-120"/>
-              </a:rPr>
-              <a:t>·</a:t>
-            </a:r>
-            <a:endParaRPr lang="en-US" sz="1600" dirty="0"/>
-          </a:p>
-        </p:txBody>
-      </p:sp>
-      <p:sp>
-        <p:nvSpPr>
-          <p:cNvPr id="31" name="Shape 29"/>
-          <p:cNvSpPr/>
-          <p:nvPr/>
-        </p:nvSpPr>
-        <p:spPr>
-          <a:xfrm>
-            <a:off x="5742432" y="3364992"/>
-            <a:ext cx="1645920" cy="475488"/>
-          </a:xfrm>
-          <a:prstGeom prst="rect">
-            <a:avLst>
-              <a:gd name="adj" fmla="val 9615"/>
-            </a:avLst>
-          </a:prstGeom>
-          <a:solidFill>
-            <a:srgbClr val="FFFFFF"/>
-          </a:solidFill>
-          <a:ln w="12700">
-            <a:solidFill>
-              <a:srgbClr val="0D9488"/>
-            </a:solidFill>
-            <a:prstDash val="solid"/>
-          </a:ln>
-        </p:spPr>
-      </p:sp>
-      <p:sp>
-        <p:nvSpPr>
-          <p:cNvPr id="32" name="Text 30"/>
-          <p:cNvSpPr/>
-          <p:nvPr/>
-        </p:nvSpPr>
-        <p:spPr>
-          <a:xfrm>
-            <a:off x="5742432" y="3364992"/>
-            <a:ext cx="1645920" cy="475488"/>
-          </a:xfrm>
-          <a:prstGeom prst="rect">
-            <a:avLst/>
-          </a:prstGeom>
-          <a:noFill/>
-          <a:ln/>
-        </p:spPr>
-        <p:txBody>
-          <a:bodyPr wrap="square" lIns="0" tIns="0" rIns="0" bIns="0" rtlCol="0" anchor="ctr"/>
-          <a:lstStyle/>
-          <a:p>
-            <a:pPr algn="ctr" indent="0" marL="0">
-              <a:buNone/>
-            </a:pPr>
-            <a:r>
-              <a:rPr lang="en-US" sz="1400" b="1" dirty="0">
-                <a:solidFill>
-                  <a:srgbClr val="0D9488"/>
-                </a:solidFill>
-                <a:latin typeface="Trebuchet MS" pitchFamily="34" charset="0"/>
-                <a:ea typeface="Trebuchet MS" pitchFamily="34" charset="-122"/>
-                <a:cs typeface="Trebuchet MS" pitchFamily="34" charset="-120"/>
-              </a:rPr>
-              <a:t>scribe</a:t>
-            </a:r>
-            <a:endParaRPr lang="en-US" sz="1400" dirty="0"/>
-          </a:p>
-        </p:txBody>
-      </p:sp>
-      <p:sp>
-        <p:nvSpPr>
-          <p:cNvPr id="33" name="Shape 31"/>
-          <p:cNvSpPr/>
-          <p:nvPr/>
-        </p:nvSpPr>
-        <p:spPr>
-          <a:xfrm>
-            <a:off x="365760" y="4096512"/>
-            <a:ext cx="1371600" cy="804672"/>
+              <a:t>Phonemes</a:t>
+            </a:r>
+            <a:endParaRPr lang="en-US" sz="1100" dirty="0"/>
+          </a:p>
+        </p:txBody>
+      </p:sp>
+      <p:sp>
+        <p:nvSpPr>
+          <p:cNvPr id="29" name="Shape 27"/>
+          <p:cNvSpPr/>
+          <p:nvPr/>
+        </p:nvSpPr>
+        <p:spPr>
+          <a:xfrm>
+            <a:off x="1874520" y="4096512"/>
+            <a:ext cx="6903720" cy="804672"/>
           </a:xfrm>
           <a:prstGeom prst="rect">
             <a:avLst>
@@ -27249,85 +26905,19 @@
             </a:avLst>
           </a:prstGeom>
           <a:solidFill>
-            <a:srgbClr val="E2E8F0"/>
+            <a:srgbClr val="F8FAFC"/>
           </a:solidFill>
           <a:ln w="12700">
             <a:solidFill>
               <a:srgbClr val="E2E8F0"/>
             </a:solidFill>
-            <a:prstDash val="solid"/>
-          </a:ln>
-        </p:spPr>
-      </p:sp>
-      <p:sp>
-        <p:nvSpPr>
-          <p:cNvPr id="34" name="Text 32"/>
-          <p:cNvSpPr/>
-          <p:nvPr/>
-        </p:nvSpPr>
-        <p:spPr>
-          <a:xfrm>
-            <a:off x="365760" y="4096512"/>
-            <a:ext cx="1371600" cy="804672"/>
-          </a:xfrm>
-          <a:prstGeom prst="rect">
-            <a:avLst/>
-          </a:prstGeom>
-          <a:noFill/>
-          <a:ln/>
-        </p:spPr>
-        <p:txBody>
-          <a:bodyPr wrap="square" lIns="0" tIns="0" rIns="0" bIns="0" rtlCol="0" anchor="ctr"/>
-          <a:lstStyle/>
-          <a:p>
-            <a:pPr algn="ctr" indent="0" marL="0">
-              <a:buNone/>
-            </a:pPr>
-            <a:r>
-              <a:rPr lang="en-US" sz="1100" b="1" dirty="0">
-                <a:solidFill>
-                  <a:srgbClr val="475569"/>
-                </a:solidFill>
-                <a:latin typeface="Trebuchet MS" pitchFamily="34" charset="0"/>
-                <a:ea typeface="Trebuchet MS" pitchFamily="34" charset="-122"/>
-                <a:cs typeface="Trebuchet MS" pitchFamily="34" charset="-120"/>
-              </a:rPr>
-              <a:t>Phonemes</a:t>
-            </a:r>
-            <a:endParaRPr lang="en-US" sz="1100" dirty="0"/>
-          </a:p>
-        </p:txBody>
-      </p:sp>
-      <p:sp>
-        <p:nvSpPr>
-          <p:cNvPr id="35" name="Shape 33"/>
-          <p:cNvSpPr/>
-          <p:nvPr/>
-        </p:nvSpPr>
-        <p:spPr>
-          <a:xfrm>
-            <a:off x="1874520" y="4096512"/>
-            <a:ext cx="6903720" cy="804672"/>
-          </a:xfrm>
-          <a:prstGeom prst="rect">
-            <a:avLst>
-              <a:gd name="adj" fmla="val 6818"/>
-            </a:avLst>
-          </a:prstGeom>
-          <a:solidFill>
-            <a:srgbClr val="F8FAFC"/>
-          </a:solidFill>
-          <a:ln w="12700">
-            <a:solidFill>
-              <a:srgbClr val="E2E8F0"/>
-            </a:solidFill>
             <a:prstDash val="dash"/>
           </a:ln>
         </p:spPr>
       </p:sp>
       <p:sp>
         <p:nvSpPr>
-          <p:cNvPr id="36" name="Text 34"/>
+          <p:cNvPr id="30" name="Text 28"/>
           <p:cNvSpPr/>
           <p:nvPr/>
         </p:nvSpPr>
@@ -27789,7 +27379,7 @@
                 <a:ea typeface="Trebuchet MS" pitchFamily="34" charset="-122"/>
                 <a:cs typeface="Trebuchet MS" pitchFamily="34" charset="-120"/>
               </a:rPr>
-              <a:t>transcribe</a:t>
+              <a:t>scribe</a:t>
             </a:r>
             <a:endParaRPr lang="en-US" sz="2800" dirty="0"/>
           </a:p>
@@ -27869,7 +27459,7 @@
         </p:nvSpPr>
         <p:spPr>
           <a:xfrm>
-            <a:off x="2221992" y="2258568"/>
+            <a:off x="2938272" y="2258568"/>
             <a:ext cx="1828800" cy="292608"/>
           </a:xfrm>
           <a:prstGeom prst="rect">
@@ -27878,11 +27468,11 @@
             </a:avLst>
           </a:prstGeom>
           <a:solidFill>
-            <a:srgbClr val="DDD6FE"/>
+            <a:srgbClr val="CCFBF1"/>
           </a:solidFill>
           <a:ln w="19050">
             <a:solidFill>
-              <a:srgbClr val="7C3AED"/>
+              <a:srgbClr val="0D9488"/>
             </a:solidFill>
             <a:prstDash val="solid"/>
           </a:ln>
@@ -27903,7 +27493,7 @@
         </p:nvSpPr>
         <p:spPr>
           <a:xfrm>
-            <a:off x="2221992" y="2258568"/>
+            <a:off x="2938272" y="2258568"/>
             <a:ext cx="1828800" cy="292608"/>
           </a:xfrm>
           <a:prstGeom prst="rect">
@@ -27922,13 +27512,13 @@
             <a:r>
               <a:rPr lang="en-US" sz="1300" b="1" dirty="0">
                 <a:solidFill>
-                  <a:srgbClr val="4C1D95"/>
+                  <a:srgbClr val="0F766E"/>
                 </a:solidFill>
                 <a:latin typeface="Trebuchet MS" pitchFamily="34" charset="0"/>
                 <a:ea typeface="Trebuchet MS" pitchFamily="34" charset="-122"/>
                 <a:cs typeface="Trebuchet MS" pitchFamily="34" charset="-120"/>
               </a:rPr>
-              <a:t>tran</a:t>
+              <a:t>scrib</a:t>
             </a:r>
             <a:endParaRPr lang="en-US" sz="1300" dirty="0"/>
           </a:p>
@@ -27942,7 +27532,7 @@
         </p:nvSpPr>
         <p:spPr>
           <a:xfrm>
-            <a:off x="2221992" y="2569464"/>
+            <a:off x="2938272" y="2569464"/>
             <a:ext cx="1828800" cy="201168"/>
           </a:xfrm>
           <a:prstGeom prst="rect">
@@ -27967,7 +27557,7 @@
                 <a:ea typeface="Calibri" pitchFamily="34" charset="-122"/>
                 <a:cs typeface="Calibri" pitchFamily="34" charset="-120"/>
               </a:rPr>
-              <a:t>across, over</a:t>
+              <a:t>to write</a:t>
             </a:r>
             <a:endParaRPr lang="en-US" sz="850" dirty="0"/>
           </a:p>
@@ -27981,7 +27571,7 @@
         </p:nvSpPr>
         <p:spPr>
           <a:xfrm>
-            <a:off x="4370832" y="2258568"/>
+            <a:off x="5803392" y="2258568"/>
             <a:ext cx="1828800" cy="292608"/>
           </a:xfrm>
           <a:prstGeom prst="rect">
@@ -27990,11 +27580,11 @@
             </a:avLst>
           </a:prstGeom>
           <a:solidFill>
-            <a:srgbClr val="CCFBF1"/>
+            <a:srgbClr val="FCE7F3"/>
           </a:solidFill>
           <a:ln w="19050">
             <a:solidFill>
-              <a:srgbClr val="0D9488"/>
+              <a:srgbClr val="DB2777"/>
             </a:solidFill>
             <a:prstDash val="solid"/>
           </a:ln>
@@ -28015,7 +27605,7 @@
         </p:nvSpPr>
         <p:spPr>
           <a:xfrm>
-            <a:off x="4370832" y="2258568"/>
+            <a:off x="5803392" y="2258568"/>
             <a:ext cx="1828800" cy="292608"/>
           </a:xfrm>
           <a:prstGeom prst="rect">
@@ -28034,13 +27624,13 @@
             <a:r>
               <a:rPr lang="en-US" sz="1300" b="1" dirty="0">
                 <a:solidFill>
-                  <a:srgbClr val="0F766E"/>
+                  <a:srgbClr val="9D174D"/>
                 </a:solidFill>
                 <a:latin typeface="Trebuchet MS" pitchFamily="34" charset="0"/>
                 <a:ea typeface="Trebuchet MS" pitchFamily="34" charset="-122"/>
                 <a:cs typeface="Trebuchet MS" pitchFamily="34" charset="-120"/>
               </a:rPr>
-              <a:t>scrib</a:t>
+              <a:t>e</a:t>
             </a:r>
             <a:endParaRPr lang="en-US" sz="1300" dirty="0"/>
           </a:p>
@@ -28054,7 +27644,7 @@
         </p:nvSpPr>
         <p:spPr>
           <a:xfrm>
-            <a:off x="4370832" y="2569464"/>
+            <a:off x="5803392" y="2569464"/>
             <a:ext cx="1828800" cy="201168"/>
           </a:xfrm>
           <a:prstGeom prst="rect">
@@ -28079,7 +27669,7 @@
                 <a:ea typeface="Calibri" pitchFamily="34" charset="-122"/>
                 <a:cs typeface="Calibri" pitchFamily="34" charset="-120"/>
               </a:rPr>
-              <a:t>to write</a:t>
+              <a:t>noun-forming suffix</a:t>
             </a:r>
             <a:endParaRPr lang="en-US" sz="850" dirty="0"/>
           </a:p>
@@ -28093,30 +27683,23 @@
         </p:nvSpPr>
         <p:spPr>
           <a:xfrm>
-            <a:off x="6519672" y="2258568"/>
-            <a:ext cx="1828800" cy="292608"/>
+            <a:off x="365760" y="3273552"/>
+            <a:ext cx="1371600" cy="658368"/>
           </a:xfrm>
           <a:prstGeom prst="rect">
             <a:avLst>
-              <a:gd name="adj" fmla="val 25000"/>
+              <a:gd name="adj" fmla="val 8333"/>
             </a:avLst>
           </a:prstGeom>
           <a:solidFill>
-            <a:srgbClr val="FCE7F3"/>
-          </a:solidFill>
-          <a:ln w="19050">
-            <a:solidFill>
-              <a:srgbClr val="DB2777"/>
-            </a:solidFill>
-            <a:prstDash val="solid"/>
-          </a:ln>
-          <a:effectLst>
-            <a:outerShdw sx="100000" sy="100000" kx="0" ky="0" algn="bl" rotWithShape="0" blurRad="101600" dist="38100" dir="8100000">
-              <a:srgbClr val="000000">
-                <a:alpha val="12000"/>
-              </a:srgbClr>
-            </a:outerShdw>
-          </a:effectLst>
+            <a:srgbClr val="E2E8F0"/>
+          </a:solidFill>
+          <a:ln w="12700">
+            <a:solidFill>
+              <a:srgbClr val="E2E8F0"/>
+            </a:solidFill>
+            <a:prstDash val="solid"/>
+          </a:ln>
         </p:spPr>
       </p:sp>
       <p:sp>
@@ -28127,8 +27710,8 @@
         </p:nvSpPr>
         <p:spPr>
           <a:xfrm>
-            <a:off x="6519672" y="2258568"/>
-            <a:ext cx="1828800" cy="292608"/>
+            <a:off x="365760" y="3273552"/>
+            <a:ext cx="1371600" cy="658368"/>
           </a:xfrm>
           <a:prstGeom prst="rect">
             <a:avLst/>
@@ -28144,30 +27727,348 @@
               <a:buNone/>
             </a:pPr>
             <a:r>
-              <a:rPr lang="en-US" sz="1300" b="1" dirty="0">
-                <a:solidFill>
-                  <a:srgbClr val="9D174D"/>
+              <a:rPr lang="en-US" sz="1100" b="1" dirty="0">
+                <a:solidFill>
+                  <a:srgbClr val="475569"/>
                 </a:solidFill>
                 <a:latin typeface="Trebuchet MS" pitchFamily="34" charset="0"/>
                 <a:ea typeface="Trebuchet MS" pitchFamily="34" charset="-122"/>
                 <a:cs typeface="Trebuchet MS" pitchFamily="34" charset="-120"/>
               </a:rPr>
-              <a:t>e</a:t>
-            </a:r>
-            <a:endParaRPr lang="en-US" sz="1300" dirty="0"/>
-          </a:p>
-        </p:txBody>
-      </p:sp>
-      <p:sp>
-        <p:nvSpPr>
-          <p:cNvPr id="24" name="Text 22"/>
-          <p:cNvSpPr/>
-          <p:nvPr/>
-        </p:nvSpPr>
-        <p:spPr>
-          <a:xfrm>
-            <a:off x="6519672" y="2569464"/>
-            <a:ext cx="1828800" cy="201168"/>
+              <a:t>Syllables</a:t>
+            </a:r>
+            <a:endParaRPr lang="en-US" sz="1100" dirty="0"/>
+          </a:p>
+        </p:txBody>
+      </p:sp>
+      <p:sp>
+        <p:nvSpPr>
+          <p:cNvPr id="24" name="Shape 22"/>
+          <p:cNvSpPr/>
+          <p:nvPr/>
+        </p:nvSpPr>
+        <p:spPr>
+          <a:xfrm>
+            <a:off x="1874520" y="3273552"/>
+            <a:ext cx="6903720" cy="658368"/>
+          </a:xfrm>
+          <a:prstGeom prst="rect">
+            <a:avLst>
+              <a:gd name="adj" fmla="val 8333"/>
+            </a:avLst>
+          </a:prstGeom>
+          <a:solidFill>
+            <a:srgbClr val="CCFBF1"/>
+          </a:solidFill>
+          <a:ln w="12700">
+            <a:solidFill>
+              <a:srgbClr val="0D9488"/>
+            </a:solidFill>
+            <a:prstDash val="solid"/>
+          </a:ln>
+        </p:spPr>
+      </p:sp>
+      <p:sp>
+        <p:nvSpPr>
+          <p:cNvPr id="25" name="Shape 23"/>
+          <p:cNvSpPr/>
+          <p:nvPr/>
+        </p:nvSpPr>
+        <p:spPr>
+          <a:xfrm>
+            <a:off x="4370832" y="3364992"/>
+            <a:ext cx="1645920" cy="475488"/>
+          </a:xfrm>
+          <a:prstGeom prst="rect">
+            <a:avLst>
+              <a:gd name="adj" fmla="val 9615"/>
+            </a:avLst>
+          </a:prstGeom>
+          <a:solidFill>
+            <a:srgbClr val="FFFFFF"/>
+          </a:solidFill>
+          <a:ln w="12700">
+            <a:solidFill>
+              <a:srgbClr val="0D9488"/>
+            </a:solidFill>
+            <a:prstDash val="solid"/>
+          </a:ln>
+        </p:spPr>
+      </p:sp>
+      <p:sp>
+        <p:nvSpPr>
+          <p:cNvPr id="26" name="Text 24"/>
+          <p:cNvSpPr/>
+          <p:nvPr/>
+        </p:nvSpPr>
+        <p:spPr>
+          <a:xfrm>
+            <a:off x="4370832" y="3364992"/>
+            <a:ext cx="1645920" cy="475488"/>
+          </a:xfrm>
+          <a:prstGeom prst="rect">
+            <a:avLst/>
+          </a:prstGeom>
+          <a:noFill/>
+          <a:ln/>
+        </p:spPr>
+        <p:txBody>
+          <a:bodyPr wrap="square" lIns="0" tIns="0" rIns="0" bIns="0" rtlCol="0" anchor="ctr"/>
+          <a:lstStyle/>
+          <a:p>
+            <a:pPr algn="ctr" indent="0" marL="0">
+              <a:buNone/>
+            </a:pPr>
+            <a:r>
+              <a:rPr lang="en-US" sz="1400" b="1" dirty="0">
+                <a:solidFill>
+                  <a:srgbClr val="0D9488"/>
+                </a:solidFill>
+                <a:latin typeface="Trebuchet MS" pitchFamily="34" charset="0"/>
+                <a:ea typeface="Trebuchet MS" pitchFamily="34" charset="-122"/>
+                <a:cs typeface="Trebuchet MS" pitchFamily="34" charset="-120"/>
+              </a:rPr>
+              <a:t>scribe</a:t>
+            </a:r>
+            <a:endParaRPr lang="en-US" sz="1400" dirty="0"/>
+          </a:p>
+        </p:txBody>
+      </p:sp>
+      <p:sp>
+        <p:nvSpPr>
+          <p:cNvPr id="27" name="Shape 25"/>
+          <p:cNvSpPr/>
+          <p:nvPr/>
+        </p:nvSpPr>
+        <p:spPr>
+          <a:xfrm>
+            <a:off x="365760" y="4096512"/>
+            <a:ext cx="1371600" cy="804672"/>
+          </a:xfrm>
+          <a:prstGeom prst="rect">
+            <a:avLst>
+              <a:gd name="adj" fmla="val 6818"/>
+            </a:avLst>
+          </a:prstGeom>
+          <a:solidFill>
+            <a:srgbClr val="E2E8F0"/>
+          </a:solidFill>
+          <a:ln w="12700">
+            <a:solidFill>
+              <a:srgbClr val="E2E8F0"/>
+            </a:solidFill>
+            <a:prstDash val="solid"/>
+          </a:ln>
+        </p:spPr>
+      </p:sp>
+      <p:sp>
+        <p:nvSpPr>
+          <p:cNvPr id="28" name="Text 26"/>
+          <p:cNvSpPr/>
+          <p:nvPr/>
+        </p:nvSpPr>
+        <p:spPr>
+          <a:xfrm>
+            <a:off x="365760" y="4096512"/>
+            <a:ext cx="1371600" cy="804672"/>
+          </a:xfrm>
+          <a:prstGeom prst="rect">
+            <a:avLst/>
+          </a:prstGeom>
+          <a:noFill/>
+          <a:ln/>
+        </p:spPr>
+        <p:txBody>
+          <a:bodyPr wrap="square" lIns="0" tIns="0" rIns="0" bIns="0" rtlCol="0" anchor="ctr"/>
+          <a:lstStyle/>
+          <a:p>
+            <a:pPr algn="ctr" indent="0" marL="0">
+              <a:buNone/>
+            </a:pPr>
+            <a:r>
+              <a:rPr lang="en-US" sz="1100" b="1" dirty="0">
+                <a:solidFill>
+                  <a:srgbClr val="475569"/>
+                </a:solidFill>
+                <a:latin typeface="Trebuchet MS" pitchFamily="34" charset="0"/>
+                <a:ea typeface="Trebuchet MS" pitchFamily="34" charset="-122"/>
+                <a:cs typeface="Trebuchet MS" pitchFamily="34" charset="-120"/>
+              </a:rPr>
+              <a:t>Phonemes</a:t>
+            </a:r>
+            <a:endParaRPr lang="en-US" sz="1100" dirty="0"/>
+          </a:p>
+        </p:txBody>
+      </p:sp>
+      <p:sp>
+        <p:nvSpPr>
+          <p:cNvPr id="29" name="Shape 27"/>
+          <p:cNvSpPr/>
+          <p:nvPr/>
+        </p:nvSpPr>
+        <p:spPr>
+          <a:xfrm>
+            <a:off x="1874520" y="4096512"/>
+            <a:ext cx="6903720" cy="804672"/>
+          </a:xfrm>
+          <a:prstGeom prst="rect">
+            <a:avLst>
+              <a:gd name="adj" fmla="val 6818"/>
+            </a:avLst>
+          </a:prstGeom>
+          <a:solidFill>
+            <a:srgbClr val="FCE7F3"/>
+          </a:solidFill>
+          <a:ln w="12700">
+            <a:solidFill>
+              <a:srgbClr val="DB2777"/>
+            </a:solidFill>
+            <a:prstDash val="solid"/>
+          </a:ln>
+        </p:spPr>
+      </p:sp>
+      <p:sp>
+        <p:nvSpPr>
+          <p:cNvPr id="30" name="Shape 28"/>
+          <p:cNvSpPr/>
+          <p:nvPr/>
+        </p:nvSpPr>
+        <p:spPr>
+          <a:xfrm>
+            <a:off x="2427732" y="4169664"/>
+            <a:ext cx="685800" cy="384048"/>
+          </a:xfrm>
+          <a:prstGeom prst="rect">
+            <a:avLst>
+              <a:gd name="adj" fmla="val 9524"/>
+            </a:avLst>
+          </a:prstGeom>
+          <a:solidFill>
+            <a:srgbClr val="FFFFFF"/>
+          </a:solidFill>
+          <a:ln w="12700">
+            <a:solidFill>
+              <a:srgbClr val="DB2777"/>
+            </a:solidFill>
+            <a:prstDash val="solid"/>
+          </a:ln>
+        </p:spPr>
+      </p:sp>
+      <p:sp>
+        <p:nvSpPr>
+          <p:cNvPr id="31" name="Text 29"/>
+          <p:cNvSpPr/>
+          <p:nvPr/>
+        </p:nvSpPr>
+        <p:spPr>
+          <a:xfrm>
+            <a:off x="2427732" y="4169664"/>
+            <a:ext cx="685800" cy="384048"/>
+          </a:xfrm>
+          <a:prstGeom prst="rect">
+            <a:avLst/>
+          </a:prstGeom>
+          <a:noFill/>
+          <a:ln/>
+        </p:spPr>
+        <p:txBody>
+          <a:bodyPr wrap="square" lIns="0" tIns="0" rIns="0" bIns="0" rtlCol="0" anchor="ctr"/>
+          <a:lstStyle/>
+          <a:p>
+            <a:pPr algn="ctr" indent="0" marL="0">
+              <a:buNone/>
+            </a:pPr>
+            <a:r>
+              <a:rPr lang="en-US" sz="900" b="1" dirty="0">
+                <a:solidFill>
+                  <a:srgbClr val="9D174D"/>
+                </a:solidFill>
+                <a:latin typeface="Trebuchet MS" pitchFamily="34" charset="0"/>
+                <a:ea typeface="Trebuchet MS" pitchFamily="34" charset="-122"/>
+                <a:cs typeface="Trebuchet MS" pitchFamily="34" charset="-120"/>
+              </a:rPr>
+              <a:t>s</a:t>
+            </a:r>
+            <a:endParaRPr lang="en-US" sz="900" dirty="0"/>
+          </a:p>
+        </p:txBody>
+      </p:sp>
+      <p:sp>
+        <p:nvSpPr>
+          <p:cNvPr id="32" name="Shape 30"/>
+          <p:cNvSpPr/>
+          <p:nvPr/>
+        </p:nvSpPr>
+        <p:spPr>
+          <a:xfrm>
+            <a:off x="3639312" y="4169664"/>
+            <a:ext cx="685800" cy="384048"/>
+          </a:xfrm>
+          <a:prstGeom prst="rect">
+            <a:avLst>
+              <a:gd name="adj" fmla="val 9524"/>
+            </a:avLst>
+          </a:prstGeom>
+          <a:solidFill>
+            <a:srgbClr val="FFFFFF"/>
+          </a:solidFill>
+          <a:ln w="12700">
+            <a:solidFill>
+              <a:srgbClr val="DB2777"/>
+            </a:solidFill>
+            <a:prstDash val="solid"/>
+          </a:ln>
+        </p:spPr>
+      </p:sp>
+      <p:sp>
+        <p:nvSpPr>
+          <p:cNvPr id="33" name="Text 31"/>
+          <p:cNvSpPr/>
+          <p:nvPr/>
+        </p:nvSpPr>
+        <p:spPr>
+          <a:xfrm>
+            <a:off x="3639312" y="4169664"/>
+            <a:ext cx="685800" cy="384048"/>
+          </a:xfrm>
+          <a:prstGeom prst="rect">
+            <a:avLst/>
+          </a:prstGeom>
+          <a:noFill/>
+          <a:ln/>
+        </p:spPr>
+        <p:txBody>
+          <a:bodyPr wrap="square" lIns="0" tIns="0" rIns="0" bIns="0" rtlCol="0" anchor="ctr"/>
+          <a:lstStyle/>
+          <a:p>
+            <a:pPr algn="ctr" indent="0" marL="0">
+              <a:buNone/>
+            </a:pPr>
+            <a:r>
+              <a:rPr lang="en-US" sz="900" b="1" dirty="0">
+                <a:solidFill>
+                  <a:srgbClr val="9D174D"/>
+                </a:solidFill>
+                <a:latin typeface="Trebuchet MS" pitchFamily="34" charset="0"/>
+                <a:ea typeface="Trebuchet MS" pitchFamily="34" charset="-122"/>
+                <a:cs typeface="Trebuchet MS" pitchFamily="34" charset="-120"/>
+              </a:rPr>
+              <a:t>c</a:t>
+            </a:r>
+            <a:endParaRPr lang="en-US" sz="900" dirty="0"/>
+          </a:p>
+        </p:txBody>
+      </p:sp>
+      <p:sp>
+        <p:nvSpPr>
+          <p:cNvPr id="34" name="Text 32"/>
+          <p:cNvSpPr/>
+          <p:nvPr/>
+        </p:nvSpPr>
+        <p:spPr>
+          <a:xfrm>
+            <a:off x="3639312" y="4572000"/>
+            <a:ext cx="685800" cy="219456"/>
           </a:xfrm>
           <a:prstGeom prst="rect">
             <a:avLst/>
@@ -28183,57 +28084,57 @@
               <a:buNone/>
             </a:pPr>
             <a:r>
-              <a:rPr lang="en-US" sz="850" dirty="0">
-                <a:solidFill>
-                  <a:srgbClr val="475569"/>
+              <a:rPr lang="en-US" sz="750" i="1" dirty="0">
+                <a:solidFill>
+                  <a:srgbClr val="94A3B8"/>
                 </a:solidFill>
                 <a:latin typeface="Calibri" pitchFamily="34" charset="0"/>
                 <a:ea typeface="Calibri" pitchFamily="34" charset="-122"/>
                 <a:cs typeface="Calibri" pitchFamily="34" charset="-120"/>
               </a:rPr>
-              <a:t>verb-forming suffix</a:t>
-            </a:r>
-            <a:endParaRPr lang="en-US" sz="850" dirty="0"/>
-          </a:p>
-        </p:txBody>
-      </p:sp>
-      <p:sp>
-        <p:nvSpPr>
-          <p:cNvPr id="25" name="Shape 23"/>
-          <p:cNvSpPr/>
-          <p:nvPr/>
-        </p:nvSpPr>
-        <p:spPr>
-          <a:xfrm>
-            <a:off x="365760" y="3273552"/>
-            <a:ext cx="1371600" cy="658368"/>
+              <a:t>/k/</a:t>
+            </a:r>
+            <a:endParaRPr lang="en-US" sz="750" dirty="0"/>
+          </a:p>
+        </p:txBody>
+      </p:sp>
+      <p:sp>
+        <p:nvSpPr>
+          <p:cNvPr id="35" name="Shape 33"/>
+          <p:cNvSpPr/>
+          <p:nvPr/>
+        </p:nvSpPr>
+        <p:spPr>
+          <a:xfrm>
+            <a:off x="4850892" y="4169664"/>
+            <a:ext cx="685800" cy="384048"/>
           </a:xfrm>
           <a:prstGeom prst="rect">
             <a:avLst>
-              <a:gd name="adj" fmla="val 8333"/>
+              <a:gd name="adj" fmla="val 9524"/>
             </a:avLst>
           </a:prstGeom>
           <a:solidFill>
-            <a:srgbClr val="E2E8F0"/>
-          </a:solidFill>
-          <a:ln w="12700">
-            <a:solidFill>
-              <a:srgbClr val="E2E8F0"/>
-            </a:solidFill>
-            <a:prstDash val="solid"/>
-          </a:ln>
-        </p:spPr>
-      </p:sp>
-      <p:sp>
-        <p:nvSpPr>
-          <p:cNvPr id="26" name="Text 24"/>
-          <p:cNvSpPr/>
-          <p:nvPr/>
-        </p:nvSpPr>
-        <p:spPr>
-          <a:xfrm>
-            <a:off x="365760" y="3273552"/>
-            <a:ext cx="1371600" cy="658368"/>
+            <a:srgbClr val="FFFFFF"/>
+          </a:solidFill>
+          <a:ln w="12700">
+            <a:solidFill>
+              <a:srgbClr val="DB2777"/>
+            </a:solidFill>
+            <a:prstDash val="solid"/>
+          </a:ln>
+        </p:spPr>
+      </p:sp>
+      <p:sp>
+        <p:nvSpPr>
+          <p:cNvPr id="36" name="Text 34"/>
+          <p:cNvSpPr/>
+          <p:nvPr/>
+        </p:nvSpPr>
+        <p:spPr>
+          <a:xfrm>
+            <a:off x="4850892" y="4169664"/>
+            <a:ext cx="685800" cy="384048"/>
           </a:xfrm>
           <a:prstGeom prst="rect">
             <a:avLst/>
@@ -28249,84 +28150,57 @@
               <a:buNone/>
             </a:pPr>
             <a:r>
-              <a:rPr lang="en-US" sz="1100" b="1" dirty="0">
-                <a:solidFill>
-                  <a:srgbClr val="475569"/>
+              <a:rPr lang="en-US" sz="900" b="1" dirty="0">
+                <a:solidFill>
+                  <a:srgbClr val="9D174D"/>
                 </a:solidFill>
                 <a:latin typeface="Trebuchet MS" pitchFamily="34" charset="0"/>
                 <a:ea typeface="Trebuchet MS" pitchFamily="34" charset="-122"/>
                 <a:cs typeface="Trebuchet MS" pitchFamily="34" charset="-120"/>
               </a:rPr>
-              <a:t>Syllables</a:t>
-            </a:r>
-            <a:endParaRPr lang="en-US" sz="1100" dirty="0"/>
-          </a:p>
-        </p:txBody>
-      </p:sp>
-      <p:sp>
-        <p:nvSpPr>
-          <p:cNvPr id="27" name="Shape 25"/>
-          <p:cNvSpPr/>
-          <p:nvPr/>
-        </p:nvSpPr>
-        <p:spPr>
-          <a:xfrm>
-            <a:off x="1874520" y="3273552"/>
-            <a:ext cx="6903720" cy="658368"/>
+              <a:t>r</a:t>
+            </a:r>
+            <a:endParaRPr lang="en-US" sz="900" dirty="0"/>
+          </a:p>
+        </p:txBody>
+      </p:sp>
+      <p:sp>
+        <p:nvSpPr>
+          <p:cNvPr id="37" name="Shape 35"/>
+          <p:cNvSpPr/>
+          <p:nvPr/>
+        </p:nvSpPr>
+        <p:spPr>
+          <a:xfrm>
+            <a:off x="6062472" y="4169664"/>
+            <a:ext cx="685800" cy="384048"/>
           </a:xfrm>
           <a:prstGeom prst="rect">
             <a:avLst>
-              <a:gd name="adj" fmla="val 8333"/>
+              <a:gd name="adj" fmla="val 9524"/>
             </a:avLst>
           </a:prstGeom>
           <a:solidFill>
-            <a:srgbClr val="CCFBF1"/>
-          </a:solidFill>
-          <a:ln w="12700">
-            <a:solidFill>
-              <a:srgbClr val="0D9488"/>
-            </a:solidFill>
-            <a:prstDash val="solid"/>
-          </a:ln>
-        </p:spPr>
-      </p:sp>
-      <p:sp>
-        <p:nvSpPr>
-          <p:cNvPr id="28" name="Shape 26"/>
-          <p:cNvSpPr/>
-          <p:nvPr/>
-        </p:nvSpPr>
-        <p:spPr>
-          <a:xfrm>
-            <a:off x="2999232" y="3364992"/>
-            <a:ext cx="1645920" cy="475488"/>
-          </a:xfrm>
-          <a:prstGeom prst="rect">
-            <a:avLst>
-              <a:gd name="adj" fmla="val 9615"/>
-            </a:avLst>
-          </a:prstGeom>
-          <a:solidFill>
             <a:srgbClr val="FFFFFF"/>
           </a:solidFill>
           <a:ln w="12700">
             <a:solidFill>
-              <a:srgbClr val="0D9488"/>
-            </a:solidFill>
-            <a:prstDash val="solid"/>
-          </a:ln>
-        </p:spPr>
-      </p:sp>
-      <p:sp>
-        <p:nvSpPr>
-          <p:cNvPr id="29" name="Text 27"/>
-          <p:cNvSpPr/>
-          <p:nvPr/>
-        </p:nvSpPr>
-        <p:spPr>
-          <a:xfrm>
-            <a:off x="2999232" y="3364992"/>
-            <a:ext cx="1645920" cy="475488"/>
+              <a:srgbClr val="DB2777"/>
+            </a:solidFill>
+            <a:prstDash val="solid"/>
+          </a:ln>
+        </p:spPr>
+      </p:sp>
+      <p:sp>
+        <p:nvSpPr>
+          <p:cNvPr id="38" name="Text 36"/>
+          <p:cNvSpPr/>
+          <p:nvPr/>
+        </p:nvSpPr>
+        <p:spPr>
+          <a:xfrm>
+            <a:off x="6062472" y="4169664"/>
+            <a:ext cx="685800" cy="384048"/>
           </a:xfrm>
           <a:prstGeom prst="rect">
             <a:avLst/>
@@ -28342,30 +28216,57 @@
               <a:buNone/>
             </a:pPr>
             <a:r>
-              <a:rPr lang="en-US" sz="1400" b="1" dirty="0">
-                <a:solidFill>
-                  <a:srgbClr val="0D9488"/>
+              <a:rPr lang="en-US" sz="900" b="1" dirty="0">
+                <a:solidFill>
+                  <a:srgbClr val="9D174D"/>
                 </a:solidFill>
                 <a:latin typeface="Trebuchet MS" pitchFamily="34" charset="0"/>
                 <a:ea typeface="Trebuchet MS" pitchFamily="34" charset="-122"/>
                 <a:cs typeface="Trebuchet MS" pitchFamily="34" charset="-120"/>
               </a:rPr>
-              <a:t>tran</a:t>
-            </a:r>
-            <a:endParaRPr lang="en-US" sz="1400" dirty="0"/>
-          </a:p>
-        </p:txBody>
-      </p:sp>
-      <p:sp>
-        <p:nvSpPr>
-          <p:cNvPr id="30" name="Text 28"/>
-          <p:cNvSpPr/>
-          <p:nvPr/>
-        </p:nvSpPr>
-        <p:spPr>
-          <a:xfrm>
-            <a:off x="4645152" y="3364992"/>
-            <a:ext cx="1097280" cy="475488"/>
+              <a:t>i</a:t>
+            </a:r>
+            <a:endParaRPr lang="en-US" sz="900" dirty="0"/>
+          </a:p>
+        </p:txBody>
+      </p:sp>
+      <p:sp>
+        <p:nvSpPr>
+          <p:cNvPr id="39" name="Shape 37"/>
+          <p:cNvSpPr/>
+          <p:nvPr/>
+        </p:nvSpPr>
+        <p:spPr>
+          <a:xfrm>
+            <a:off x="7274052" y="4169664"/>
+            <a:ext cx="685800" cy="384048"/>
+          </a:xfrm>
+          <a:prstGeom prst="rect">
+            <a:avLst>
+              <a:gd name="adj" fmla="val 9524"/>
+            </a:avLst>
+          </a:prstGeom>
+          <a:solidFill>
+            <a:srgbClr val="FFFFFF"/>
+          </a:solidFill>
+          <a:ln w="12700">
+            <a:solidFill>
+              <a:srgbClr val="DB2777"/>
+            </a:solidFill>
+            <a:prstDash val="solid"/>
+          </a:ln>
+        </p:spPr>
+      </p:sp>
+      <p:sp>
+        <p:nvSpPr>
+          <p:cNvPr id="40" name="Text 38"/>
+          <p:cNvSpPr/>
+          <p:nvPr/>
+        </p:nvSpPr>
+        <p:spPr>
+          <a:xfrm>
+            <a:off x="7274052" y="4169664"/>
+            <a:ext cx="685800" cy="384048"/>
           </a:xfrm>
           <a:prstGeom prst="rect">
             <a:avLst/>
@@ -28381,873 +28282,15 @@
               <a:buNone/>
             </a:pPr>
             <a:r>
-              <a:rPr lang="en-US" sz="1600" b="1" dirty="0">
-                <a:solidFill>
-                  <a:srgbClr val="0D9488"/>
+              <a:rPr lang="en-US" sz="900" b="1" dirty="0">
+                <a:solidFill>
+                  <a:srgbClr val="9D174D"/>
                 </a:solidFill>
                 <a:latin typeface="Trebuchet MS" pitchFamily="34" charset="0"/>
                 <a:ea typeface="Trebuchet MS" pitchFamily="34" charset="-122"/>
                 <a:cs typeface="Trebuchet MS" pitchFamily="34" charset="-120"/>
               </a:rPr>
-              <a:t>·</a:t>
-            </a:r>
-            <a:endParaRPr lang="en-US" sz="1600" dirty="0"/>
-          </a:p>
-        </p:txBody>
-      </p:sp>
-      <p:sp>
-        <p:nvSpPr>
-          <p:cNvPr id="31" name="Shape 29"/>
-          <p:cNvSpPr/>
-          <p:nvPr/>
-        </p:nvSpPr>
-        <p:spPr>
-          <a:xfrm>
-            <a:off x="5742432" y="3364992"/>
-            <a:ext cx="1645920" cy="475488"/>
-          </a:xfrm>
-          <a:prstGeom prst="rect">
-            <a:avLst>
-              <a:gd name="adj" fmla="val 9615"/>
-            </a:avLst>
-          </a:prstGeom>
-          <a:solidFill>
-            <a:srgbClr val="FFFFFF"/>
-          </a:solidFill>
-          <a:ln w="12700">
-            <a:solidFill>
-              <a:srgbClr val="0D9488"/>
-            </a:solidFill>
-            <a:prstDash val="solid"/>
-          </a:ln>
-        </p:spPr>
-      </p:sp>
-      <p:sp>
-        <p:nvSpPr>
-          <p:cNvPr id="32" name="Text 30"/>
-          <p:cNvSpPr/>
-          <p:nvPr/>
-        </p:nvSpPr>
-        <p:spPr>
-          <a:xfrm>
-            <a:off x="5742432" y="3364992"/>
-            <a:ext cx="1645920" cy="475488"/>
-          </a:xfrm>
-          <a:prstGeom prst="rect">
-            <a:avLst/>
-          </a:prstGeom>
-          <a:noFill/>
-          <a:ln/>
-        </p:spPr>
-        <p:txBody>
-          <a:bodyPr wrap="square" lIns="0" tIns="0" rIns="0" bIns="0" rtlCol="0" anchor="ctr"/>
-          <a:lstStyle/>
-          <a:p>
-            <a:pPr algn="ctr" indent="0" marL="0">
-              <a:buNone/>
-            </a:pPr>
-            <a:r>
-              <a:rPr lang="en-US" sz="1400" b="1" dirty="0">
-                <a:solidFill>
-                  <a:srgbClr val="0D9488"/>
-                </a:solidFill>
-                <a:latin typeface="Trebuchet MS" pitchFamily="34" charset="0"/>
-                <a:ea typeface="Trebuchet MS" pitchFamily="34" charset="-122"/>
-                <a:cs typeface="Trebuchet MS" pitchFamily="34" charset="-120"/>
-              </a:rPr>
-              <a:t>scribe</a:t>
-            </a:r>
-            <a:endParaRPr lang="en-US" sz="1400" dirty="0"/>
-          </a:p>
-        </p:txBody>
-      </p:sp>
-      <p:sp>
-        <p:nvSpPr>
-          <p:cNvPr id="33" name="Shape 31"/>
-          <p:cNvSpPr/>
-          <p:nvPr/>
-        </p:nvSpPr>
-        <p:spPr>
-          <a:xfrm>
-            <a:off x="365760" y="4096512"/>
-            <a:ext cx="1371600" cy="804672"/>
-          </a:xfrm>
-          <a:prstGeom prst="rect">
-            <a:avLst>
-              <a:gd name="adj" fmla="val 6818"/>
-            </a:avLst>
-          </a:prstGeom>
-          <a:solidFill>
-            <a:srgbClr val="E2E8F0"/>
-          </a:solidFill>
-          <a:ln w="12700">
-            <a:solidFill>
-              <a:srgbClr val="E2E8F0"/>
-            </a:solidFill>
-            <a:prstDash val="solid"/>
-          </a:ln>
-        </p:spPr>
-      </p:sp>
-      <p:sp>
-        <p:nvSpPr>
-          <p:cNvPr id="34" name="Text 32"/>
-          <p:cNvSpPr/>
-          <p:nvPr/>
-        </p:nvSpPr>
-        <p:spPr>
-          <a:xfrm>
-            <a:off x="365760" y="4096512"/>
-            <a:ext cx="1371600" cy="804672"/>
-          </a:xfrm>
-          <a:prstGeom prst="rect">
-            <a:avLst/>
-          </a:prstGeom>
-          <a:noFill/>
-          <a:ln/>
-        </p:spPr>
-        <p:txBody>
-          <a:bodyPr wrap="square" lIns="0" tIns="0" rIns="0" bIns="0" rtlCol="0" anchor="ctr"/>
-          <a:lstStyle/>
-          <a:p>
-            <a:pPr algn="ctr" indent="0" marL="0">
-              <a:buNone/>
-            </a:pPr>
-            <a:r>
-              <a:rPr lang="en-US" sz="1100" b="1" dirty="0">
-                <a:solidFill>
-                  <a:srgbClr val="475569"/>
-                </a:solidFill>
-                <a:latin typeface="Trebuchet MS" pitchFamily="34" charset="0"/>
-                <a:ea typeface="Trebuchet MS" pitchFamily="34" charset="-122"/>
-                <a:cs typeface="Trebuchet MS" pitchFamily="34" charset="-120"/>
-              </a:rPr>
-              <a:t>Phonemes</a:t>
-            </a:r>
-            <a:endParaRPr lang="en-US" sz="1100" dirty="0"/>
-          </a:p>
-        </p:txBody>
-      </p:sp>
-      <p:sp>
-        <p:nvSpPr>
-          <p:cNvPr id="35" name="Shape 33"/>
-          <p:cNvSpPr/>
-          <p:nvPr/>
-        </p:nvSpPr>
-        <p:spPr>
-          <a:xfrm>
-            <a:off x="1874520" y="4096512"/>
-            <a:ext cx="6903720" cy="804672"/>
-          </a:xfrm>
-          <a:prstGeom prst="rect">
-            <a:avLst>
-              <a:gd name="adj" fmla="val 6818"/>
-            </a:avLst>
-          </a:prstGeom>
-          <a:solidFill>
-            <a:srgbClr val="FCE7F3"/>
-          </a:solidFill>
-          <a:ln w="12700">
-            <a:solidFill>
-              <a:srgbClr val="DB2777"/>
-            </a:solidFill>
-            <a:prstDash val="solid"/>
-          </a:ln>
-        </p:spPr>
-      </p:sp>
-      <p:sp>
-        <p:nvSpPr>
-          <p:cNvPr id="36" name="Shape 34"/>
-          <p:cNvSpPr/>
-          <p:nvPr/>
-        </p:nvSpPr>
-        <p:spPr>
-          <a:xfrm>
-            <a:off x="1951828" y="4169664"/>
-            <a:ext cx="603504" cy="384048"/>
-          </a:xfrm>
-          <a:prstGeom prst="rect">
-            <a:avLst>
-              <a:gd name="adj" fmla="val 9524"/>
-            </a:avLst>
-          </a:prstGeom>
-          <a:solidFill>
-            <a:srgbClr val="FFFFFF"/>
-          </a:solidFill>
-          <a:ln w="12700">
-            <a:solidFill>
-              <a:srgbClr val="DB2777"/>
-            </a:solidFill>
-            <a:prstDash val="solid"/>
-          </a:ln>
-        </p:spPr>
-      </p:sp>
-      <p:sp>
-        <p:nvSpPr>
-          <p:cNvPr id="37" name="Text 35"/>
-          <p:cNvSpPr/>
-          <p:nvPr/>
-        </p:nvSpPr>
-        <p:spPr>
-          <a:xfrm>
-            <a:off x="1951828" y="4169664"/>
-            <a:ext cx="603504" cy="384048"/>
-          </a:xfrm>
-          <a:prstGeom prst="rect">
-            <a:avLst/>
-          </a:prstGeom>
-          <a:noFill/>
-          <a:ln/>
-        </p:spPr>
-        <p:txBody>
-          <a:bodyPr wrap="square" lIns="0" tIns="0" rIns="0" bIns="0" rtlCol="0" anchor="ctr"/>
-          <a:lstStyle/>
-          <a:p>
-            <a:pPr algn="ctr" indent="0" marL="0">
-              <a:buNone/>
-            </a:pPr>
-            <a:r>
-              <a:rPr lang="en-US" sz="900" b="1" dirty="0">
-                <a:solidFill>
-                  <a:srgbClr val="9D174D"/>
-                </a:solidFill>
-                <a:latin typeface="Trebuchet MS" pitchFamily="34" charset="0"/>
-                <a:ea typeface="Trebuchet MS" pitchFamily="34" charset="-122"/>
-                <a:cs typeface="Trebuchet MS" pitchFamily="34" charset="-120"/>
-              </a:rPr>
-              <a:t>t</a:t>
-            </a:r>
-            <a:endParaRPr lang="en-US" sz="900" dirty="0"/>
-          </a:p>
-        </p:txBody>
-      </p:sp>
-      <p:sp>
-        <p:nvSpPr>
-          <p:cNvPr id="38" name="Shape 36"/>
-          <p:cNvSpPr/>
-          <p:nvPr/>
-        </p:nvSpPr>
-        <p:spPr>
-          <a:xfrm>
-            <a:off x="2605209" y="4169664"/>
-            <a:ext cx="603504" cy="384048"/>
-          </a:xfrm>
-          <a:prstGeom prst="rect">
-            <a:avLst>
-              <a:gd name="adj" fmla="val 9524"/>
-            </a:avLst>
-          </a:prstGeom>
-          <a:solidFill>
-            <a:srgbClr val="FFFFFF"/>
-          </a:solidFill>
-          <a:ln w="12700">
-            <a:solidFill>
-              <a:srgbClr val="DB2777"/>
-            </a:solidFill>
-            <a:prstDash val="solid"/>
-          </a:ln>
-        </p:spPr>
-      </p:sp>
-      <p:sp>
-        <p:nvSpPr>
-          <p:cNvPr id="39" name="Text 37"/>
-          <p:cNvSpPr/>
-          <p:nvPr/>
-        </p:nvSpPr>
-        <p:spPr>
-          <a:xfrm>
-            <a:off x="2605209" y="4169664"/>
-            <a:ext cx="603504" cy="384048"/>
-          </a:xfrm>
-          <a:prstGeom prst="rect">
-            <a:avLst/>
-          </a:prstGeom>
-          <a:noFill/>
-          <a:ln/>
-        </p:spPr>
-        <p:txBody>
-          <a:bodyPr wrap="square" lIns="0" tIns="0" rIns="0" bIns="0" rtlCol="0" anchor="ctr"/>
-          <a:lstStyle/>
-          <a:p>
-            <a:pPr algn="ctr" indent="0" marL="0">
-              <a:buNone/>
-            </a:pPr>
-            <a:r>
-              <a:rPr lang="en-US" sz="900" b="1" dirty="0">
-                <a:solidFill>
-                  <a:srgbClr val="9D174D"/>
-                </a:solidFill>
-                <a:latin typeface="Trebuchet MS" pitchFamily="34" charset="0"/>
-                <a:ea typeface="Trebuchet MS" pitchFamily="34" charset="-122"/>
-                <a:cs typeface="Trebuchet MS" pitchFamily="34" charset="-120"/>
-              </a:rPr>
-              <a:t>r</a:t>
-            </a:r>
-            <a:endParaRPr lang="en-US" sz="900" dirty="0"/>
-          </a:p>
-        </p:txBody>
-      </p:sp>
-      <p:sp>
-        <p:nvSpPr>
-          <p:cNvPr id="40" name="Shape 38"/>
-          <p:cNvSpPr/>
-          <p:nvPr/>
-        </p:nvSpPr>
-        <p:spPr>
-          <a:xfrm>
-            <a:off x="3258589" y="4169664"/>
-            <a:ext cx="603504" cy="384048"/>
-          </a:xfrm>
-          <a:prstGeom prst="rect">
-            <a:avLst>
-              <a:gd name="adj" fmla="val 9524"/>
-            </a:avLst>
-          </a:prstGeom>
-          <a:solidFill>
-            <a:srgbClr val="FFFFFF"/>
-          </a:solidFill>
-          <a:ln w="12700">
-            <a:solidFill>
-              <a:srgbClr val="DB2777"/>
-            </a:solidFill>
-            <a:prstDash val="solid"/>
-          </a:ln>
-        </p:spPr>
-      </p:sp>
-      <p:sp>
-        <p:nvSpPr>
-          <p:cNvPr id="41" name="Text 39"/>
-          <p:cNvSpPr/>
-          <p:nvPr/>
-        </p:nvSpPr>
-        <p:spPr>
-          <a:xfrm>
-            <a:off x="3258589" y="4169664"/>
-            <a:ext cx="603504" cy="384048"/>
-          </a:xfrm>
-          <a:prstGeom prst="rect">
-            <a:avLst/>
-          </a:prstGeom>
-          <a:noFill/>
-          <a:ln/>
-        </p:spPr>
-        <p:txBody>
-          <a:bodyPr wrap="square" lIns="0" tIns="0" rIns="0" bIns="0" rtlCol="0" anchor="ctr"/>
-          <a:lstStyle/>
-          <a:p>
-            <a:pPr algn="ctr" indent="0" marL="0">
-              <a:buNone/>
-            </a:pPr>
-            <a:r>
-              <a:rPr lang="en-US" sz="900" b="1" dirty="0">
-                <a:solidFill>
-                  <a:srgbClr val="9D174D"/>
-                </a:solidFill>
-                <a:latin typeface="Trebuchet MS" pitchFamily="34" charset="0"/>
-                <a:ea typeface="Trebuchet MS" pitchFamily="34" charset="-122"/>
-                <a:cs typeface="Trebuchet MS" pitchFamily="34" charset="-120"/>
-              </a:rPr>
-              <a:t>a</a:t>
-            </a:r>
-            <a:endParaRPr lang="en-US" sz="900" dirty="0"/>
-          </a:p>
-        </p:txBody>
-      </p:sp>
-      <p:sp>
-        <p:nvSpPr>
-          <p:cNvPr id="42" name="Shape 40"/>
-          <p:cNvSpPr/>
-          <p:nvPr/>
-        </p:nvSpPr>
-        <p:spPr>
-          <a:xfrm>
-            <a:off x="3911969" y="4169664"/>
-            <a:ext cx="603504" cy="384048"/>
-          </a:xfrm>
-          <a:prstGeom prst="rect">
-            <a:avLst>
-              <a:gd name="adj" fmla="val 9524"/>
-            </a:avLst>
-          </a:prstGeom>
-          <a:solidFill>
-            <a:srgbClr val="FFFFFF"/>
-          </a:solidFill>
-          <a:ln w="12700">
-            <a:solidFill>
-              <a:srgbClr val="DB2777"/>
-            </a:solidFill>
-            <a:prstDash val="solid"/>
-          </a:ln>
-        </p:spPr>
-      </p:sp>
-      <p:sp>
-        <p:nvSpPr>
-          <p:cNvPr id="43" name="Text 41"/>
-          <p:cNvSpPr/>
-          <p:nvPr/>
-        </p:nvSpPr>
-        <p:spPr>
-          <a:xfrm>
-            <a:off x="3911969" y="4169664"/>
-            <a:ext cx="603504" cy="384048"/>
-          </a:xfrm>
-          <a:prstGeom prst="rect">
-            <a:avLst/>
-          </a:prstGeom>
-          <a:noFill/>
-          <a:ln/>
-        </p:spPr>
-        <p:txBody>
-          <a:bodyPr wrap="square" lIns="0" tIns="0" rIns="0" bIns="0" rtlCol="0" anchor="ctr"/>
-          <a:lstStyle/>
-          <a:p>
-            <a:pPr algn="ctr" indent="0" marL="0">
-              <a:buNone/>
-            </a:pPr>
-            <a:r>
-              <a:rPr lang="en-US" sz="900" b="1" dirty="0">
-                <a:solidFill>
-                  <a:srgbClr val="9D174D"/>
-                </a:solidFill>
-                <a:latin typeface="Trebuchet MS" pitchFamily="34" charset="0"/>
-                <a:ea typeface="Trebuchet MS" pitchFamily="34" charset="-122"/>
-                <a:cs typeface="Trebuchet MS" pitchFamily="34" charset="-120"/>
-              </a:rPr>
-              <a:t>n</a:t>
-            </a:r>
-            <a:endParaRPr lang="en-US" sz="900" dirty="0"/>
-          </a:p>
-        </p:txBody>
-      </p:sp>
-      <p:sp>
-        <p:nvSpPr>
-          <p:cNvPr id="44" name="Shape 42"/>
-          <p:cNvSpPr/>
-          <p:nvPr/>
-        </p:nvSpPr>
-        <p:spPr>
-          <a:xfrm>
-            <a:off x="4565350" y="4169664"/>
-            <a:ext cx="603504" cy="384048"/>
-          </a:xfrm>
-          <a:prstGeom prst="rect">
-            <a:avLst>
-              <a:gd name="adj" fmla="val 9524"/>
-            </a:avLst>
-          </a:prstGeom>
-          <a:solidFill>
-            <a:srgbClr val="FFFFFF"/>
-          </a:solidFill>
-          <a:ln w="12700">
-            <a:solidFill>
-              <a:srgbClr val="DB2777"/>
-            </a:solidFill>
-            <a:prstDash val="solid"/>
-          </a:ln>
-        </p:spPr>
-      </p:sp>
-      <p:sp>
-        <p:nvSpPr>
-          <p:cNvPr id="45" name="Text 43"/>
-          <p:cNvSpPr/>
-          <p:nvPr/>
-        </p:nvSpPr>
-        <p:spPr>
-          <a:xfrm>
-            <a:off x="4565350" y="4169664"/>
-            <a:ext cx="603504" cy="384048"/>
-          </a:xfrm>
-          <a:prstGeom prst="rect">
-            <a:avLst/>
-          </a:prstGeom>
-          <a:noFill/>
-          <a:ln/>
-        </p:spPr>
-        <p:txBody>
-          <a:bodyPr wrap="square" lIns="0" tIns="0" rIns="0" bIns="0" rtlCol="0" anchor="ctr"/>
-          <a:lstStyle/>
-          <a:p>
-            <a:pPr algn="ctr" indent="0" marL="0">
-              <a:buNone/>
-            </a:pPr>
-            <a:r>
-              <a:rPr lang="en-US" sz="900" b="1" dirty="0">
-                <a:solidFill>
-                  <a:srgbClr val="9D174D"/>
-                </a:solidFill>
-                <a:latin typeface="Trebuchet MS" pitchFamily="34" charset="0"/>
-                <a:ea typeface="Trebuchet MS" pitchFamily="34" charset="-122"/>
-                <a:cs typeface="Trebuchet MS" pitchFamily="34" charset="-120"/>
-              </a:rPr>
-              <a:t>s</a:t>
-            </a:r>
-            <a:endParaRPr lang="en-US" sz="900" dirty="0"/>
-          </a:p>
-        </p:txBody>
-      </p:sp>
-      <p:sp>
-        <p:nvSpPr>
-          <p:cNvPr id="46" name="Shape 44"/>
-          <p:cNvSpPr/>
-          <p:nvPr/>
-        </p:nvSpPr>
-        <p:spPr>
-          <a:xfrm>
-            <a:off x="5218730" y="4169664"/>
-            <a:ext cx="603504" cy="384048"/>
-          </a:xfrm>
-          <a:prstGeom prst="rect">
-            <a:avLst>
-              <a:gd name="adj" fmla="val 9524"/>
-            </a:avLst>
-          </a:prstGeom>
-          <a:solidFill>
-            <a:srgbClr val="FFFFFF"/>
-          </a:solidFill>
-          <a:ln w="12700">
-            <a:solidFill>
-              <a:srgbClr val="DB2777"/>
-            </a:solidFill>
-            <a:prstDash val="solid"/>
-          </a:ln>
-        </p:spPr>
-      </p:sp>
-      <p:sp>
-        <p:nvSpPr>
-          <p:cNvPr id="47" name="Text 45"/>
-          <p:cNvSpPr/>
-          <p:nvPr/>
-        </p:nvSpPr>
-        <p:spPr>
-          <a:xfrm>
-            <a:off x="5218730" y="4169664"/>
-            <a:ext cx="603504" cy="384048"/>
-          </a:xfrm>
-          <a:prstGeom prst="rect">
-            <a:avLst/>
-          </a:prstGeom>
-          <a:noFill/>
-          <a:ln/>
-        </p:spPr>
-        <p:txBody>
-          <a:bodyPr wrap="square" lIns="0" tIns="0" rIns="0" bIns="0" rtlCol="0" anchor="ctr"/>
-          <a:lstStyle/>
-          <a:p>
-            <a:pPr algn="ctr" indent="0" marL="0">
-              <a:buNone/>
-            </a:pPr>
-            <a:r>
-              <a:rPr lang="en-US" sz="900" b="1" dirty="0">
-                <a:solidFill>
-                  <a:srgbClr val="9D174D"/>
-                </a:solidFill>
-                <a:latin typeface="Trebuchet MS" pitchFamily="34" charset="0"/>
-                <a:ea typeface="Trebuchet MS" pitchFamily="34" charset="-122"/>
-                <a:cs typeface="Trebuchet MS" pitchFamily="34" charset="-120"/>
-              </a:rPr>
-              <a:t>c</a:t>
-            </a:r>
-            <a:endParaRPr lang="en-US" sz="900" dirty="0"/>
-          </a:p>
-        </p:txBody>
-      </p:sp>
-      <p:sp>
-        <p:nvSpPr>
-          <p:cNvPr id="48" name="Text 46"/>
-          <p:cNvSpPr/>
-          <p:nvPr/>
-        </p:nvSpPr>
-        <p:spPr>
-          <a:xfrm>
-            <a:off x="5218730" y="4572000"/>
-            <a:ext cx="603504" cy="219456"/>
-          </a:xfrm>
-          <a:prstGeom prst="rect">
-            <a:avLst/>
-          </a:prstGeom>
-          <a:noFill/>
-          <a:ln/>
-        </p:spPr>
-        <p:txBody>
-          <a:bodyPr wrap="square" lIns="0" tIns="0" rIns="0" bIns="0" rtlCol="0" anchor="t"/>
-          <a:lstStyle/>
-          <a:p>
-            <a:pPr algn="ctr" indent="0" marL="0">
-              <a:buNone/>
-            </a:pPr>
-            <a:r>
-              <a:rPr lang="en-US" sz="750" i="1" dirty="0">
-                <a:solidFill>
-                  <a:srgbClr val="94A3B8"/>
-                </a:solidFill>
-                <a:latin typeface="Calibri" pitchFamily="34" charset="0"/>
-                <a:ea typeface="Calibri" pitchFamily="34" charset="-122"/>
-                <a:cs typeface="Calibri" pitchFamily="34" charset="-120"/>
-              </a:rPr>
-              <a:t>/k/</a:t>
-            </a:r>
-            <a:endParaRPr lang="en-US" sz="750" dirty="0"/>
-          </a:p>
-        </p:txBody>
-      </p:sp>
-      <p:sp>
-        <p:nvSpPr>
-          <p:cNvPr id="49" name="Shape 47"/>
-          <p:cNvSpPr/>
-          <p:nvPr/>
-        </p:nvSpPr>
-        <p:spPr>
-          <a:xfrm>
-            <a:off x="5872111" y="4169664"/>
-            <a:ext cx="603504" cy="384048"/>
-          </a:xfrm>
-          <a:prstGeom prst="rect">
-            <a:avLst>
-              <a:gd name="adj" fmla="val 9524"/>
-            </a:avLst>
-          </a:prstGeom>
-          <a:solidFill>
-            <a:srgbClr val="FFFFFF"/>
-          </a:solidFill>
-          <a:ln w="12700">
-            <a:solidFill>
-              <a:srgbClr val="DB2777"/>
-            </a:solidFill>
-            <a:prstDash val="solid"/>
-          </a:ln>
-        </p:spPr>
-      </p:sp>
-      <p:sp>
-        <p:nvSpPr>
-          <p:cNvPr id="50" name="Text 48"/>
-          <p:cNvSpPr/>
-          <p:nvPr/>
-        </p:nvSpPr>
-        <p:spPr>
-          <a:xfrm>
-            <a:off x="5872111" y="4169664"/>
-            <a:ext cx="603504" cy="384048"/>
-          </a:xfrm>
-          <a:prstGeom prst="rect">
-            <a:avLst/>
-          </a:prstGeom>
-          <a:noFill/>
-          <a:ln/>
-        </p:spPr>
-        <p:txBody>
-          <a:bodyPr wrap="square" lIns="0" tIns="0" rIns="0" bIns="0" rtlCol="0" anchor="ctr"/>
-          <a:lstStyle/>
-          <a:p>
-            <a:pPr algn="ctr" indent="0" marL="0">
-              <a:buNone/>
-            </a:pPr>
-            <a:r>
-              <a:rPr lang="en-US" sz="900" b="1" dirty="0">
-                <a:solidFill>
-                  <a:srgbClr val="9D174D"/>
-                </a:solidFill>
-                <a:latin typeface="Trebuchet MS" pitchFamily="34" charset="0"/>
-                <a:ea typeface="Trebuchet MS" pitchFamily="34" charset="-122"/>
-                <a:cs typeface="Trebuchet MS" pitchFamily="34" charset="-120"/>
-              </a:rPr>
-              <a:t>r</a:t>
-            </a:r>
-            <a:endParaRPr lang="en-US" sz="900" dirty="0"/>
-          </a:p>
-        </p:txBody>
-      </p:sp>
-      <p:sp>
-        <p:nvSpPr>
-          <p:cNvPr id="51" name="Shape 49"/>
-          <p:cNvSpPr/>
-          <p:nvPr/>
-        </p:nvSpPr>
-        <p:spPr>
-          <a:xfrm>
-            <a:off x="6525491" y="4169664"/>
-            <a:ext cx="603504" cy="384048"/>
-          </a:xfrm>
-          <a:prstGeom prst="rect">
-            <a:avLst>
-              <a:gd name="adj" fmla="val 9524"/>
-            </a:avLst>
-          </a:prstGeom>
-          <a:solidFill>
-            <a:srgbClr val="FFFFFF"/>
-          </a:solidFill>
-          <a:ln w="12700">
-            <a:solidFill>
-              <a:srgbClr val="DB2777"/>
-            </a:solidFill>
-            <a:prstDash val="solid"/>
-          </a:ln>
-        </p:spPr>
-      </p:sp>
-      <p:sp>
-        <p:nvSpPr>
-          <p:cNvPr id="52" name="Text 50"/>
-          <p:cNvSpPr/>
-          <p:nvPr/>
-        </p:nvSpPr>
-        <p:spPr>
-          <a:xfrm>
-            <a:off x="6525491" y="4169664"/>
-            <a:ext cx="603504" cy="384048"/>
-          </a:xfrm>
-          <a:prstGeom prst="rect">
-            <a:avLst/>
-          </a:prstGeom>
-          <a:noFill/>
-          <a:ln/>
-        </p:spPr>
-        <p:txBody>
-          <a:bodyPr wrap="square" lIns="0" tIns="0" rIns="0" bIns="0" rtlCol="0" anchor="ctr"/>
-          <a:lstStyle/>
-          <a:p>
-            <a:pPr algn="ctr" indent="0" marL="0">
-              <a:buNone/>
-            </a:pPr>
-            <a:r>
-              <a:rPr lang="en-US" sz="900" b="1" dirty="0">
-                <a:solidFill>
-                  <a:srgbClr val="9D174D"/>
-                </a:solidFill>
-                <a:latin typeface="Trebuchet MS" pitchFamily="34" charset="0"/>
-                <a:ea typeface="Trebuchet MS" pitchFamily="34" charset="-122"/>
-                <a:cs typeface="Trebuchet MS" pitchFamily="34" charset="-120"/>
-              </a:rPr>
-              <a:t>i</a:t>
-            </a:r>
-            <a:endParaRPr lang="en-US" sz="900" dirty="0"/>
-          </a:p>
-        </p:txBody>
-      </p:sp>
-      <p:sp>
-        <p:nvSpPr>
-          <p:cNvPr id="53" name="Shape 51"/>
-          <p:cNvSpPr/>
-          <p:nvPr/>
-        </p:nvSpPr>
-        <p:spPr>
-          <a:xfrm>
-            <a:off x="7178871" y="4169664"/>
-            <a:ext cx="603504" cy="384048"/>
-          </a:xfrm>
-          <a:prstGeom prst="rect">
-            <a:avLst>
-              <a:gd name="adj" fmla="val 9524"/>
-            </a:avLst>
-          </a:prstGeom>
-          <a:solidFill>
-            <a:srgbClr val="FFFFFF"/>
-          </a:solidFill>
-          <a:ln w="12700">
-            <a:solidFill>
-              <a:srgbClr val="DB2777"/>
-            </a:solidFill>
-            <a:prstDash val="solid"/>
-          </a:ln>
-        </p:spPr>
-      </p:sp>
-      <p:sp>
-        <p:nvSpPr>
-          <p:cNvPr id="54" name="Text 52"/>
-          <p:cNvSpPr/>
-          <p:nvPr/>
-        </p:nvSpPr>
-        <p:spPr>
-          <a:xfrm>
-            <a:off x="7178871" y="4169664"/>
-            <a:ext cx="603504" cy="384048"/>
-          </a:xfrm>
-          <a:prstGeom prst="rect">
-            <a:avLst/>
-          </a:prstGeom>
-          <a:noFill/>
-          <a:ln/>
-        </p:spPr>
-        <p:txBody>
-          <a:bodyPr wrap="square" lIns="0" tIns="0" rIns="0" bIns="0" rtlCol="0" anchor="ctr"/>
-          <a:lstStyle/>
-          <a:p>
-            <a:pPr algn="ctr" indent="0" marL="0">
-              <a:buNone/>
-            </a:pPr>
-            <a:r>
-              <a:rPr lang="en-US" sz="900" b="1" dirty="0">
-                <a:solidFill>
-                  <a:srgbClr val="9D174D"/>
-                </a:solidFill>
-                <a:latin typeface="Trebuchet MS" pitchFamily="34" charset="0"/>
-                <a:ea typeface="Trebuchet MS" pitchFamily="34" charset="-122"/>
-                <a:cs typeface="Trebuchet MS" pitchFamily="34" charset="-120"/>
-              </a:rPr>
-              <a:t>b</a:t>
-            </a:r>
-            <a:endParaRPr lang="en-US" sz="900" dirty="0"/>
-          </a:p>
-        </p:txBody>
-      </p:sp>
-      <p:sp>
-        <p:nvSpPr>
-          <p:cNvPr id="55" name="Shape 53"/>
-          <p:cNvSpPr/>
-          <p:nvPr/>
-        </p:nvSpPr>
-        <p:spPr>
-          <a:xfrm>
-            <a:off x="7832252" y="4169664"/>
-            <a:ext cx="603504" cy="384048"/>
-          </a:xfrm>
-          <a:prstGeom prst="rect">
-            <a:avLst>
-              <a:gd name="adj" fmla="val 9524"/>
-            </a:avLst>
-          </a:prstGeom>
-          <a:solidFill>
-            <a:srgbClr val="FFFFFF"/>
-          </a:solidFill>
-          <a:ln w="12700">
-            <a:solidFill>
-              <a:srgbClr val="DB2777"/>
-            </a:solidFill>
-            <a:prstDash val="solid"/>
-          </a:ln>
-        </p:spPr>
-      </p:sp>
-      <p:sp>
-        <p:nvSpPr>
-          <p:cNvPr id="56" name="Text 54"/>
-          <p:cNvSpPr/>
-          <p:nvPr/>
-        </p:nvSpPr>
-        <p:spPr>
-          <a:xfrm>
-            <a:off x="7832252" y="4169664"/>
-            <a:ext cx="603504" cy="384048"/>
-          </a:xfrm>
-          <a:prstGeom prst="rect">
-            <a:avLst/>
-          </a:prstGeom>
-          <a:noFill/>
-          <a:ln/>
-        </p:spPr>
-        <p:txBody>
-          <a:bodyPr wrap="square" lIns="0" tIns="0" rIns="0" bIns="0" rtlCol="0" anchor="ctr"/>
-          <a:lstStyle/>
-          <a:p>
-            <a:pPr algn="ctr" indent="0" marL="0">
-              <a:buNone/>
-            </a:pPr>
-            <a:r>
-              <a:rPr lang="en-US" sz="900" b="1" dirty="0">
-                <a:solidFill>
-                  <a:srgbClr val="9D174D"/>
-                </a:solidFill>
-                <a:latin typeface="Trebuchet MS" pitchFamily="34" charset="0"/>
-                <a:ea typeface="Trebuchet MS" pitchFamily="34" charset="-122"/>
-                <a:cs typeface="Trebuchet MS" pitchFamily="34" charset="-120"/>
-              </a:rPr>
-              <a:t>e</a:t>
+              <a:t>be</a:t>
             </a:r>
             <a:endParaRPr lang="en-US" sz="900" dirty="0"/>
           </a:p>
@@ -29678,7 +28721,7 @@
                 <a:ea typeface="Trebuchet MS" pitchFamily="34" charset="-122"/>
                 <a:cs typeface="Trebuchet MS" pitchFamily="34" charset="-120"/>
               </a:rPr>
-              <a:t>scribble</a:t>
+              <a:t>inscribe</a:t>
             </a:r>
             <a:endParaRPr lang="en-US" sz="2800" dirty="0"/>
           </a:p>
@@ -30505,7 +29548,7 @@
                 <a:ea typeface="Trebuchet MS" pitchFamily="34" charset="-122"/>
                 <a:cs typeface="Trebuchet MS" pitchFamily="34" charset="-120"/>
               </a:rPr>
-              <a:t>scribble</a:t>
+              <a:t>inscribe</a:t>
             </a:r>
             <a:endParaRPr lang="en-US" sz="2800" dirty="0"/>
           </a:p>
@@ -30585,7 +29628,7 @@
         </p:nvSpPr>
         <p:spPr>
           <a:xfrm>
-            <a:off x="2938272" y="2258568"/>
+            <a:off x="2221992" y="2258568"/>
             <a:ext cx="1828800" cy="292608"/>
           </a:xfrm>
           <a:prstGeom prst="rect">
@@ -30594,11 +29637,11 @@
             </a:avLst>
           </a:prstGeom>
           <a:solidFill>
-            <a:srgbClr val="CCFBF1"/>
+            <a:srgbClr val="DDD6FE"/>
           </a:solidFill>
           <a:ln w="19050">
             <a:solidFill>
-              <a:srgbClr val="0D9488"/>
+              <a:srgbClr val="7C3AED"/>
             </a:solidFill>
             <a:prstDash val="solid"/>
           </a:ln>
@@ -30619,7 +29662,7 @@
         </p:nvSpPr>
         <p:spPr>
           <a:xfrm>
-            <a:off x="2938272" y="2258568"/>
+            <a:off x="2221992" y="2258568"/>
             <a:ext cx="1828800" cy="292608"/>
           </a:xfrm>
           <a:prstGeom prst="rect">
@@ -30638,13 +29681,13 @@
             <a:r>
               <a:rPr lang="en-US" sz="1300" b="1" dirty="0">
                 <a:solidFill>
-                  <a:srgbClr val="0F766E"/>
+                  <a:srgbClr val="4C1D95"/>
                 </a:solidFill>
                 <a:latin typeface="Trebuchet MS" pitchFamily="34" charset="0"/>
                 <a:ea typeface="Trebuchet MS" pitchFamily="34" charset="-122"/>
                 <a:cs typeface="Trebuchet MS" pitchFamily="34" charset="-120"/>
               </a:rPr>
-              <a:t>scrib</a:t>
+              <a:t>in</a:t>
             </a:r>
             <a:endParaRPr lang="en-US" sz="1300" dirty="0"/>
           </a:p>
@@ -30658,7 +29701,7 @@
         </p:nvSpPr>
         <p:spPr>
           <a:xfrm>
-            <a:off x="2938272" y="2569464"/>
+            <a:off x="2221992" y="2569464"/>
             <a:ext cx="1828800" cy="201168"/>
           </a:xfrm>
           <a:prstGeom prst="rect">
@@ -30683,7 +29726,7 @@
                 <a:ea typeface="Calibri" pitchFamily="34" charset="-122"/>
                 <a:cs typeface="Calibri" pitchFamily="34" charset="-120"/>
               </a:rPr>
-              <a:t>to write</a:t>
+              <a:t>into, upon</a:t>
             </a:r>
             <a:endParaRPr lang="en-US" sz="850" dirty="0"/>
           </a:p>
@@ -30697,7 +29740,7 @@
         </p:nvSpPr>
         <p:spPr>
           <a:xfrm>
-            <a:off x="5803392" y="2258568"/>
+            <a:off x="4370832" y="2258568"/>
             <a:ext cx="1828800" cy="292608"/>
           </a:xfrm>
           <a:prstGeom prst="rect">
@@ -30706,11 +29749,11 @@
             </a:avLst>
           </a:prstGeom>
           <a:solidFill>
-            <a:srgbClr val="FCE7F3"/>
+            <a:srgbClr val="CCFBF1"/>
           </a:solidFill>
           <a:ln w="19050">
             <a:solidFill>
-              <a:srgbClr val="DB2777"/>
+              <a:srgbClr val="0D9488"/>
             </a:solidFill>
             <a:prstDash val="solid"/>
           </a:ln>
@@ -30731,7 +29774,7 @@
         </p:nvSpPr>
         <p:spPr>
           <a:xfrm>
-            <a:off x="5803392" y="2258568"/>
+            <a:off x="4370832" y="2258568"/>
             <a:ext cx="1828800" cy="292608"/>
           </a:xfrm>
           <a:prstGeom prst="rect">
@@ -30750,13 +29793,13 @@
             <a:r>
               <a:rPr lang="en-US" sz="1300" b="1" dirty="0">
                 <a:solidFill>
-                  <a:srgbClr val="9D174D"/>
+                  <a:srgbClr val="0F766E"/>
                 </a:solidFill>
                 <a:latin typeface="Trebuchet MS" pitchFamily="34" charset="0"/>
                 <a:ea typeface="Trebuchet MS" pitchFamily="34" charset="-122"/>
                 <a:cs typeface="Trebuchet MS" pitchFamily="34" charset="-120"/>
               </a:rPr>
-              <a:t>ble</a:t>
+              <a:t>scrib</a:t>
             </a:r>
             <a:endParaRPr lang="en-US" sz="1300" dirty="0"/>
           </a:p>
@@ -30770,7 +29813,7 @@
         </p:nvSpPr>
         <p:spPr>
           <a:xfrm>
-            <a:off x="5803392" y="2569464"/>
+            <a:off x="4370832" y="2569464"/>
             <a:ext cx="1828800" cy="201168"/>
           </a:xfrm>
           <a:prstGeom prst="rect">
@@ -30795,7 +29838,7 @@
                 <a:ea typeface="Calibri" pitchFamily="34" charset="-122"/>
                 <a:cs typeface="Calibri" pitchFamily="34" charset="-120"/>
               </a:rPr>
-              <a:t>repeated or diminutive action</a:t>
+              <a:t>to write</a:t>
             </a:r>
             <a:endParaRPr lang="en-US" sz="850" dirty="0"/>
           </a:p>
@@ -30804,6 +29847,118 @@
       <p:sp>
         <p:nvSpPr>
           <p:cNvPr id="22" name="Shape 20"/>
+          <p:cNvSpPr/>
+          <p:nvPr/>
+        </p:nvSpPr>
+        <p:spPr>
+          <a:xfrm>
+            <a:off x="6519672" y="2258568"/>
+            <a:ext cx="1828800" cy="292608"/>
+          </a:xfrm>
+          <a:prstGeom prst="rect">
+            <a:avLst>
+              <a:gd name="adj" fmla="val 25000"/>
+            </a:avLst>
+          </a:prstGeom>
+          <a:solidFill>
+            <a:srgbClr val="FCE7F3"/>
+          </a:solidFill>
+          <a:ln w="19050">
+            <a:solidFill>
+              <a:srgbClr val="DB2777"/>
+            </a:solidFill>
+            <a:prstDash val="solid"/>
+          </a:ln>
+          <a:effectLst>
+            <a:outerShdw sx="100000" sy="100000" kx="0" ky="0" algn="bl" rotWithShape="0" blurRad="101600" dist="38100" dir="8100000">
+              <a:srgbClr val="000000">
+                <a:alpha val="12000"/>
+              </a:srgbClr>
+            </a:outerShdw>
+          </a:effectLst>
+        </p:spPr>
+      </p:sp>
+      <p:sp>
+        <p:nvSpPr>
+          <p:cNvPr id="23" name="Text 21"/>
+          <p:cNvSpPr/>
+          <p:nvPr/>
+        </p:nvSpPr>
+        <p:spPr>
+          <a:xfrm>
+            <a:off x="6519672" y="2258568"/>
+            <a:ext cx="1828800" cy="292608"/>
+          </a:xfrm>
+          <a:prstGeom prst="rect">
+            <a:avLst/>
+          </a:prstGeom>
+          <a:noFill/>
+          <a:ln/>
+        </p:spPr>
+        <p:txBody>
+          <a:bodyPr wrap="square" lIns="0" tIns="0" rIns="0" bIns="0" rtlCol="0" anchor="ctr"/>
+          <a:lstStyle/>
+          <a:p>
+            <a:pPr algn="ctr" indent="0" marL="0">
+              <a:buNone/>
+            </a:pPr>
+            <a:r>
+              <a:rPr lang="en-US" sz="1300" b="1" dirty="0">
+                <a:solidFill>
+                  <a:srgbClr val="9D174D"/>
+                </a:solidFill>
+                <a:latin typeface="Trebuchet MS" pitchFamily="34" charset="0"/>
+                <a:ea typeface="Trebuchet MS" pitchFamily="34" charset="-122"/>
+                <a:cs typeface="Trebuchet MS" pitchFamily="34" charset="-120"/>
+              </a:rPr>
+              <a:t>e</a:t>
+            </a:r>
+            <a:endParaRPr lang="en-US" sz="1300" dirty="0"/>
+          </a:p>
+        </p:txBody>
+      </p:sp>
+      <p:sp>
+        <p:nvSpPr>
+          <p:cNvPr id="24" name="Text 22"/>
+          <p:cNvSpPr/>
+          <p:nvPr/>
+        </p:nvSpPr>
+        <p:spPr>
+          <a:xfrm>
+            <a:off x="6519672" y="2569464"/>
+            <a:ext cx="1828800" cy="201168"/>
+          </a:xfrm>
+          <a:prstGeom prst="rect">
+            <a:avLst/>
+          </a:prstGeom>
+          <a:noFill/>
+          <a:ln/>
+        </p:spPr>
+        <p:txBody>
+          <a:bodyPr wrap="square" lIns="0" tIns="0" rIns="0" bIns="0" rtlCol="0" anchor="t"/>
+          <a:lstStyle/>
+          <a:p>
+            <a:pPr algn="ctr" indent="0" marL="0">
+              <a:buNone/>
+            </a:pPr>
+            <a:r>
+              <a:rPr lang="en-US" sz="850" dirty="0">
+                <a:solidFill>
+                  <a:srgbClr val="475569"/>
+                </a:solidFill>
+                <a:latin typeface="Calibri" pitchFamily="34" charset="0"/>
+                <a:ea typeface="Calibri" pitchFamily="34" charset="-122"/>
+                <a:cs typeface="Calibri" pitchFamily="34" charset="-120"/>
+              </a:rPr>
+              <a:t>verb-forming suffix</a:t>
+            </a:r>
+            <a:endParaRPr lang="en-US" sz="850" dirty="0"/>
+          </a:p>
+        </p:txBody>
+      </p:sp>
+      <p:sp>
+        <p:nvSpPr>
+          <p:cNvPr id="25" name="Shape 23"/>
           <p:cNvSpPr/>
           <p:nvPr/>
         </p:nvSpPr>
@@ -30830,7 +29985,7 @@
       </p:sp>
       <p:sp>
         <p:nvSpPr>
-          <p:cNvPr id="23" name="Text 21"/>
+          <p:cNvPr id="26" name="Text 24"/>
           <p:cNvSpPr/>
           <p:nvPr/>
         </p:nvSpPr>
@@ -30869,7 +30024,7 @@
       </p:sp>
       <p:sp>
         <p:nvSpPr>
-          <p:cNvPr id="24" name="Shape 22"/>
+          <p:cNvPr id="27" name="Shape 25"/>
           <p:cNvSpPr/>
           <p:nvPr/>
         </p:nvSpPr>
@@ -30896,7 +30051,7 @@
       </p:sp>
       <p:sp>
         <p:nvSpPr>
-          <p:cNvPr id="25" name="Text 23"/>
+          <p:cNvPr id="28" name="Text 26"/>
           <p:cNvSpPr/>
           <p:nvPr/>
         </p:nvSpPr>
@@ -30935,7 +30090,7 @@
       </p:sp>
       <p:sp>
         <p:nvSpPr>
-          <p:cNvPr id="26" name="Shape 24"/>
+          <p:cNvPr id="29" name="Shape 27"/>
           <p:cNvSpPr/>
           <p:nvPr/>
         </p:nvSpPr>
@@ -30962,7 +30117,7 @@
       </p:sp>
       <p:sp>
         <p:nvSpPr>
-          <p:cNvPr id="27" name="Text 25"/>
+          <p:cNvPr id="30" name="Text 28"/>
           <p:cNvSpPr/>
           <p:nvPr/>
         </p:nvSpPr>
@@ -31001,7 +30156,7 @@
       </p:sp>
       <p:sp>
         <p:nvSpPr>
-          <p:cNvPr id="28" name="Shape 26"/>
+          <p:cNvPr id="31" name="Shape 29"/>
           <p:cNvSpPr/>
           <p:nvPr/>
         </p:nvSpPr>
@@ -31028,7 +30183,7 @@
       </p:sp>
       <p:sp>
         <p:nvSpPr>
-          <p:cNvPr id="29" name="Text 27"/>
+          <p:cNvPr id="32" name="Text 30"/>
           <p:cNvSpPr/>
           <p:nvPr/>
         </p:nvSpPr>
@@ -31490,7 +30645,7 @@
                 <a:ea typeface="Trebuchet MS" pitchFamily="34" charset="-122"/>
                 <a:cs typeface="Trebuchet MS" pitchFamily="34" charset="-120"/>
               </a:rPr>
-              <a:t>scribble</a:t>
+              <a:t>inscribe</a:t>
             </a:r>
             <a:endParaRPr lang="en-US" sz="2800" dirty="0"/>
           </a:p>
@@ -31570,7 +30725,7 @@
         </p:nvSpPr>
         <p:spPr>
           <a:xfrm>
-            <a:off x="2938272" y="2258568"/>
+            <a:off x="2221992" y="2258568"/>
             <a:ext cx="1828800" cy="292608"/>
           </a:xfrm>
           <a:prstGeom prst="rect">
@@ -31579,11 +30734,11 @@
             </a:avLst>
           </a:prstGeom>
           <a:solidFill>
-            <a:srgbClr val="CCFBF1"/>
+            <a:srgbClr val="DDD6FE"/>
           </a:solidFill>
           <a:ln w="19050">
             <a:solidFill>
-              <a:srgbClr val="0D9488"/>
+              <a:srgbClr val="7C3AED"/>
             </a:solidFill>
             <a:prstDash val="solid"/>
           </a:ln>
@@ -31604,7 +30759,7 @@
         </p:nvSpPr>
         <p:spPr>
           <a:xfrm>
-            <a:off x="2938272" y="2258568"/>
+            <a:off x="2221992" y="2258568"/>
             <a:ext cx="1828800" cy="292608"/>
           </a:xfrm>
           <a:prstGeom prst="rect">
@@ -31623,13 +30778,13 @@
             <a:r>
               <a:rPr lang="en-US" sz="1300" b="1" dirty="0">
                 <a:solidFill>
-                  <a:srgbClr val="0F766E"/>
+                  <a:srgbClr val="4C1D95"/>
                 </a:solidFill>
                 <a:latin typeface="Trebuchet MS" pitchFamily="34" charset="0"/>
                 <a:ea typeface="Trebuchet MS" pitchFamily="34" charset="-122"/>
                 <a:cs typeface="Trebuchet MS" pitchFamily="34" charset="-120"/>
               </a:rPr>
-              <a:t>scrib</a:t>
+              <a:t>in</a:t>
             </a:r>
             <a:endParaRPr lang="en-US" sz="1300" dirty="0"/>
           </a:p>
@@ -31643,7 +30798,7 @@
         </p:nvSpPr>
         <p:spPr>
           <a:xfrm>
-            <a:off x="2938272" y="2569464"/>
+            <a:off x="2221992" y="2569464"/>
             <a:ext cx="1828800" cy="201168"/>
           </a:xfrm>
           <a:prstGeom prst="rect">
@@ -31668,7 +30823,7 @@
                 <a:ea typeface="Calibri" pitchFamily="34" charset="-122"/>
                 <a:cs typeface="Calibri" pitchFamily="34" charset="-120"/>
               </a:rPr>
-              <a:t>to write</a:t>
+              <a:t>into, upon</a:t>
             </a:r>
             <a:endParaRPr lang="en-US" sz="850" dirty="0"/>
           </a:p>
@@ -31682,7 +30837,7 @@
         </p:nvSpPr>
         <p:spPr>
           <a:xfrm>
-            <a:off x="5803392" y="2258568"/>
+            <a:off x="4370832" y="2258568"/>
             <a:ext cx="1828800" cy="292608"/>
           </a:xfrm>
           <a:prstGeom prst="rect">
@@ -31691,11 +30846,11 @@
             </a:avLst>
           </a:prstGeom>
           <a:solidFill>
-            <a:srgbClr val="FCE7F3"/>
+            <a:srgbClr val="CCFBF1"/>
           </a:solidFill>
           <a:ln w="19050">
             <a:solidFill>
-              <a:srgbClr val="DB2777"/>
+              <a:srgbClr val="0D9488"/>
             </a:solidFill>
             <a:prstDash val="solid"/>
           </a:ln>
@@ -31716,7 +30871,7 @@
         </p:nvSpPr>
         <p:spPr>
           <a:xfrm>
-            <a:off x="5803392" y="2258568"/>
+            <a:off x="4370832" y="2258568"/>
             <a:ext cx="1828800" cy="292608"/>
           </a:xfrm>
           <a:prstGeom prst="rect">
@@ -31735,13 +30890,13 @@
             <a:r>
               <a:rPr lang="en-US" sz="1300" b="1" dirty="0">
                 <a:solidFill>
-                  <a:srgbClr val="9D174D"/>
+                  <a:srgbClr val="0F766E"/>
                 </a:solidFill>
                 <a:latin typeface="Trebuchet MS" pitchFamily="34" charset="0"/>
                 <a:ea typeface="Trebuchet MS" pitchFamily="34" charset="-122"/>
                 <a:cs typeface="Trebuchet MS" pitchFamily="34" charset="-120"/>
               </a:rPr>
-              <a:t>ble</a:t>
+              <a:t>scrib</a:t>
             </a:r>
             <a:endParaRPr lang="en-US" sz="1300" dirty="0"/>
           </a:p>
@@ -31755,7 +30910,7 @@
         </p:nvSpPr>
         <p:spPr>
           <a:xfrm>
-            <a:off x="5803392" y="2569464"/>
+            <a:off x="4370832" y="2569464"/>
             <a:ext cx="1828800" cy="201168"/>
           </a:xfrm>
           <a:prstGeom prst="rect">
@@ -31780,7 +30935,7 @@
                 <a:ea typeface="Calibri" pitchFamily="34" charset="-122"/>
                 <a:cs typeface="Calibri" pitchFamily="34" charset="-120"/>
               </a:rPr>
-              <a:t>repeated or diminutive action</a:t>
+              <a:t>to write</a:t>
             </a:r>
             <a:endParaRPr lang="en-US" sz="850" dirty="0"/>
           </a:p>
@@ -31789,6 +30944,118 @@
       <p:sp>
         <p:nvSpPr>
           <p:cNvPr id="22" name="Shape 20"/>
+          <p:cNvSpPr/>
+          <p:nvPr/>
+        </p:nvSpPr>
+        <p:spPr>
+          <a:xfrm>
+            <a:off x="6519672" y="2258568"/>
+            <a:ext cx="1828800" cy="292608"/>
+          </a:xfrm>
+          <a:prstGeom prst="rect">
+            <a:avLst>
+              <a:gd name="adj" fmla="val 25000"/>
+            </a:avLst>
+          </a:prstGeom>
+          <a:solidFill>
+            <a:srgbClr val="FCE7F3"/>
+          </a:solidFill>
+          <a:ln w="19050">
+            <a:solidFill>
+              <a:srgbClr val="DB2777"/>
+            </a:solidFill>
+            <a:prstDash val="solid"/>
+          </a:ln>
+          <a:effectLst>
+            <a:outerShdw sx="100000" sy="100000" kx="0" ky="0" algn="bl" rotWithShape="0" blurRad="101600" dist="38100" dir="8100000">
+              <a:srgbClr val="000000">
+                <a:alpha val="12000"/>
+              </a:srgbClr>
+            </a:outerShdw>
+          </a:effectLst>
+        </p:spPr>
+      </p:sp>
+      <p:sp>
+        <p:nvSpPr>
+          <p:cNvPr id="23" name="Text 21"/>
+          <p:cNvSpPr/>
+          <p:nvPr/>
+        </p:nvSpPr>
+        <p:spPr>
+          <a:xfrm>
+            <a:off x="6519672" y="2258568"/>
+            <a:ext cx="1828800" cy="292608"/>
+          </a:xfrm>
+          <a:prstGeom prst="rect">
+            <a:avLst/>
+          </a:prstGeom>
+          <a:noFill/>
+          <a:ln/>
+        </p:spPr>
+        <p:txBody>
+          <a:bodyPr wrap="square" lIns="0" tIns="0" rIns="0" bIns="0" rtlCol="0" anchor="ctr"/>
+          <a:lstStyle/>
+          <a:p>
+            <a:pPr algn="ctr" indent="0" marL="0">
+              <a:buNone/>
+            </a:pPr>
+            <a:r>
+              <a:rPr lang="en-US" sz="1300" b="1" dirty="0">
+                <a:solidFill>
+                  <a:srgbClr val="9D174D"/>
+                </a:solidFill>
+                <a:latin typeface="Trebuchet MS" pitchFamily="34" charset="0"/>
+                <a:ea typeface="Trebuchet MS" pitchFamily="34" charset="-122"/>
+                <a:cs typeface="Trebuchet MS" pitchFamily="34" charset="-120"/>
+              </a:rPr>
+              <a:t>e</a:t>
+            </a:r>
+            <a:endParaRPr lang="en-US" sz="1300" dirty="0"/>
+          </a:p>
+        </p:txBody>
+      </p:sp>
+      <p:sp>
+        <p:nvSpPr>
+          <p:cNvPr id="24" name="Text 22"/>
+          <p:cNvSpPr/>
+          <p:nvPr/>
+        </p:nvSpPr>
+        <p:spPr>
+          <a:xfrm>
+            <a:off x="6519672" y="2569464"/>
+            <a:ext cx="1828800" cy="201168"/>
+          </a:xfrm>
+          <a:prstGeom prst="rect">
+            <a:avLst/>
+          </a:prstGeom>
+          <a:noFill/>
+          <a:ln/>
+        </p:spPr>
+        <p:txBody>
+          <a:bodyPr wrap="square" lIns="0" tIns="0" rIns="0" bIns="0" rtlCol="0" anchor="t"/>
+          <a:lstStyle/>
+          <a:p>
+            <a:pPr algn="ctr" indent="0" marL="0">
+              <a:buNone/>
+            </a:pPr>
+            <a:r>
+              <a:rPr lang="en-US" sz="850" dirty="0">
+                <a:solidFill>
+                  <a:srgbClr val="475569"/>
+                </a:solidFill>
+                <a:latin typeface="Calibri" pitchFamily="34" charset="0"/>
+                <a:ea typeface="Calibri" pitchFamily="34" charset="-122"/>
+                <a:cs typeface="Calibri" pitchFamily="34" charset="-120"/>
+              </a:rPr>
+              <a:t>verb-forming suffix</a:t>
+            </a:r>
+            <a:endParaRPr lang="en-US" sz="850" dirty="0"/>
+          </a:p>
+        </p:txBody>
+      </p:sp>
+      <p:sp>
+        <p:nvSpPr>
+          <p:cNvPr id="25" name="Shape 23"/>
           <p:cNvSpPr/>
           <p:nvPr/>
         </p:nvSpPr>
@@ -31815,7 +31082,7 @@
       </p:sp>
       <p:sp>
         <p:nvSpPr>
-          <p:cNvPr id="23" name="Text 21"/>
+          <p:cNvPr id="26" name="Text 24"/>
           <p:cNvSpPr/>
           <p:nvPr/>
         </p:nvSpPr>
@@ -31854,7 +31121,7 @@
       </p:sp>
       <p:sp>
         <p:nvSpPr>
-          <p:cNvPr id="24" name="Shape 22"/>
+          <p:cNvPr id="27" name="Shape 25"/>
           <p:cNvSpPr/>
           <p:nvPr/>
         </p:nvSpPr>
@@ -31881,7 +31148,7 @@
       </p:sp>
       <p:sp>
         <p:nvSpPr>
-          <p:cNvPr id="25" name="Shape 23"/>
+          <p:cNvPr id="28" name="Shape 26"/>
           <p:cNvSpPr/>
           <p:nvPr/>
         </p:nvSpPr>
@@ -31908,7 +31175,7 @@
       </p:sp>
       <p:sp>
         <p:nvSpPr>
-          <p:cNvPr id="26" name="Text 24"/>
+          <p:cNvPr id="29" name="Text 27"/>
           <p:cNvSpPr/>
           <p:nvPr/>
         </p:nvSpPr>
@@ -31939,7 +31206,7 @@
                 <a:ea typeface="Trebuchet MS" pitchFamily="34" charset="-122"/>
                 <a:cs typeface="Trebuchet MS" pitchFamily="34" charset="-120"/>
               </a:rPr>
-              <a:t>scrib</a:t>
+              <a:t>in</a:t>
             </a:r>
             <a:endParaRPr lang="en-US" sz="1400" dirty="0"/>
           </a:p>
@@ -31947,7 +31214,7 @@
       </p:sp>
       <p:sp>
         <p:nvSpPr>
-          <p:cNvPr id="27" name="Text 25"/>
+          <p:cNvPr id="30" name="Text 28"/>
           <p:cNvSpPr/>
           <p:nvPr/>
         </p:nvSpPr>
@@ -31986,7 +31253,7 @@
       </p:sp>
       <p:sp>
         <p:nvSpPr>
-          <p:cNvPr id="28" name="Shape 26"/>
+          <p:cNvPr id="31" name="Shape 29"/>
           <p:cNvSpPr/>
           <p:nvPr/>
         </p:nvSpPr>
@@ -32013,7 +31280,7 @@
       </p:sp>
       <p:sp>
         <p:nvSpPr>
-          <p:cNvPr id="29" name="Text 27"/>
+          <p:cNvPr id="32" name="Text 30"/>
           <p:cNvSpPr/>
           <p:nvPr/>
         </p:nvSpPr>
@@ -32044,7 +31311,7 @@
                 <a:ea typeface="Trebuchet MS" pitchFamily="34" charset="-122"/>
                 <a:cs typeface="Trebuchet MS" pitchFamily="34" charset="-120"/>
               </a:rPr>
-              <a:t>ble</a:t>
+              <a:t>scribe</a:t>
             </a:r>
             <a:endParaRPr lang="en-US" sz="1400" dirty="0"/>
           </a:p>
@@ -32052,7 +31319,7 @@
       </p:sp>
       <p:sp>
         <p:nvSpPr>
-          <p:cNvPr id="30" name="Shape 28"/>
+          <p:cNvPr id="33" name="Shape 31"/>
           <p:cNvSpPr/>
           <p:nvPr/>
         </p:nvSpPr>
@@ -32079,7 +31346,7 @@
       </p:sp>
       <p:sp>
         <p:nvSpPr>
-          <p:cNvPr id="31" name="Text 29"/>
+          <p:cNvPr id="34" name="Text 32"/>
           <p:cNvSpPr/>
           <p:nvPr/>
         </p:nvSpPr>
@@ -32118,7 +31385,7 @@
       </p:sp>
       <p:sp>
         <p:nvSpPr>
-          <p:cNvPr id="32" name="Shape 30"/>
+          <p:cNvPr id="35" name="Shape 33"/>
           <p:cNvSpPr/>
           <p:nvPr/>
         </p:nvSpPr>
@@ -32145,7 +31412,7 @@
       </p:sp>
       <p:sp>
         <p:nvSpPr>
-          <p:cNvPr id="33" name="Text 31"/>
+          <p:cNvPr id="36" name="Text 34"/>
           <p:cNvSpPr/>
           <p:nvPr/>
         </p:nvSpPr>
@@ -32607,7 +31874,7 @@
                 <a:ea typeface="Trebuchet MS" pitchFamily="34" charset="-122"/>
                 <a:cs typeface="Trebuchet MS" pitchFamily="34" charset="-120"/>
               </a:rPr>
-              <a:t>scribble</a:t>
+              <a:t>inscribe</a:t>
             </a:r>
             <a:endParaRPr lang="en-US" sz="2800" dirty="0"/>
           </a:p>
@@ -32687,7 +31954,7 @@
         </p:nvSpPr>
         <p:spPr>
           <a:xfrm>
-            <a:off x="2938272" y="2258568"/>
+            <a:off x="2221992" y="2258568"/>
             <a:ext cx="1828800" cy="292608"/>
           </a:xfrm>
           <a:prstGeom prst="rect">
@@ -32696,11 +31963,11 @@
             </a:avLst>
           </a:prstGeom>
           <a:solidFill>
-            <a:srgbClr val="CCFBF1"/>
+            <a:srgbClr val="DDD6FE"/>
           </a:solidFill>
           <a:ln w="19050">
             <a:solidFill>
-              <a:srgbClr val="0D9488"/>
+              <a:srgbClr val="7C3AED"/>
             </a:solidFill>
             <a:prstDash val="solid"/>
           </a:ln>
@@ -32721,7 +31988,7 @@
         </p:nvSpPr>
         <p:spPr>
           <a:xfrm>
-            <a:off x="2938272" y="2258568"/>
+            <a:off x="2221992" y="2258568"/>
             <a:ext cx="1828800" cy="292608"/>
           </a:xfrm>
           <a:prstGeom prst="rect">
@@ -32740,13 +32007,13 @@
             <a:r>
               <a:rPr lang="en-US" sz="1300" b="1" dirty="0">
                 <a:solidFill>
-                  <a:srgbClr val="0F766E"/>
+                  <a:srgbClr val="4C1D95"/>
                 </a:solidFill>
                 <a:latin typeface="Trebuchet MS" pitchFamily="34" charset="0"/>
                 <a:ea typeface="Trebuchet MS" pitchFamily="34" charset="-122"/>
                 <a:cs typeface="Trebuchet MS" pitchFamily="34" charset="-120"/>
               </a:rPr>
-              <a:t>scrib</a:t>
+              <a:t>in</a:t>
             </a:r>
             <a:endParaRPr lang="en-US" sz="1300" dirty="0"/>
           </a:p>
@@ -32760,7 +32027,7 @@
         </p:nvSpPr>
         <p:spPr>
           <a:xfrm>
-            <a:off x="2938272" y="2569464"/>
+            <a:off x="2221992" y="2569464"/>
             <a:ext cx="1828800" cy="201168"/>
           </a:xfrm>
           <a:prstGeom prst="rect">
@@ -32785,7 +32052,7 @@
                 <a:ea typeface="Calibri" pitchFamily="34" charset="-122"/>
                 <a:cs typeface="Calibri" pitchFamily="34" charset="-120"/>
               </a:rPr>
-              <a:t>to write</a:t>
+              <a:t>into, upon</a:t>
             </a:r>
             <a:endParaRPr lang="en-US" sz="850" dirty="0"/>
           </a:p>
@@ -32799,7 +32066,7 @@
         </p:nvSpPr>
         <p:spPr>
           <a:xfrm>
-            <a:off x="5803392" y="2258568"/>
+            <a:off x="4370832" y="2258568"/>
             <a:ext cx="1828800" cy="292608"/>
           </a:xfrm>
           <a:prstGeom prst="rect">
@@ -32808,11 +32075,11 @@
             </a:avLst>
           </a:prstGeom>
           <a:solidFill>
-            <a:srgbClr val="FCE7F3"/>
+            <a:srgbClr val="CCFBF1"/>
           </a:solidFill>
           <a:ln w="19050">
             <a:solidFill>
-              <a:srgbClr val="DB2777"/>
+              <a:srgbClr val="0D9488"/>
             </a:solidFill>
             <a:prstDash val="solid"/>
           </a:ln>
@@ -32833,7 +32100,7 @@
         </p:nvSpPr>
         <p:spPr>
           <a:xfrm>
-            <a:off x="5803392" y="2258568"/>
+            <a:off x="4370832" y="2258568"/>
             <a:ext cx="1828800" cy="292608"/>
           </a:xfrm>
           <a:prstGeom prst="rect">
@@ -32852,13 +32119,13 @@
             <a:r>
               <a:rPr lang="en-US" sz="1300" b="1" dirty="0">
                 <a:solidFill>
-                  <a:srgbClr val="9D174D"/>
+                  <a:srgbClr val="0F766E"/>
                 </a:solidFill>
                 <a:latin typeface="Trebuchet MS" pitchFamily="34" charset="0"/>
                 <a:ea typeface="Trebuchet MS" pitchFamily="34" charset="-122"/>
                 <a:cs typeface="Trebuchet MS" pitchFamily="34" charset="-120"/>
               </a:rPr>
-              <a:t>ble</a:t>
+              <a:t>scrib</a:t>
             </a:r>
             <a:endParaRPr lang="en-US" sz="1300" dirty="0"/>
           </a:p>
@@ -32872,7 +32139,7 @@
         </p:nvSpPr>
         <p:spPr>
           <a:xfrm>
-            <a:off x="5803392" y="2569464"/>
+            <a:off x="4370832" y="2569464"/>
             <a:ext cx="1828800" cy="201168"/>
           </a:xfrm>
           <a:prstGeom prst="rect">
@@ -32897,7 +32164,7 @@
                 <a:ea typeface="Calibri" pitchFamily="34" charset="-122"/>
                 <a:cs typeface="Calibri" pitchFamily="34" charset="-120"/>
               </a:rPr>
-              <a:t>repeated or diminutive action</a:t>
+              <a:t>to write</a:t>
             </a:r>
             <a:endParaRPr lang="en-US" sz="850" dirty="0"/>
           </a:p>
@@ -32906,6 +32173,118 @@
       <p:sp>
         <p:nvSpPr>
           <p:cNvPr id="22" name="Shape 20"/>
+          <p:cNvSpPr/>
+          <p:nvPr/>
+        </p:nvSpPr>
+        <p:spPr>
+          <a:xfrm>
+            <a:off x="6519672" y="2258568"/>
+            <a:ext cx="1828800" cy="292608"/>
+          </a:xfrm>
+          <a:prstGeom prst="rect">
+            <a:avLst>
+              <a:gd name="adj" fmla="val 25000"/>
+            </a:avLst>
+          </a:prstGeom>
+          <a:solidFill>
+            <a:srgbClr val="FCE7F3"/>
+          </a:solidFill>
+          <a:ln w="19050">
+            <a:solidFill>
+              <a:srgbClr val="DB2777"/>
+            </a:solidFill>
+            <a:prstDash val="solid"/>
+          </a:ln>
+          <a:effectLst>
+            <a:outerShdw sx="100000" sy="100000" kx="0" ky="0" algn="bl" rotWithShape="0" blurRad="101600" dist="38100" dir="8100000">
+              <a:srgbClr val="000000">
+                <a:alpha val="12000"/>
+              </a:srgbClr>
+            </a:outerShdw>
+          </a:effectLst>
+        </p:spPr>
+      </p:sp>
+      <p:sp>
+        <p:nvSpPr>
+          <p:cNvPr id="23" name="Text 21"/>
+          <p:cNvSpPr/>
+          <p:nvPr/>
+        </p:nvSpPr>
+        <p:spPr>
+          <a:xfrm>
+            <a:off x="6519672" y="2258568"/>
+            <a:ext cx="1828800" cy="292608"/>
+          </a:xfrm>
+          <a:prstGeom prst="rect">
+            <a:avLst/>
+          </a:prstGeom>
+          <a:noFill/>
+          <a:ln/>
+        </p:spPr>
+        <p:txBody>
+          <a:bodyPr wrap="square" lIns="0" tIns="0" rIns="0" bIns="0" rtlCol="0" anchor="ctr"/>
+          <a:lstStyle/>
+          <a:p>
+            <a:pPr algn="ctr" indent="0" marL="0">
+              <a:buNone/>
+            </a:pPr>
+            <a:r>
+              <a:rPr lang="en-US" sz="1300" b="1" dirty="0">
+                <a:solidFill>
+                  <a:srgbClr val="9D174D"/>
+                </a:solidFill>
+                <a:latin typeface="Trebuchet MS" pitchFamily="34" charset="0"/>
+                <a:ea typeface="Trebuchet MS" pitchFamily="34" charset="-122"/>
+                <a:cs typeface="Trebuchet MS" pitchFamily="34" charset="-120"/>
+              </a:rPr>
+              <a:t>e</a:t>
+            </a:r>
+            <a:endParaRPr lang="en-US" sz="1300" dirty="0"/>
+          </a:p>
+        </p:txBody>
+      </p:sp>
+      <p:sp>
+        <p:nvSpPr>
+          <p:cNvPr id="24" name="Text 22"/>
+          <p:cNvSpPr/>
+          <p:nvPr/>
+        </p:nvSpPr>
+        <p:spPr>
+          <a:xfrm>
+            <a:off x="6519672" y="2569464"/>
+            <a:ext cx="1828800" cy="201168"/>
+          </a:xfrm>
+          <a:prstGeom prst="rect">
+            <a:avLst/>
+          </a:prstGeom>
+          <a:noFill/>
+          <a:ln/>
+        </p:spPr>
+        <p:txBody>
+          <a:bodyPr wrap="square" lIns="0" tIns="0" rIns="0" bIns="0" rtlCol="0" anchor="t"/>
+          <a:lstStyle/>
+          <a:p>
+            <a:pPr algn="ctr" indent="0" marL="0">
+              <a:buNone/>
+            </a:pPr>
+            <a:r>
+              <a:rPr lang="en-US" sz="850" dirty="0">
+                <a:solidFill>
+                  <a:srgbClr val="475569"/>
+                </a:solidFill>
+                <a:latin typeface="Calibri" pitchFamily="34" charset="0"/>
+                <a:ea typeface="Calibri" pitchFamily="34" charset="-122"/>
+                <a:cs typeface="Calibri" pitchFamily="34" charset="-120"/>
+              </a:rPr>
+              <a:t>verb-forming suffix</a:t>
+            </a:r>
+            <a:endParaRPr lang="en-US" sz="850" dirty="0"/>
+          </a:p>
+        </p:txBody>
+      </p:sp>
+      <p:sp>
+        <p:nvSpPr>
+          <p:cNvPr id="25" name="Shape 23"/>
           <p:cNvSpPr/>
           <p:nvPr/>
         </p:nvSpPr>
@@ -32932,7 +32311,7 @@
       </p:sp>
       <p:sp>
         <p:nvSpPr>
-          <p:cNvPr id="23" name="Text 21"/>
+          <p:cNvPr id="26" name="Text 24"/>
           <p:cNvSpPr/>
           <p:nvPr/>
         </p:nvSpPr>
@@ -32971,7 +32350,7 @@
       </p:sp>
       <p:sp>
         <p:nvSpPr>
-          <p:cNvPr id="24" name="Shape 22"/>
+          <p:cNvPr id="27" name="Shape 25"/>
           <p:cNvSpPr/>
           <p:nvPr/>
         </p:nvSpPr>
@@ -32998,7 +32377,7 @@
       </p:sp>
       <p:sp>
         <p:nvSpPr>
-          <p:cNvPr id="25" name="Shape 23"/>
+          <p:cNvPr id="28" name="Shape 26"/>
           <p:cNvSpPr/>
           <p:nvPr/>
         </p:nvSpPr>
@@ -33025,7 +32404,7 @@
       </p:sp>
       <p:sp>
         <p:nvSpPr>
-          <p:cNvPr id="26" name="Text 24"/>
+          <p:cNvPr id="29" name="Text 27"/>
           <p:cNvSpPr/>
           <p:nvPr/>
         </p:nvSpPr>
@@ -33056,7 +32435,7 @@
                 <a:ea typeface="Trebuchet MS" pitchFamily="34" charset="-122"/>
                 <a:cs typeface="Trebuchet MS" pitchFamily="34" charset="-120"/>
               </a:rPr>
-              <a:t>scrib</a:t>
+              <a:t>in</a:t>
             </a:r>
             <a:endParaRPr lang="en-US" sz="1400" dirty="0"/>
           </a:p>
@@ -33064,7 +32443,7 @@
       </p:sp>
       <p:sp>
         <p:nvSpPr>
-          <p:cNvPr id="27" name="Text 25"/>
+          <p:cNvPr id="30" name="Text 28"/>
           <p:cNvSpPr/>
           <p:nvPr/>
         </p:nvSpPr>
@@ -33103,7 +32482,7 @@
       </p:sp>
       <p:sp>
         <p:nvSpPr>
-          <p:cNvPr id="28" name="Shape 26"/>
+          <p:cNvPr id="31" name="Shape 29"/>
           <p:cNvSpPr/>
           <p:nvPr/>
         </p:nvSpPr>
@@ -33130,7 +32509,7 @@
       </p:sp>
       <p:sp>
         <p:nvSpPr>
-          <p:cNvPr id="29" name="Text 27"/>
+          <p:cNvPr id="32" name="Text 30"/>
           <p:cNvSpPr/>
           <p:nvPr/>
         </p:nvSpPr>
@@ -33161,7 +32540,7 @@
                 <a:ea typeface="Trebuchet MS" pitchFamily="34" charset="-122"/>
                 <a:cs typeface="Trebuchet MS" pitchFamily="34" charset="-120"/>
               </a:rPr>
-              <a:t>ble</a:t>
+              <a:t>scribe</a:t>
             </a:r>
             <a:endParaRPr lang="en-US" sz="1400" dirty="0"/>
           </a:p>
@@ -33169,7 +32548,7 @@
       </p:sp>
       <p:sp>
         <p:nvSpPr>
-          <p:cNvPr id="30" name="Shape 28"/>
+          <p:cNvPr id="33" name="Shape 31"/>
           <p:cNvSpPr/>
           <p:nvPr/>
         </p:nvSpPr>
@@ -33196,7 +32575,7 @@
       </p:sp>
       <p:sp>
         <p:nvSpPr>
-          <p:cNvPr id="31" name="Text 29"/>
+          <p:cNvPr id="34" name="Text 32"/>
           <p:cNvSpPr/>
           <p:nvPr/>
         </p:nvSpPr>
@@ -33235,7 +32614,7 @@
       </p:sp>
       <p:sp>
         <p:nvSpPr>
-          <p:cNvPr id="32" name="Shape 30"/>
+          <p:cNvPr id="35" name="Shape 33"/>
           <p:cNvSpPr/>
           <p:nvPr/>
         </p:nvSpPr>
@@ -33262,13 +32641,13 @@
       </p:sp>
       <p:sp>
         <p:nvSpPr>
-          <p:cNvPr id="33" name="Shape 31"/>
-          <p:cNvSpPr/>
-          <p:nvPr/>
-        </p:nvSpPr>
-        <p:spPr>
-          <a:xfrm>
-            <a:off x="2254649" y="4169664"/>
+          <p:cNvPr id="36" name="Shape 34"/>
+          <p:cNvSpPr/>
+          <p:nvPr/>
+        </p:nvSpPr>
+        <p:spPr>
+          <a:xfrm>
+            <a:off x="2124837" y="4169664"/>
             <a:ext cx="685800" cy="384048"/>
           </a:xfrm>
           <a:prstGeom prst="rect">
@@ -33289,13 +32668,13 @@
       </p:sp>
       <p:sp>
         <p:nvSpPr>
-          <p:cNvPr id="34" name="Text 32"/>
-          <p:cNvSpPr/>
-          <p:nvPr/>
-        </p:nvSpPr>
-        <p:spPr>
-          <a:xfrm>
-            <a:off x="2254649" y="4169664"/>
+          <p:cNvPr id="37" name="Text 35"/>
+          <p:cNvSpPr/>
+          <p:nvPr/>
+        </p:nvSpPr>
+        <p:spPr>
+          <a:xfrm>
+            <a:off x="2124837" y="4169664"/>
             <a:ext cx="685800" cy="384048"/>
           </a:xfrm>
           <a:prstGeom prst="rect">
@@ -33320,7 +32699,7 @@
                 <a:ea typeface="Trebuchet MS" pitchFamily="34" charset="-122"/>
                 <a:cs typeface="Trebuchet MS" pitchFamily="34" charset="-120"/>
               </a:rPr>
-              <a:t>s</a:t>
+              <a:t>i</a:t>
             </a:r>
             <a:endParaRPr lang="en-US" sz="900" dirty="0"/>
           </a:p>
@@ -33328,13 +32707,13 @@
       </p:sp>
       <p:sp>
         <p:nvSpPr>
-          <p:cNvPr id="35" name="Shape 33"/>
-          <p:cNvSpPr/>
-          <p:nvPr/>
-        </p:nvSpPr>
-        <p:spPr>
-          <a:xfrm>
-            <a:off x="3293146" y="4169664"/>
+          <p:cNvPr id="38" name="Shape 36"/>
+          <p:cNvSpPr/>
+          <p:nvPr/>
+        </p:nvSpPr>
+        <p:spPr>
+          <a:xfrm>
+            <a:off x="3033522" y="4169664"/>
             <a:ext cx="685800" cy="384048"/>
           </a:xfrm>
           <a:prstGeom prst="rect">
@@ -33355,13 +32734,13 @@
       </p:sp>
       <p:sp>
         <p:nvSpPr>
-          <p:cNvPr id="36" name="Text 34"/>
-          <p:cNvSpPr/>
-          <p:nvPr/>
-        </p:nvSpPr>
-        <p:spPr>
-          <a:xfrm>
-            <a:off x="3293146" y="4169664"/>
+          <p:cNvPr id="39" name="Text 37"/>
+          <p:cNvSpPr/>
+          <p:nvPr/>
+        </p:nvSpPr>
+        <p:spPr>
+          <a:xfrm>
+            <a:off x="3033522" y="4169664"/>
             <a:ext cx="685800" cy="384048"/>
           </a:xfrm>
           <a:prstGeom prst="rect">
@@ -33386,6 +32765,138 @@
                 <a:ea typeface="Trebuchet MS" pitchFamily="34" charset="-122"/>
                 <a:cs typeface="Trebuchet MS" pitchFamily="34" charset="-120"/>
               </a:rPr>
+              <a:t>n</a:t>
+            </a:r>
+            <a:endParaRPr lang="en-US" sz="900" dirty="0"/>
+          </a:p>
+        </p:txBody>
+      </p:sp>
+      <p:sp>
+        <p:nvSpPr>
+          <p:cNvPr id="40" name="Shape 38"/>
+          <p:cNvSpPr/>
+          <p:nvPr/>
+        </p:nvSpPr>
+        <p:spPr>
+          <a:xfrm>
+            <a:off x="3942207" y="4169664"/>
+            <a:ext cx="685800" cy="384048"/>
+          </a:xfrm>
+          <a:prstGeom prst="rect">
+            <a:avLst>
+              <a:gd name="adj" fmla="val 9524"/>
+            </a:avLst>
+          </a:prstGeom>
+          <a:solidFill>
+            <a:srgbClr val="FFFFFF"/>
+          </a:solidFill>
+          <a:ln w="12700">
+            <a:solidFill>
+              <a:srgbClr val="DB2777"/>
+            </a:solidFill>
+            <a:prstDash val="solid"/>
+          </a:ln>
+        </p:spPr>
+      </p:sp>
+      <p:sp>
+        <p:nvSpPr>
+          <p:cNvPr id="41" name="Text 39"/>
+          <p:cNvSpPr/>
+          <p:nvPr/>
+        </p:nvSpPr>
+        <p:spPr>
+          <a:xfrm>
+            <a:off x="3942207" y="4169664"/>
+            <a:ext cx="685800" cy="384048"/>
+          </a:xfrm>
+          <a:prstGeom prst="rect">
+            <a:avLst/>
+          </a:prstGeom>
+          <a:noFill/>
+          <a:ln/>
+        </p:spPr>
+        <p:txBody>
+          <a:bodyPr wrap="square" lIns="0" tIns="0" rIns="0" bIns="0" rtlCol="0" anchor="ctr"/>
+          <a:lstStyle/>
+          <a:p>
+            <a:pPr algn="ctr" indent="0" marL="0">
+              <a:buNone/>
+            </a:pPr>
+            <a:r>
+              <a:rPr lang="en-US" sz="900" b="1" dirty="0">
+                <a:solidFill>
+                  <a:srgbClr val="9D174D"/>
+                </a:solidFill>
+                <a:latin typeface="Trebuchet MS" pitchFamily="34" charset="0"/>
+                <a:ea typeface="Trebuchet MS" pitchFamily="34" charset="-122"/>
+                <a:cs typeface="Trebuchet MS" pitchFamily="34" charset="-120"/>
+              </a:rPr>
+              <a:t>s</a:t>
+            </a:r>
+            <a:endParaRPr lang="en-US" sz="900" dirty="0"/>
+          </a:p>
+        </p:txBody>
+      </p:sp>
+      <p:sp>
+        <p:nvSpPr>
+          <p:cNvPr id="42" name="Shape 40"/>
+          <p:cNvSpPr/>
+          <p:nvPr/>
+        </p:nvSpPr>
+        <p:spPr>
+          <a:xfrm>
+            <a:off x="4850892" y="4169664"/>
+            <a:ext cx="685800" cy="384048"/>
+          </a:xfrm>
+          <a:prstGeom prst="rect">
+            <a:avLst>
+              <a:gd name="adj" fmla="val 9524"/>
+            </a:avLst>
+          </a:prstGeom>
+          <a:solidFill>
+            <a:srgbClr val="FFFFFF"/>
+          </a:solidFill>
+          <a:ln w="12700">
+            <a:solidFill>
+              <a:srgbClr val="DB2777"/>
+            </a:solidFill>
+            <a:prstDash val="solid"/>
+          </a:ln>
+        </p:spPr>
+      </p:sp>
+      <p:sp>
+        <p:nvSpPr>
+          <p:cNvPr id="43" name="Text 41"/>
+          <p:cNvSpPr/>
+          <p:nvPr/>
+        </p:nvSpPr>
+        <p:spPr>
+          <a:xfrm>
+            <a:off x="4850892" y="4169664"/>
+            <a:ext cx="685800" cy="384048"/>
+          </a:xfrm>
+          <a:prstGeom prst="rect">
+            <a:avLst/>
+          </a:prstGeom>
+          <a:noFill/>
+          <a:ln/>
+        </p:spPr>
+        <p:txBody>
+          <a:bodyPr wrap="square" lIns="0" tIns="0" rIns="0" bIns="0" rtlCol="0" anchor="ctr"/>
+          <a:lstStyle/>
+          <a:p>
+            <a:pPr algn="ctr" indent="0" marL="0">
+              <a:buNone/>
+            </a:pPr>
+            <a:r>
+              <a:rPr lang="en-US" sz="900" b="1" dirty="0">
+                <a:solidFill>
+                  <a:srgbClr val="9D174D"/>
+                </a:solidFill>
+                <a:latin typeface="Trebuchet MS" pitchFamily="34" charset="0"/>
+                <a:ea typeface="Trebuchet MS" pitchFamily="34" charset="-122"/>
+                <a:cs typeface="Trebuchet MS" pitchFamily="34" charset="-120"/>
+              </a:rPr>
               <a:t>c</a:t>
             </a:r>
             <a:endParaRPr lang="en-US" sz="900" dirty="0"/>
@@ -33394,13 +32905,13 @@
       </p:sp>
       <p:sp>
         <p:nvSpPr>
-          <p:cNvPr id="37" name="Text 35"/>
-          <p:cNvSpPr/>
-          <p:nvPr/>
-        </p:nvSpPr>
-        <p:spPr>
-          <a:xfrm>
-            <a:off x="3293146" y="4572000"/>
+          <p:cNvPr id="44" name="Text 42"/>
+          <p:cNvSpPr/>
+          <p:nvPr/>
+        </p:nvSpPr>
+        <p:spPr>
+          <a:xfrm>
+            <a:off x="4850892" y="4572000"/>
             <a:ext cx="685800" cy="219456"/>
           </a:xfrm>
           <a:prstGeom prst="rect">
@@ -33433,13 +32944,13 @@
       </p:sp>
       <p:sp>
         <p:nvSpPr>
-          <p:cNvPr id="38" name="Shape 36"/>
-          <p:cNvSpPr/>
-          <p:nvPr/>
-        </p:nvSpPr>
-        <p:spPr>
-          <a:xfrm>
-            <a:off x="4331643" y="4169664"/>
+          <p:cNvPr id="45" name="Shape 43"/>
+          <p:cNvSpPr/>
+          <p:nvPr/>
+        </p:nvSpPr>
+        <p:spPr>
+          <a:xfrm>
+            <a:off x="5759577" y="4169664"/>
             <a:ext cx="685800" cy="384048"/>
           </a:xfrm>
           <a:prstGeom prst="rect">
@@ -33460,13 +32971,13 @@
       </p:sp>
       <p:sp>
         <p:nvSpPr>
-          <p:cNvPr id="39" name="Text 37"/>
-          <p:cNvSpPr/>
-          <p:nvPr/>
-        </p:nvSpPr>
-        <p:spPr>
-          <a:xfrm>
-            <a:off x="4331643" y="4169664"/>
+          <p:cNvPr id="46" name="Text 44"/>
+          <p:cNvSpPr/>
+          <p:nvPr/>
+        </p:nvSpPr>
+        <p:spPr>
+          <a:xfrm>
+            <a:off x="5759577" y="4169664"/>
             <a:ext cx="685800" cy="384048"/>
           </a:xfrm>
           <a:prstGeom prst="rect">
@@ -33499,13 +33010,13 @@
       </p:sp>
       <p:sp>
         <p:nvSpPr>
-          <p:cNvPr id="40" name="Shape 38"/>
-          <p:cNvSpPr/>
-          <p:nvPr/>
-        </p:nvSpPr>
-        <p:spPr>
-          <a:xfrm>
-            <a:off x="5370141" y="4169664"/>
+          <p:cNvPr id="47" name="Shape 45"/>
+          <p:cNvSpPr/>
+          <p:nvPr/>
+        </p:nvSpPr>
+        <p:spPr>
+          <a:xfrm>
+            <a:off x="6668262" y="4169664"/>
             <a:ext cx="685800" cy="384048"/>
           </a:xfrm>
           <a:prstGeom prst="rect">
@@ -33526,13 +33037,13 @@
       </p:sp>
       <p:sp>
         <p:nvSpPr>
-          <p:cNvPr id="41" name="Text 39"/>
-          <p:cNvSpPr/>
-          <p:nvPr/>
-        </p:nvSpPr>
-        <p:spPr>
-          <a:xfrm>
-            <a:off x="5370141" y="4169664"/>
+          <p:cNvPr id="48" name="Text 46"/>
+          <p:cNvSpPr/>
+          <p:nvPr/>
+        </p:nvSpPr>
+        <p:spPr>
+          <a:xfrm>
+            <a:off x="6668262" y="4169664"/>
             <a:ext cx="685800" cy="384048"/>
           </a:xfrm>
           <a:prstGeom prst="rect">
@@ -33565,13 +33076,13 @@
       </p:sp>
       <p:sp>
         <p:nvSpPr>
-          <p:cNvPr id="42" name="Shape 40"/>
-          <p:cNvSpPr/>
-          <p:nvPr/>
-        </p:nvSpPr>
-        <p:spPr>
-          <a:xfrm>
-            <a:off x="6408638" y="4169664"/>
+          <p:cNvPr id="49" name="Shape 47"/>
+          <p:cNvSpPr/>
+          <p:nvPr/>
+        </p:nvSpPr>
+        <p:spPr>
+          <a:xfrm>
+            <a:off x="7576947" y="4169664"/>
             <a:ext cx="685800" cy="384048"/>
           </a:xfrm>
           <a:prstGeom prst="rect">
@@ -33592,13 +33103,13 @@
       </p:sp>
       <p:sp>
         <p:nvSpPr>
-          <p:cNvPr id="43" name="Text 41"/>
-          <p:cNvSpPr/>
-          <p:nvPr/>
-        </p:nvSpPr>
-        <p:spPr>
-          <a:xfrm>
-            <a:off x="6408638" y="4169664"/>
+          <p:cNvPr id="50" name="Text 48"/>
+          <p:cNvSpPr/>
+          <p:nvPr/>
+        </p:nvSpPr>
+        <p:spPr>
+          <a:xfrm>
+            <a:off x="7576947" y="4169664"/>
             <a:ext cx="685800" cy="384048"/>
           </a:xfrm>
           <a:prstGeom prst="rect">
@@ -33623,73 +33134,7 @@
                 <a:ea typeface="Trebuchet MS" pitchFamily="34" charset="-122"/>
                 <a:cs typeface="Trebuchet MS" pitchFamily="34" charset="-120"/>
               </a:rPr>
-              <a:t>bb</a:t>
-            </a:r>
-            <a:endParaRPr lang="en-US" sz="900" dirty="0"/>
-          </a:p>
-        </p:txBody>
-      </p:sp>
-      <p:sp>
-        <p:nvSpPr>
-          <p:cNvPr id="44" name="Shape 42"/>
-          <p:cNvSpPr/>
-          <p:nvPr/>
-        </p:nvSpPr>
-        <p:spPr>
-          <a:xfrm>
-            <a:off x="7447135" y="4169664"/>
-            <a:ext cx="685800" cy="384048"/>
-          </a:xfrm>
-          <a:prstGeom prst="rect">
-            <a:avLst>
-              <a:gd name="adj" fmla="val 9524"/>
-            </a:avLst>
-          </a:prstGeom>
-          <a:solidFill>
-            <a:srgbClr val="FFFFFF"/>
-          </a:solidFill>
-          <a:ln w="12700">
-            <a:solidFill>
-              <a:srgbClr val="DB2777"/>
-            </a:solidFill>
-            <a:prstDash val="solid"/>
-          </a:ln>
-        </p:spPr>
-      </p:sp>
-      <p:sp>
-        <p:nvSpPr>
-          <p:cNvPr id="45" name="Text 43"/>
-          <p:cNvSpPr/>
-          <p:nvPr/>
-        </p:nvSpPr>
-        <p:spPr>
-          <a:xfrm>
-            <a:off x="7447135" y="4169664"/>
-            <a:ext cx="685800" cy="384048"/>
-          </a:xfrm>
-          <a:prstGeom prst="rect">
-            <a:avLst/>
-          </a:prstGeom>
-          <a:noFill/>
-          <a:ln/>
-        </p:spPr>
-        <p:txBody>
-          <a:bodyPr wrap="square" lIns="0" tIns="0" rIns="0" bIns="0" rtlCol="0" anchor="ctr"/>
-          <a:lstStyle/>
-          <a:p>
-            <a:pPr algn="ctr" indent="0" marL="0">
-              <a:buNone/>
-            </a:pPr>
-            <a:r>
-              <a:rPr lang="en-US" sz="900" b="1" dirty="0">
-                <a:solidFill>
-                  <a:srgbClr val="9D174D"/>
-                </a:solidFill>
-                <a:latin typeface="Trebuchet MS" pitchFamily="34" charset="0"/>
-                <a:ea typeface="Trebuchet MS" pitchFamily="34" charset="-122"/>
-                <a:cs typeface="Trebuchet MS" pitchFamily="34" charset="-120"/>
-              </a:rPr>
-              <a:t>le</a:t>
+              <a:t>be</a:t>
             </a:r>
             <a:endParaRPr lang="en-US" sz="900" dirty="0"/>
           </a:p>
@@ -37946,7 +37391,7 @@
                 <a:ea typeface="Calibri" pitchFamily="34" charset="-122"/>
                 <a:cs typeface="Calibri" pitchFamily="34" charset="-120"/>
               </a:rPr>
-              <a:t>1.  The root 'scrib' comes from Latin and means to write.</a:t>
+              <a:t>1.  The root 'scrib' originally came from the Greek word for speaking.</a:t>
             </a:r>
             <a:endParaRPr lang="en-US" sz="1300" dirty="0"/>
           </a:p>
@@ -37969,11 +37414,11 @@
             </a:avLst>
           </a:prstGeom>
           <a:solidFill>
-            <a:srgbClr val="DCFCE7"/>
-          </a:solidFill>
-          <a:ln w="12700">
-            <a:solidFill>
-              <a:srgbClr val="16A34A"/>
+            <a:srgbClr val="FEE2E2"/>
+          </a:solidFill>
+          <a:ln w="12700">
+            <a:solidFill>
+              <a:srgbClr val="DC2626"/>
             </a:solidFill>
             <a:prstDash val="solid"/>
           </a:ln>
@@ -38006,13 +37451,13 @@
             <a:r>
               <a:rPr lang="en-US" sz="1100" b="1" dirty="0">
                 <a:solidFill>
-                  <a:srgbClr val="16A34A"/>
+                  <a:srgbClr val="DC2626"/>
                 </a:solidFill>
                 <a:latin typeface="Trebuchet MS" pitchFamily="34" charset="0"/>
                 <a:ea typeface="Trebuchet MS" pitchFamily="34" charset="-122"/>
                 <a:cs typeface="Trebuchet MS" pitchFamily="34" charset="-120"/>
               </a:rPr>
-              <a:t>TRUE</a:t>
+              <a:t>FALSE</a:t>
             </a:r>
             <a:endParaRPr lang="en-US" sz="1100" dirty="0"/>
           </a:p>
@@ -38085,7 +37530,7 @@
                 <a:ea typeface="Calibri" pitchFamily="34" charset="-122"/>
                 <a:cs typeface="Calibri" pitchFamily="34" charset="-120"/>
               </a:rPr>
-              <a:t>2.  The word 'describe' means to erase writing from a surface.</a:t>
+              <a:t>2.  The root 'scrib' comes from a Latin word meaning to write.</a:t>
             </a:r>
             <a:endParaRPr lang="en-US" sz="1300" dirty="0"/>
           </a:p>
@@ -38108,11 +37553,11 @@
             </a:avLst>
           </a:prstGeom>
           <a:solidFill>
-            <a:srgbClr val="FEE2E2"/>
-          </a:solidFill>
-          <a:ln w="12700">
-            <a:solidFill>
-              <a:srgbClr val="DC2626"/>
+            <a:srgbClr val="DCFCE7"/>
+          </a:solidFill>
+          <a:ln w="12700">
+            <a:solidFill>
+              <a:srgbClr val="16A34A"/>
             </a:solidFill>
             <a:prstDash val="solid"/>
           </a:ln>
@@ -38145,13 +37590,13 @@
             <a:r>
               <a:rPr lang="en-US" sz="1100" b="1" dirty="0">
                 <a:solidFill>
-                  <a:srgbClr val="DC2626"/>
+                  <a:srgbClr val="16A34A"/>
                 </a:solidFill>
                 <a:latin typeface="Trebuchet MS" pitchFamily="34" charset="0"/>
                 <a:ea typeface="Trebuchet MS" pitchFamily="34" charset="-122"/>
                 <a:cs typeface="Trebuchet MS" pitchFamily="34" charset="-120"/>
               </a:rPr>
-              <a:t>FALSE</a:t>
+              <a:t>TRUE</a:t>
             </a:r>
             <a:endParaRPr lang="en-US" sz="1100" dirty="0"/>
           </a:p>
@@ -38224,7 +37669,7 @@
                 <a:ea typeface="Calibri" pitchFamily="34" charset="-122"/>
                 <a:cs typeface="Calibri" pitchFamily="34" charset="-120"/>
               </a:rPr>
-              <a:t>3.  The word 'prescribe' contains the prefix 'pre', meaning before.</a:t>
+              <a:t>3.  The word 'prescribe' contains the root 'scrib'.</a:t>
             </a:r>
             <a:endParaRPr lang="en-US" sz="1300" dirty="0"/>
           </a:p>
@@ -38363,7 +37808,7 @@
                 <a:ea typeface="Calibri" pitchFamily="34" charset="-122"/>
                 <a:cs typeface="Calibri" pitchFamily="34" charset="-120"/>
               </a:rPr>
-              <a:t>4.  The word 'subscribe' contains the root 'scrib', meaning to write.</a:t>
+              <a:t>4.  The prefix 'trans' in 'transcribe' means across or over.</a:t>
             </a:r>
             <a:endParaRPr lang="en-US" sz="1300" dirty="0"/>
           </a:p>
@@ -38502,7 +37947,7 @@
                 <a:ea typeface="Calibri" pitchFamily="34" charset="-122"/>
                 <a:cs typeface="Calibri" pitchFamily="34" charset="-120"/>
               </a:rPr>
-              <a:t>5.  The root 'scrib' comes from the Greek word for painting.</a:t>
+              <a:t>5.  The word 'subscribe' has nothing to do with writing or signing.</a:t>
             </a:r>
             <a:endParaRPr lang="en-US" sz="1300" dirty="0"/>
           </a:p>
@@ -41781,7 +41226,7 @@
                 <a:ea typeface="Calibri" pitchFamily="34" charset="-122"/>
                 <a:cs typeface="Calibri" pitchFamily="34" charset="-120"/>
               </a:rPr>
-              <a:t>A sharp tool used to scratch or write marks onto hard surfaces like metal.</a:t>
+              <a:t>A tool or person that scratches or marks writing onto a surface.</a:t>
             </a:r>
             <a:endParaRPr lang="en-US" sz="1200" dirty="0"/>
           </a:p>
@@ -41920,7 +41365,7 @@
                 <a:ea typeface="Calibri" pitchFamily="34" charset="-122"/>
                 <a:cs typeface="Calibri" pitchFamily="34" charset="-120"/>
               </a:rPr>
-              <a:t>To sign up regularly for something, like a magazine or an online channel.</a:t>
+              <a:t>To sign up for something, like a magazine or online channel.</a:t>
             </a:r>
             <a:endParaRPr lang="en-US" sz="1200" dirty="0"/>
           </a:p>
@@ -42059,7 +41504,7 @@
                 <a:ea typeface="Calibri" pitchFamily="34" charset="-122"/>
                 <a:cs typeface="Calibri" pitchFamily="34" charset="-120"/>
               </a:rPr>
-              <a:t>When a doctor writes out instructions for medicine you need to take.</a:t>
+              <a:t>When a doctor writes out a medicine for a patient to take.</a:t>
             </a:r>
             <a:endParaRPr lang="en-US" sz="1200" dirty="0"/>
           </a:p>
@@ -42198,7 +41643,7 @@
                 <a:ea typeface="Calibri" pitchFamily="34" charset="-122"/>
                 <a:cs typeface="Calibri" pitchFamily="34" charset="-120"/>
               </a:rPr>
-              <a:t>To write out exactly what someone says or what is written somewhere else.</a:t>
+              <a:t>To write down or copy something that has been said or recorded.</a:t>
             </a:r>
             <a:endParaRPr lang="en-US" sz="1200" dirty="0"/>
           </a:p>
@@ -42337,7 +41782,7 @@
                 <a:ea typeface="Calibri" pitchFamily="34" charset="-122"/>
                 <a:cs typeface="Calibri" pitchFamily="34" charset="-120"/>
               </a:rPr>
-              <a:t>To write or carve words onto a surface, like engraving a name on a trophy.</a:t>
+              <a:t>To write or carve words onto a surface, like a trophy or ring.</a:t>
             </a:r>
             <a:endParaRPr lang="en-US" sz="1200" dirty="0"/>
           </a:p>
@@ -42476,7 +41921,7 @@
                 <a:ea typeface="Calibri" pitchFamily="34" charset="-122"/>
                 <a:cs typeface="Calibri" pitchFamily="34" charset="-120"/>
               </a:rPr>
-              <a:t>To write or draw messy, quick marks that are hard to read.</a:t>
+              <a:t>To write or draw in a messy, careless way.</a:t>
             </a:r>
             <a:endParaRPr lang="en-US" sz="1200" dirty="0"/>
           </a:p>
@@ -42615,7 +42060,7 @@
                 <a:ea typeface="Calibri" pitchFamily="34" charset="-122"/>
                 <a:cs typeface="Calibri" pitchFamily="34" charset="-120"/>
               </a:rPr>
-              <a:t>To use words to tell someone what something looks like or what happened.</a:t>
+              <a:t>To tell someone what something is like using words.</a:t>
             </a:r>
             <a:endParaRPr lang="en-US" sz="1200" dirty="0"/>
           </a:p>
@@ -43110,7 +42555,7 @@
                 <a:ea typeface="Calibri" pitchFamily="34" charset="-122"/>
                 <a:cs typeface="Calibri" pitchFamily="34" charset="-120"/>
               </a:rPr>
-              <a:t>Can you describe the main character in your book using at least three describing words?</a:t>
+              <a:t>Can you describe what the main character looked like at the beginning of the story?</a:t>
             </a:r>
             <a:endParaRPr lang="en-US" sz="1500" dirty="0"/>
           </a:p>
@@ -43274,7 +42719,7 @@
                 <a:ea typeface="Calibri" pitchFamily="34" charset="-122"/>
                 <a:cs typeface="Calibri" pitchFamily="34" charset="-120"/>
               </a:rPr>
-              <a:t>The doctor will prescribe some medicine to help you feel better quickly.</a:t>
+              <a:t>The doctor will prescribe some medicine to help you feel better.</a:t>
             </a:r>
             <a:endParaRPr lang="en-US" sz="1500" dirty="0"/>
           </a:p>
@@ -43438,7 +42883,7 @@
                 <a:ea typeface="Calibri" pitchFamily="34" charset="-122"/>
                 <a:cs typeface="Calibri" pitchFamily="34" charset="-120"/>
               </a:rPr>
-              <a:t>My little brother loves to scribble all over his drawing book with coloured crayons.</a:t>
+              <a:t>She loved to scribble pictures in the margins of her notebook during lunch.</a:t>
             </a:r>
             <a:endParaRPr lang="en-US" sz="1500" dirty="0"/>
           </a:p>
